--- a/FA_챗봇_보고서.pptx
+++ b/FA_챗봇_보고서.pptx
@@ -3140,13 +3140,13 @@
         <p:spPr>
           <a:xfrm>
             <a:off x="0" y="0"/>
-            <a:ext cx="12188952" cy="684000"/>
+            <a:ext cx="12188952" cy="576000"/>
           </a:xfrm>
           <a:prstGeom prst="rect">
             <a:avLst/>
           </a:prstGeom>
           <a:solidFill>
-            <a:srgbClr val="1E3A5F"/>
+            <a:srgbClr val="1C3A5F"/>
           </a:solidFill>
           <a:ln>
             <a:noFill/>
@@ -3176,20 +3176,122 @@
       </p:sp>
       <p:sp>
         <p:nvSpPr>
-          <p:cNvPr id="4" name="Rectangle 3"/>
+          <p:cNvPr id="4" name="TextBox 3"/>
+          <p:cNvSpPr txBox="1"/>
+          <p:nvPr/>
+        </p:nvSpPr>
+        <p:spPr>
+          <a:xfrm>
+            <a:off x="251999" y="64800"/>
+            <a:ext cx="8288487" cy="306000"/>
+          </a:xfrm>
+          <a:prstGeom prst="rect">
+            <a:avLst/>
+          </a:prstGeom>
+          <a:noFill/>
+        </p:spPr>
+        <p:txBody>
+          <a:bodyPr wrap="square">
+            <a:spAutoFit/>
+          </a:bodyPr>
+          <a:lstStyle/>
+          <a:p>
+            <a:pPr algn="l"/>
+            <a:r>
+              <a:rPr sz="1800" b="1" i="0">
+                <a:solidFill>
+                  <a:srgbClr val="FFFFFF"/>
+                </a:solidFill>
+              </a:rPr>
+              <a:t>Field Analysis 빅데이터 분석 챗봇 서비스 자동화</a:t>
+            </a:r>
+          </a:p>
+        </p:txBody>
+      </p:sp>
+      <p:sp>
+        <p:nvSpPr>
+          <p:cNvPr id="5" name="TextBox 4"/>
+          <p:cNvSpPr txBox="1"/>
+          <p:nvPr/>
+        </p:nvSpPr>
+        <p:spPr>
+          <a:xfrm>
+            <a:off x="251999" y="349200"/>
+            <a:ext cx="4875580" cy="180000"/>
+          </a:xfrm>
+          <a:prstGeom prst="rect">
+            <a:avLst/>
+          </a:prstGeom>
+          <a:noFill/>
+        </p:spPr>
+        <p:txBody>
+          <a:bodyPr wrap="square">
+            <a:spAutoFit/>
+          </a:bodyPr>
+          <a:lstStyle/>
+          <a:p>
+            <a:pPr algn="l"/>
+            <a:r>
+              <a:rPr sz="950" b="0" i="0">
+                <a:solidFill>
+                  <a:srgbClr val="B0BED4"/>
+                </a:solidFill>
+              </a:rPr>
+              <a:t>(주)삼성전자서비스</a:t>
+            </a:r>
+          </a:p>
+        </p:txBody>
+      </p:sp>
+      <p:sp>
+        <p:nvSpPr>
+          <p:cNvPr id="6" name="TextBox 5"/>
+          <p:cNvSpPr txBox="1"/>
+          <p:nvPr/>
+        </p:nvSpPr>
+        <p:spPr>
+          <a:xfrm>
+            <a:off x="11396952" y="349200"/>
+            <a:ext cx="648000" cy="180000"/>
+          </a:xfrm>
+          <a:prstGeom prst="rect">
+            <a:avLst/>
+          </a:prstGeom>
+          <a:noFill/>
+        </p:spPr>
+        <p:txBody>
+          <a:bodyPr wrap="square">
+            <a:spAutoFit/>
+          </a:bodyPr>
+          <a:lstStyle/>
+          <a:p>
+            <a:pPr algn="r"/>
+            <a:r>
+              <a:rPr sz="950" b="0" i="0">
+                <a:solidFill>
+                  <a:srgbClr val="B0BED4"/>
+                </a:solidFill>
+              </a:rPr>
+              <a:t>2025</a:t>
+            </a:r>
+          </a:p>
+        </p:txBody>
+      </p:sp>
+      <p:sp>
+        <p:nvSpPr>
+          <p:cNvPr id="7" name="Rectangle 6"/>
           <p:cNvSpPr/>
           <p:nvPr/>
         </p:nvSpPr>
         <p:spPr>
           <a:xfrm>
-            <a:off x="0" y="0"/>
-            <a:ext cx="144000" cy="684000"/>
+            <a:off x="3331127" y="666000"/>
+            <a:ext cx="7200" cy="5976000"/>
           </a:xfrm>
           <a:prstGeom prst="rect">
             <a:avLst/>
           </a:prstGeom>
           <a:solidFill>
-            <a:srgbClr val="0078D4"/>
+            <a:srgbClr val="D8D8D8"/>
           </a:solidFill>
           <a:ln>
             <a:noFill/>
@@ -3219,122 +3321,20 @@
       </p:sp>
       <p:sp>
         <p:nvSpPr>
-          <p:cNvPr id="5" name="TextBox 4"/>
-          <p:cNvSpPr txBox="1"/>
-          <p:nvPr/>
-        </p:nvSpPr>
-        <p:spPr>
-          <a:xfrm>
-            <a:off x="288000" y="54000"/>
-            <a:ext cx="7922818" cy="324000"/>
-          </a:xfrm>
-          <a:prstGeom prst="rect">
-            <a:avLst/>
-          </a:prstGeom>
-          <a:noFill/>
-        </p:spPr>
-        <p:txBody>
-          <a:bodyPr wrap="square">
-            <a:spAutoFit/>
-          </a:bodyPr>
-          <a:lstStyle/>
-          <a:p>
-            <a:pPr algn="l"/>
-            <a:r>
-              <a:rPr sz="1800" b="1" i="0">
-                <a:solidFill>
-                  <a:srgbClr val="FFFFFF"/>
-                </a:solidFill>
-              </a:rPr>
-              <a:t>Field Analysis 빅데이터 분석 챗봇 서비스 자동화</a:t>
-            </a:r>
-          </a:p>
-        </p:txBody>
-      </p:sp>
-      <p:sp>
-        <p:nvSpPr>
-          <p:cNvPr id="6" name="TextBox 5"/>
-          <p:cNvSpPr txBox="1"/>
-          <p:nvPr/>
-        </p:nvSpPr>
-        <p:spPr>
-          <a:xfrm>
-            <a:off x="288000" y="360000"/>
-            <a:ext cx="6094476" cy="251999"/>
-          </a:xfrm>
-          <a:prstGeom prst="rect">
-            <a:avLst/>
-          </a:prstGeom>
-          <a:noFill/>
-        </p:spPr>
-        <p:txBody>
-          <a:bodyPr wrap="square">
-            <a:spAutoFit/>
-          </a:bodyPr>
-          <a:lstStyle/>
-          <a:p>
-            <a:pPr algn="l"/>
-            <a:r>
-              <a:rPr sz="1000" b="0" i="0">
-                <a:solidFill>
-                  <a:srgbClr val="BBCCEE"/>
-                </a:solidFill>
-              </a:rPr>
-              <a:t>(주)삼성전자서비스  |  2025</a:t>
-            </a:r>
-          </a:p>
-        </p:txBody>
-      </p:sp>
-      <p:sp>
-        <p:nvSpPr>
-          <p:cNvPr id="7" name="TextBox 6"/>
-          <p:cNvSpPr txBox="1"/>
-          <p:nvPr/>
-        </p:nvSpPr>
-        <p:spPr>
-          <a:xfrm>
-            <a:off x="8288487" y="162000"/>
-            <a:ext cx="3778575" cy="288000"/>
-          </a:xfrm>
-          <a:prstGeom prst="rect">
-            <a:avLst/>
-          </a:prstGeom>
-          <a:noFill/>
-        </p:spPr>
-        <p:txBody>
-          <a:bodyPr wrap="square">
-            <a:spAutoFit/>
-          </a:bodyPr>
-          <a:lstStyle/>
-          <a:p>
-            <a:pPr algn="r"/>
-            <a:r>
-              <a:rPr sz="1200" b="1" i="0">
-                <a:solidFill>
-                  <a:srgbClr val="88BBFF"/>
-                </a:solidFill>
-              </a:rPr>
-              <a:t>24/7 FA 분석 자동화 체계 구축</a:t>
-            </a:r>
-          </a:p>
-        </p:txBody>
-      </p:sp>
-      <p:sp>
-        <p:nvSpPr>
           <p:cNvPr id="8" name="Rectangle 7"/>
           <p:cNvSpPr/>
           <p:nvPr/>
         </p:nvSpPr>
         <p:spPr>
           <a:xfrm>
-            <a:off x="108000" y="756000"/>
-            <a:ext cx="3412906" cy="198000"/>
+            <a:off x="7827150" y="666000"/>
+            <a:ext cx="7200" cy="5976000"/>
           </a:xfrm>
           <a:prstGeom prst="rect">
             <a:avLst/>
           </a:prstGeom>
           <a:solidFill>
-            <a:srgbClr val="1E3A5F"/>
+            <a:srgbClr val="D8D8D8"/>
           </a:solidFill>
           <a:ln>
             <a:noFill/>
@@ -3364,54 +3364,20 @@
       </p:sp>
       <p:sp>
         <p:nvSpPr>
-          <p:cNvPr id="9" name="TextBox 8"/>
-          <p:cNvSpPr txBox="1"/>
-          <p:nvPr/>
-        </p:nvSpPr>
-        <p:spPr>
-          <a:xfrm>
-            <a:off x="162000" y="781200"/>
-            <a:ext cx="3340906" cy="158400"/>
-          </a:xfrm>
-          <a:prstGeom prst="rect">
-            <a:avLst/>
-          </a:prstGeom>
-          <a:noFill/>
-        </p:spPr>
-        <p:txBody>
-          <a:bodyPr wrap="square">
-            <a:spAutoFit/>
-          </a:bodyPr>
-          <a:lstStyle/>
-          <a:p>
-            <a:pPr algn="l"/>
-            <a:r>
-              <a:rPr sz="1100" b="1" i="0">
-                <a:solidFill>
-                  <a:srgbClr val="FFFFFF"/>
-                </a:solidFill>
-              </a:rPr>
-              <a:t>📋 추진 배경</a:t>
-            </a:r>
-          </a:p>
-        </p:txBody>
-      </p:sp>
-      <p:sp>
-        <p:nvSpPr>
-          <p:cNvPr id="10" name="Rectangle 9"/>
+          <p:cNvPr id="9" name="Rectangle 8"/>
           <p:cNvSpPr/>
           <p:nvPr/>
         </p:nvSpPr>
         <p:spPr>
           <a:xfrm>
-            <a:off x="3585706" y="756000"/>
-            <a:ext cx="4875580" cy="198000"/>
+            <a:off x="108000" y="720000"/>
+            <a:ext cx="64800" cy="198000"/>
           </a:xfrm>
           <a:prstGeom prst="rect">
             <a:avLst/>
           </a:prstGeom>
           <a:solidFill>
-            <a:srgbClr val="0078D4"/>
+            <a:srgbClr val="1C3A5F"/>
           </a:solidFill>
           <a:ln>
             <a:noFill/>
@@ -3441,14 +3407,14 @@
       </p:sp>
       <p:sp>
         <p:nvSpPr>
-          <p:cNvPr id="11" name="TextBox 10"/>
+          <p:cNvPr id="10" name="TextBox 9"/>
           <p:cNvSpPr txBox="1"/>
           <p:nvPr/>
         </p:nvSpPr>
         <p:spPr>
           <a:xfrm>
-            <a:off x="3639706" y="781200"/>
-            <a:ext cx="4803580" cy="158400"/>
+            <a:off x="216000" y="702000"/>
+            <a:ext cx="3061127" cy="234000"/>
           </a:xfrm>
           <a:prstGeom prst="rect">
             <a:avLst/>
@@ -3463,32 +3429,100 @@
           <a:p>
             <a:pPr algn="l"/>
             <a:r>
-              <a:rPr sz="1100" b="1" i="0">
-                <a:solidFill>
-                  <a:srgbClr val="FFFFFF"/>
+              <a:rPr sz="1050" b="1" i="0">
+                <a:solidFill>
+                  <a:srgbClr val="1C3A5F"/>
                 </a:solidFill>
               </a:rPr>
-              <a:t>⚙️ 시스템 구성</a:t>
-            </a:r>
-          </a:p>
-        </p:txBody>
-      </p:sp>
-      <p:sp>
-        <p:nvSpPr>
-          <p:cNvPr id="12" name="Rectangle 11"/>
+              <a:t>추진 배경</a:t>
+            </a:r>
+          </a:p>
+        </p:txBody>
+      </p:sp>
+      <p:sp>
+        <p:nvSpPr>
+          <p:cNvPr id="11" name="TextBox 10"/>
+          <p:cNvSpPr txBox="1"/>
+          <p:nvPr/>
+        </p:nvSpPr>
+        <p:spPr>
+          <a:xfrm>
+            <a:off x="180000" y="953999"/>
+            <a:ext cx="3097127" cy="324000"/>
+          </a:xfrm>
+          <a:prstGeom prst="rect">
+            <a:avLst/>
+          </a:prstGeom>
+          <a:noFill/>
+        </p:spPr>
+        <p:txBody>
+          <a:bodyPr wrap="square">
+            <a:spAutoFit/>
+          </a:bodyPr>
+          <a:lstStyle/>
+          <a:p>
+            <a:pPr algn="l"/>
+            <a:r>
+              <a:rPr sz="900" b="0" i="0">
+                <a:solidFill>
+                  <a:srgbClr val="404040"/>
+                </a:solidFill>
+              </a:rPr>
+              <a:t>• 서비스센터 고객 VOC 발생 시 FA가 현장 방문하여 문제 해결 지원</a:t>
+            </a:r>
+          </a:p>
+        </p:txBody>
+      </p:sp>
+      <p:sp>
+        <p:nvSpPr>
+          <p:cNvPr id="12" name="TextBox 11"/>
+          <p:cNvSpPr txBox="1"/>
+          <p:nvPr/>
+        </p:nvSpPr>
+        <p:spPr>
+          <a:xfrm>
+            <a:off x="180000" y="1285199"/>
+            <a:ext cx="3097127" cy="324000"/>
+          </a:xfrm>
+          <a:prstGeom prst="rect">
+            <a:avLst/>
+          </a:prstGeom>
+          <a:noFill/>
+        </p:spPr>
+        <p:txBody>
+          <a:bodyPr wrap="square">
+            <a:spAutoFit/>
+          </a:bodyPr>
+          <a:lstStyle/>
+          <a:p>
+            <a:pPr algn="l"/>
+            <a:r>
+              <a:rPr sz="900" b="0" i="0">
+                <a:solidFill>
+                  <a:srgbClr val="404040"/>
+                </a:solidFill>
+              </a:rPr>
+              <a:t>• 빅데이터 분석 결과를 사전 공유, 통신사 이관 이슈 조기 분류 →진성 단말 이슈에 집중</a:t>
+            </a:r>
+          </a:p>
+        </p:txBody>
+      </p:sp>
+      <p:sp>
+        <p:nvSpPr>
+          <p:cNvPr id="13" name="Rectangle 12"/>
           <p:cNvSpPr/>
           <p:nvPr/>
         </p:nvSpPr>
         <p:spPr>
           <a:xfrm>
-            <a:off x="8526087" y="756000"/>
-            <a:ext cx="3720464" cy="198000"/>
+            <a:off x="108000" y="1670399"/>
+            <a:ext cx="3169127" cy="7200"/>
           </a:xfrm>
           <a:prstGeom prst="rect">
             <a:avLst/>
           </a:prstGeom>
           <a:solidFill>
-            <a:srgbClr val="107C10"/>
+            <a:srgbClr val="D8D8D8"/>
           </a:solidFill>
           <a:ln>
             <a:noFill/>
@@ -3518,59 +3552,23 @@
       </p:sp>
       <p:sp>
         <p:nvSpPr>
-          <p:cNvPr id="13" name="TextBox 12"/>
-          <p:cNvSpPr txBox="1"/>
-          <p:nvPr/>
-        </p:nvSpPr>
-        <p:spPr>
-          <a:xfrm>
-            <a:off x="8580087" y="781200"/>
-            <a:ext cx="3648464" cy="158400"/>
-          </a:xfrm>
-          <a:prstGeom prst="rect">
-            <a:avLst/>
-          </a:prstGeom>
-          <a:noFill/>
-        </p:spPr>
-        <p:txBody>
-          <a:bodyPr wrap="square">
-            <a:spAutoFit/>
-          </a:bodyPr>
-          <a:lstStyle/>
-          <a:p>
-            <a:pPr algn="l"/>
-            <a:r>
-              <a:rPr sz="1100" b="1" i="0">
-                <a:solidFill>
-                  <a:srgbClr val="FFFFFF"/>
-                </a:solidFill>
-              </a:rPr>
-              <a:t>✅ 주요 기능 &amp; 기대 효과</a:t>
-            </a:r>
-          </a:p>
-        </p:txBody>
-      </p:sp>
-      <p:sp>
-        <p:nvSpPr>
           <p:cNvPr id="14" name="Rectangle 13"/>
           <p:cNvSpPr/>
           <p:nvPr/>
         </p:nvSpPr>
         <p:spPr>
           <a:xfrm>
-            <a:off x="108000" y="964800"/>
-            <a:ext cx="3412906" cy="5569200"/>
+            <a:off x="108000" y="1760399"/>
+            <a:ext cx="64800" cy="198000"/>
           </a:xfrm>
           <a:prstGeom prst="rect">
             <a:avLst/>
           </a:prstGeom>
           <a:solidFill>
-            <a:srgbClr val="F0F4FA"/>
+            <a:srgbClr val="1C3A5F"/>
           </a:solidFill>
-          <a:ln w="9525">
-            <a:solidFill>
-              <a:srgbClr val="E0E8F0"/>
-            </a:solidFill>
+          <a:ln>
+            <a:noFill/>
           </a:ln>
         </p:spPr>
         <p:style>
@@ -3597,20 +3595,258 @@
       </p:sp>
       <p:sp>
         <p:nvSpPr>
-          <p:cNvPr id="15" name="Rectangle 14"/>
+          <p:cNvPr id="15" name="TextBox 14"/>
+          <p:cNvSpPr txBox="1"/>
+          <p:nvPr/>
+        </p:nvSpPr>
+        <p:spPr>
+          <a:xfrm>
+            <a:off x="216000" y="1742399"/>
+            <a:ext cx="3061127" cy="234000"/>
+          </a:xfrm>
+          <a:prstGeom prst="rect">
+            <a:avLst/>
+          </a:prstGeom>
+          <a:noFill/>
+        </p:spPr>
+        <p:txBody>
+          <a:bodyPr wrap="square">
+            <a:spAutoFit/>
+          </a:bodyPr>
+          <a:lstStyle/>
+          <a:p>
+            <a:pPr algn="l"/>
+            <a:r>
+              <a:rPr sz="1050" b="1" i="0">
+                <a:solidFill>
+                  <a:srgbClr val="1C3A5F"/>
+                </a:solidFill>
+              </a:rPr>
+              <a:t>현황 및 문제점</a:t>
+            </a:r>
+          </a:p>
+        </p:txBody>
+      </p:sp>
+      <p:sp>
+        <p:nvSpPr>
+          <p:cNvPr id="16" name="TextBox 15"/>
+          <p:cNvSpPr txBox="1"/>
+          <p:nvPr/>
+        </p:nvSpPr>
+        <p:spPr>
+          <a:xfrm>
+            <a:off x="180000" y="1994398"/>
+            <a:ext cx="3097127" cy="144000"/>
+          </a:xfrm>
+          <a:prstGeom prst="rect">
+            <a:avLst/>
+          </a:prstGeom>
+          <a:noFill/>
+        </p:spPr>
+        <p:txBody>
+          <a:bodyPr wrap="square">
+            <a:spAutoFit/>
+          </a:bodyPr>
+          <a:lstStyle/>
+          <a:p>
+            <a:pPr algn="l"/>
+            <a:r>
+              <a:rPr sz="900" b="1" i="0">
+                <a:solidFill>
+                  <a:srgbClr val="404040"/>
+                </a:solidFill>
+              </a:rPr>
+              <a:t>주말·야간 대응 불가</a:t>
+            </a:r>
+          </a:p>
+        </p:txBody>
+      </p:sp>
+      <p:sp>
+        <p:nvSpPr>
+          <p:cNvPr id="17" name="TextBox 16"/>
+          <p:cNvSpPr txBox="1"/>
+          <p:nvPr/>
+        </p:nvSpPr>
+        <p:spPr>
+          <a:xfrm>
+            <a:off x="180000" y="2127598"/>
+            <a:ext cx="3097127" cy="144000"/>
+          </a:xfrm>
+          <a:prstGeom prst="rect">
+            <a:avLst/>
+          </a:prstGeom>
+          <a:noFill/>
+        </p:spPr>
+        <p:txBody>
+          <a:bodyPr wrap="square">
+            <a:spAutoFit/>
+          </a:bodyPr>
+          <a:lstStyle/>
+          <a:p>
+            <a:pPr algn="l"/>
+            <a:r>
+              <a:rPr sz="850" b="0" i="1">
+                <a:solidFill>
+                  <a:srgbClr val="888888"/>
+                </a:solidFill>
+              </a:rPr>
+              <a:t>본사 인력 부재 시 분석 지원 중단</a:t>
+            </a:r>
+          </a:p>
+        </p:txBody>
+      </p:sp>
+      <p:sp>
+        <p:nvSpPr>
+          <p:cNvPr id="18" name="TextBox 17"/>
+          <p:cNvSpPr txBox="1"/>
+          <p:nvPr/>
+        </p:nvSpPr>
+        <p:spPr>
+          <a:xfrm>
+            <a:off x="180000" y="2300398"/>
+            <a:ext cx="3097127" cy="144000"/>
+          </a:xfrm>
+          <a:prstGeom prst="rect">
+            <a:avLst/>
+          </a:prstGeom>
+          <a:noFill/>
+        </p:spPr>
+        <p:txBody>
+          <a:bodyPr wrap="square">
+            <a:spAutoFit/>
+          </a:bodyPr>
+          <a:lstStyle/>
+          <a:p>
+            <a:pPr algn="l"/>
+            <a:r>
+              <a:rPr sz="900" b="1" i="0">
+                <a:solidFill>
+                  <a:srgbClr val="404040"/>
+                </a:solidFill>
+              </a:rPr>
+              <a:t>수동 조회 대기시간</a:t>
+            </a:r>
+          </a:p>
+        </p:txBody>
+      </p:sp>
+      <p:sp>
+        <p:nvSpPr>
+          <p:cNvPr id="19" name="TextBox 18"/>
+          <p:cNvSpPr txBox="1"/>
+          <p:nvPr/>
+        </p:nvSpPr>
+        <p:spPr>
+          <a:xfrm>
+            <a:off x="180000" y="2433598"/>
+            <a:ext cx="3097127" cy="144000"/>
+          </a:xfrm>
+          <a:prstGeom prst="rect">
+            <a:avLst/>
+          </a:prstGeom>
+          <a:noFill/>
+        </p:spPr>
+        <p:txBody>
+          <a:bodyPr wrap="square">
+            <a:spAutoFit/>
+          </a:bodyPr>
+          <a:lstStyle/>
+          <a:p>
+            <a:pPr algn="l"/>
+            <a:r>
+              <a:rPr sz="850" b="0" i="1">
+                <a:solidFill>
+                  <a:srgbClr val="888888"/>
+                </a:solidFill>
+              </a:rPr>
+              <a:t>빅데이터 수동 조회로 현장 대응 지연</a:t>
+            </a:r>
+          </a:p>
+        </p:txBody>
+      </p:sp>
+      <p:sp>
+        <p:nvSpPr>
+          <p:cNvPr id="20" name="TextBox 19"/>
+          <p:cNvSpPr txBox="1"/>
+          <p:nvPr/>
+        </p:nvSpPr>
+        <p:spPr>
+          <a:xfrm>
+            <a:off x="180000" y="2606398"/>
+            <a:ext cx="3097127" cy="144000"/>
+          </a:xfrm>
+          <a:prstGeom prst="rect">
+            <a:avLst/>
+          </a:prstGeom>
+          <a:noFill/>
+        </p:spPr>
+        <p:txBody>
+          <a:bodyPr wrap="square">
+            <a:spAutoFit/>
+          </a:bodyPr>
+          <a:lstStyle/>
+          <a:p>
+            <a:pPr algn="l"/>
+            <a:r>
+              <a:rPr sz="900" b="1" i="0">
+                <a:solidFill>
+                  <a:srgbClr val="404040"/>
+                </a:solidFill>
+              </a:rPr>
+              <a:t>인력 비효율</a:t>
+            </a:r>
+          </a:p>
+        </p:txBody>
+      </p:sp>
+      <p:sp>
+        <p:nvSpPr>
+          <p:cNvPr id="21" name="TextBox 20"/>
+          <p:cNvSpPr txBox="1"/>
+          <p:nvPr/>
+        </p:nvSpPr>
+        <p:spPr>
+          <a:xfrm>
+            <a:off x="180000" y="2739598"/>
+            <a:ext cx="3097127" cy="144000"/>
+          </a:xfrm>
+          <a:prstGeom prst="rect">
+            <a:avLst/>
+          </a:prstGeom>
+          <a:noFill/>
+        </p:spPr>
+        <p:txBody>
+          <a:bodyPr wrap="square">
+            <a:spAutoFit/>
+          </a:bodyPr>
+          <a:lstStyle/>
+          <a:p>
+            <a:pPr algn="l"/>
+            <a:r>
+              <a:rPr sz="850" b="0" i="1">
+                <a:solidFill>
+                  <a:srgbClr val="888888"/>
+                </a:solidFill>
+              </a:rPr>
+              <a:t>반복 단순업무로 핵심 업무 집중 저하</a:t>
+            </a:r>
+          </a:p>
+        </p:txBody>
+      </p:sp>
+      <p:sp>
+        <p:nvSpPr>
+          <p:cNvPr id="22" name="Rectangle 21"/>
           <p:cNvSpPr/>
           <p:nvPr/>
         </p:nvSpPr>
         <p:spPr>
           <a:xfrm>
-            <a:off x="162000" y="1008000"/>
-            <a:ext cx="3304906" cy="136800"/>
+            <a:off x="108000" y="2966398"/>
+            <a:ext cx="3169127" cy="7200"/>
           </a:xfrm>
           <a:prstGeom prst="rect">
             <a:avLst/>
           </a:prstGeom>
           <a:solidFill>
-            <a:srgbClr val="D83B01"/>
+            <a:srgbClr val="D8D8D8"/>
           </a:solidFill>
           <a:ln>
             <a:noFill/>
@@ -3640,124 +3876,20 @@
       </p:sp>
       <p:sp>
         <p:nvSpPr>
-          <p:cNvPr id="16" name="TextBox 15"/>
-          <p:cNvSpPr txBox="1"/>
-          <p:nvPr/>
-        </p:nvSpPr>
-        <p:spPr>
-          <a:xfrm>
-            <a:off x="198000" y="1018800"/>
-            <a:ext cx="3304906" cy="115200"/>
-          </a:xfrm>
-          <a:prstGeom prst="rect">
-            <a:avLst/>
-          </a:prstGeom>
-          <a:noFill/>
-        </p:spPr>
-        <p:txBody>
-          <a:bodyPr wrap="square">
-            <a:spAutoFit/>
-          </a:bodyPr>
-          <a:lstStyle/>
-          <a:p>
-            <a:pPr algn="l"/>
-            <a:r>
-              <a:rPr sz="950" b="1" i="0">
-                <a:solidFill>
-                  <a:srgbClr val="FFFFFF"/>
-                </a:solidFill>
-              </a:rPr>
-              <a:t>현  황</a:t>
-            </a:r>
-          </a:p>
-        </p:txBody>
-      </p:sp>
-      <p:sp>
-        <p:nvSpPr>
-          <p:cNvPr id="17" name="TextBox 16"/>
-          <p:cNvSpPr txBox="1"/>
-          <p:nvPr/>
-        </p:nvSpPr>
-        <p:spPr>
-          <a:xfrm>
-            <a:off x="180000" y="1180800"/>
-            <a:ext cx="3304906" cy="306000"/>
-          </a:xfrm>
-          <a:prstGeom prst="rect">
-            <a:avLst/>
-          </a:prstGeom>
-          <a:noFill/>
-        </p:spPr>
-        <p:txBody>
-          <a:bodyPr wrap="square">
-            <a:spAutoFit/>
-          </a:bodyPr>
-          <a:lstStyle/>
-          <a:p>
-            <a:pPr algn="l"/>
-            <a:r>
-              <a:rPr sz="900" b="0" i="0">
-                <a:solidFill>
-                  <a:srgbClr val="1A1A1A"/>
-                </a:solidFill>
-              </a:rPr>
-              <a:t>• FA 현장 방문 전 빅데이터 분석 결과
-사전 공유로 체계적 대응 지원</a:t>
-            </a:r>
-          </a:p>
-        </p:txBody>
-      </p:sp>
-      <p:sp>
-        <p:nvSpPr>
-          <p:cNvPr id="18" name="TextBox 17"/>
-          <p:cNvSpPr txBox="1"/>
-          <p:nvPr/>
-        </p:nvSpPr>
-        <p:spPr>
-          <a:xfrm>
-            <a:off x="180000" y="1486800"/>
-            <a:ext cx="3304906" cy="306000"/>
-          </a:xfrm>
-          <a:prstGeom prst="rect">
-            <a:avLst/>
-          </a:prstGeom>
-          <a:noFill/>
-        </p:spPr>
-        <p:txBody>
-          <a:bodyPr wrap="square">
-            <a:spAutoFit/>
-          </a:bodyPr>
-          <a:lstStyle/>
-          <a:p>
-            <a:pPr algn="l"/>
-            <a:r>
-              <a:rPr sz="900" b="0" i="0">
-                <a:solidFill>
-                  <a:srgbClr val="1A1A1A"/>
-                </a:solidFill>
-              </a:rPr>
-              <a:t>• 통신사 이관 이슈 조기 분류 →
-진성 단말 이슈 집중 가능</a:t>
-            </a:r>
-          </a:p>
-        </p:txBody>
-      </p:sp>
-      <p:sp>
-        <p:nvSpPr>
-          <p:cNvPr id="19" name="Rectangle 18"/>
+          <p:cNvPr id="23" name="Rectangle 22"/>
           <p:cNvSpPr/>
           <p:nvPr/>
         </p:nvSpPr>
         <p:spPr>
           <a:xfrm>
-            <a:off x="162000" y="1846800"/>
-            <a:ext cx="3304906" cy="136800"/>
+            <a:off x="108000" y="3056398"/>
+            <a:ext cx="64800" cy="198000"/>
           </a:xfrm>
           <a:prstGeom prst="rect">
             <a:avLst/>
           </a:prstGeom>
           <a:solidFill>
-            <a:srgbClr val="C02020"/>
+            <a:srgbClr val="1C3A5F"/>
           </a:solidFill>
           <a:ln>
             <a:noFill/>
@@ -3787,14 +3919,14 @@
       </p:sp>
       <p:sp>
         <p:nvSpPr>
-          <p:cNvPr id="20" name="TextBox 19"/>
+          <p:cNvPr id="24" name="TextBox 23"/>
           <p:cNvSpPr txBox="1"/>
           <p:nvPr/>
         </p:nvSpPr>
         <p:spPr>
           <a:xfrm>
-            <a:off x="198000" y="1857600"/>
-            <a:ext cx="3304906" cy="115200"/>
+            <a:off x="216000" y="3038398"/>
+            <a:ext cx="3061127" cy="234000"/>
           </a:xfrm>
           <a:prstGeom prst="rect">
             <a:avLst/>
@@ -3809,26 +3941,26 @@
           <a:p>
             <a:pPr algn="l"/>
             <a:r>
-              <a:rPr sz="950" b="1" i="0">
-                <a:solidFill>
-                  <a:srgbClr val="FFFFFF"/>
+              <a:rPr sz="1050" b="1" i="0">
+                <a:solidFill>
+                  <a:srgbClr val="1C3A5F"/>
                 </a:solidFill>
               </a:rPr>
-              <a:t>문제점</a:t>
-            </a:r>
-          </a:p>
-        </p:txBody>
-      </p:sp>
-      <p:sp>
-        <p:nvSpPr>
-          <p:cNvPr id="21" name="TextBox 20"/>
+              <a:t>개선 목표</a:t>
+            </a:r>
+          </a:p>
+        </p:txBody>
+      </p:sp>
+      <p:sp>
+        <p:nvSpPr>
+          <p:cNvPr id="25" name="TextBox 24"/>
           <p:cNvSpPr txBox="1"/>
           <p:nvPr/>
         </p:nvSpPr>
         <p:spPr>
           <a:xfrm>
-            <a:off x="180000" y="2026800"/>
-            <a:ext cx="3304906" cy="234000"/>
+            <a:off x="180000" y="3290397"/>
+            <a:ext cx="3097127" cy="180000"/>
           </a:xfrm>
           <a:prstGeom prst="rect">
             <a:avLst/>
@@ -3843,26 +3975,26 @@
           <a:p>
             <a:pPr algn="l"/>
             <a:r>
-              <a:rPr sz="900" b="1" i="0">
-                <a:solidFill>
-                  <a:srgbClr val="C02020"/>
+              <a:rPr sz="900" b="0" i="0">
+                <a:solidFill>
+                  <a:srgbClr val="404040"/>
                 </a:solidFill>
               </a:rPr>
-              <a:t>⚠ 주말/야간 대응 불가</a:t>
-            </a:r>
-          </a:p>
-        </p:txBody>
-      </p:sp>
-      <p:sp>
-        <p:nvSpPr>
-          <p:cNvPr id="22" name="TextBox 21"/>
+              <a:t>▸  챗봇 기반 24/7 자동 분석 체계 구축</a:t>
+            </a:r>
+          </a:p>
+        </p:txBody>
+      </p:sp>
+      <p:sp>
+        <p:nvSpPr>
+          <p:cNvPr id="26" name="TextBox 25"/>
           <p:cNvSpPr txBox="1"/>
           <p:nvPr/>
         </p:nvSpPr>
         <p:spPr>
           <a:xfrm>
-            <a:off x="180000" y="2271600"/>
-            <a:ext cx="3304906" cy="234000"/>
+            <a:off x="180000" y="3470397"/>
+            <a:ext cx="3097127" cy="180000"/>
           </a:xfrm>
           <a:prstGeom prst="rect">
             <a:avLst/>
@@ -3877,26 +4009,26 @@
           <a:p>
             <a:pPr algn="l"/>
             <a:r>
-              <a:rPr sz="900" b="1" i="0">
-                <a:solidFill>
-                  <a:srgbClr val="C02020"/>
+              <a:rPr sz="900" b="0" i="0">
+                <a:solidFill>
+                  <a:srgbClr val="404040"/>
                 </a:solidFill>
               </a:rPr>
-              <a:t>⚠ 수동 조회 대기시간 발생</a:t>
-            </a:r>
-          </a:p>
-        </p:txBody>
-      </p:sp>
-      <p:sp>
-        <p:nvSpPr>
-          <p:cNvPr id="23" name="TextBox 22"/>
+              <a:t>▸  고객 VOC 해결율 향상</a:t>
+            </a:r>
+          </a:p>
+        </p:txBody>
+      </p:sp>
+      <p:sp>
+        <p:nvSpPr>
+          <p:cNvPr id="27" name="TextBox 26"/>
           <p:cNvSpPr txBox="1"/>
           <p:nvPr/>
         </p:nvSpPr>
         <p:spPr>
           <a:xfrm>
-            <a:off x="180000" y="2516400"/>
-            <a:ext cx="3304906" cy="234000"/>
+            <a:off x="180000" y="3650397"/>
+            <a:ext cx="3097127" cy="180000"/>
           </a:xfrm>
           <a:prstGeom prst="rect">
             <a:avLst/>
@@ -3911,32 +4043,66 @@
           <a:p>
             <a:pPr algn="l"/>
             <a:r>
-              <a:rPr sz="900" b="1" i="0">
-                <a:solidFill>
-                  <a:srgbClr val="C02020"/>
+              <a:rPr sz="900" b="0" i="0">
+                <a:solidFill>
+                  <a:srgbClr val="404040"/>
                 </a:solidFill>
               </a:rPr>
-              <a:t>⚠ 본사 인력 비효율</a:t>
-            </a:r>
-          </a:p>
-        </p:txBody>
-      </p:sp>
-      <p:sp>
-        <p:nvSpPr>
-          <p:cNvPr id="24" name="Rectangle 23"/>
+              <a:t>▸  본사 업무 효율성 제고</a:t>
+            </a:r>
+          </a:p>
+        </p:txBody>
+      </p:sp>
+      <p:sp>
+        <p:nvSpPr>
+          <p:cNvPr id="28" name="TextBox 27"/>
+          <p:cNvSpPr txBox="1"/>
+          <p:nvPr/>
+        </p:nvSpPr>
+        <p:spPr>
+          <a:xfrm>
+            <a:off x="180000" y="3830397"/>
+            <a:ext cx="3097127" cy="180000"/>
+          </a:xfrm>
+          <a:prstGeom prst="rect">
+            <a:avLst/>
+          </a:prstGeom>
+          <a:noFill/>
+        </p:spPr>
+        <p:txBody>
+          <a:bodyPr wrap="square">
+            <a:spAutoFit/>
+          </a:bodyPr>
+          <a:lstStyle/>
+          <a:p>
+            <a:pPr algn="l"/>
+            <a:r>
+              <a:rPr sz="900" b="0" i="0">
+                <a:solidFill>
+                  <a:srgbClr val="404040"/>
+                </a:solidFill>
+              </a:rPr>
+              <a:t>▸  FA 대응 비용 절감</a:t>
+            </a:r>
+          </a:p>
+        </p:txBody>
+      </p:sp>
+      <p:sp>
+        <p:nvSpPr>
+          <p:cNvPr id="29" name="Rectangle 28"/>
           <p:cNvSpPr/>
           <p:nvPr/>
         </p:nvSpPr>
         <p:spPr>
           <a:xfrm>
-            <a:off x="162000" y="2771999"/>
-            <a:ext cx="3304906" cy="136800"/>
+            <a:off x="3385127" y="720000"/>
+            <a:ext cx="64800" cy="198000"/>
           </a:xfrm>
           <a:prstGeom prst="rect">
             <a:avLst/>
           </a:prstGeom>
           <a:solidFill>
-            <a:srgbClr val="2D5A9E"/>
+            <a:srgbClr val="1C3A5F"/>
           </a:solidFill>
           <a:ln>
             <a:noFill/>
@@ -3966,14 +4132,14 @@
       </p:sp>
       <p:sp>
         <p:nvSpPr>
-          <p:cNvPr id="25" name="TextBox 24"/>
+          <p:cNvPr id="30" name="TextBox 29"/>
           <p:cNvSpPr txBox="1"/>
           <p:nvPr/>
         </p:nvSpPr>
         <p:spPr>
           <a:xfrm>
-            <a:off x="198000" y="2782800"/>
-            <a:ext cx="3304906" cy="115200"/>
+            <a:off x="3493127" y="702000"/>
+            <a:ext cx="4280022" cy="234000"/>
           </a:xfrm>
           <a:prstGeom prst="rect">
             <a:avLst/>
@@ -3988,138 +4154,36 @@
           <a:p>
             <a:pPr algn="l"/>
             <a:r>
-              <a:rPr sz="950" b="1" i="0">
-                <a:solidFill>
-                  <a:srgbClr val="FFFFFF"/>
+              <a:rPr sz="1050" b="1" i="0">
+                <a:solidFill>
+                  <a:srgbClr val="1C3A5F"/>
                 </a:solidFill>
               </a:rPr>
-              <a:t>개선 목표</a:t>
-            </a:r>
-          </a:p>
-        </p:txBody>
-      </p:sp>
-      <p:sp>
-        <p:nvSpPr>
-          <p:cNvPr id="26" name="TextBox 25"/>
-          <p:cNvSpPr txBox="1"/>
-          <p:nvPr/>
-        </p:nvSpPr>
-        <p:spPr>
-          <a:xfrm>
-            <a:off x="180000" y="2944800"/>
-            <a:ext cx="3304906" cy="208800"/>
-          </a:xfrm>
-          <a:prstGeom prst="rect">
-            <a:avLst/>
-          </a:prstGeom>
-          <a:noFill/>
-        </p:spPr>
-        <p:txBody>
-          <a:bodyPr wrap="square">
-            <a:spAutoFit/>
-          </a:bodyPr>
-          <a:lstStyle/>
-          <a:p>
-            <a:pPr algn="l"/>
-            <a:r>
-              <a:rPr sz="900" b="1" i="0">
-                <a:solidFill>
-                  <a:srgbClr val="1E3A5F"/>
-                </a:solidFill>
-              </a:rPr>
-              <a:t>▶ 챗봇 기반 24/7 자동 분석</a:t>
-            </a:r>
-          </a:p>
-        </p:txBody>
-      </p:sp>
-      <p:sp>
-        <p:nvSpPr>
-          <p:cNvPr id="27" name="TextBox 26"/>
-          <p:cNvSpPr txBox="1"/>
-          <p:nvPr/>
-        </p:nvSpPr>
-        <p:spPr>
-          <a:xfrm>
-            <a:off x="180000" y="3160800"/>
-            <a:ext cx="3304906" cy="208800"/>
-          </a:xfrm>
-          <a:prstGeom prst="rect">
-            <a:avLst/>
-          </a:prstGeom>
-          <a:noFill/>
-        </p:spPr>
-        <p:txBody>
-          <a:bodyPr wrap="square">
-            <a:spAutoFit/>
-          </a:bodyPr>
-          <a:lstStyle/>
-          <a:p>
-            <a:pPr algn="l"/>
-            <a:r>
-              <a:rPr sz="900" b="1" i="0">
-                <a:solidFill>
-                  <a:srgbClr val="1E3A5F"/>
-                </a:solidFill>
-              </a:rPr>
-              <a:t>▶ VOC 해결율 향상</a:t>
-            </a:r>
-          </a:p>
-        </p:txBody>
-      </p:sp>
-      <p:sp>
-        <p:nvSpPr>
-          <p:cNvPr id="28" name="TextBox 27"/>
-          <p:cNvSpPr txBox="1"/>
-          <p:nvPr/>
-        </p:nvSpPr>
-        <p:spPr>
-          <a:xfrm>
-            <a:off x="180000" y="3376800"/>
-            <a:ext cx="3304906" cy="208800"/>
-          </a:xfrm>
-          <a:prstGeom prst="rect">
-            <a:avLst/>
-          </a:prstGeom>
-          <a:noFill/>
-        </p:spPr>
-        <p:txBody>
-          <a:bodyPr wrap="square">
-            <a:spAutoFit/>
-          </a:bodyPr>
-          <a:lstStyle/>
-          <a:p>
-            <a:pPr algn="l"/>
-            <a:r>
-              <a:rPr sz="900" b="1" i="0">
-                <a:solidFill>
-                  <a:srgbClr val="1E3A5F"/>
-                </a:solidFill>
-              </a:rPr>
-              <a:t>▶ FA 대응 비용 절감</a:t>
-            </a:r>
-          </a:p>
-        </p:txBody>
-      </p:sp>
-      <p:sp>
-        <p:nvSpPr>
-          <p:cNvPr id="29" name="Rectangle 28"/>
+              <a:t>시스템 구성</a:t>
+            </a:r>
+          </a:p>
+        </p:txBody>
+      </p:sp>
+      <p:sp>
+        <p:nvSpPr>
+          <p:cNvPr id="31" name="Rectangle 30"/>
           <p:cNvSpPr/>
           <p:nvPr/>
         </p:nvSpPr>
         <p:spPr>
           <a:xfrm>
-            <a:off x="3585706" y="964800"/>
-            <a:ext cx="4875580" cy="5569200"/>
+            <a:off x="3529127" y="972000"/>
+            <a:ext cx="4100022" cy="295200"/>
           </a:xfrm>
           <a:prstGeom prst="rect">
             <a:avLst/>
           </a:prstGeom>
           <a:solidFill>
-            <a:srgbClr val="F0F4FA"/>
+            <a:srgbClr val="FFFFFF"/>
           </a:solidFill>
-          <a:ln w="9525">
+          <a:ln w="10160">
             <a:solidFill>
-              <a:srgbClr val="E0E8F0"/>
+              <a:srgbClr val="1C3A5F"/>
             </a:solidFill>
           </a:ln>
         </p:spPr>
@@ -4147,20 +4211,88 @@
       </p:sp>
       <p:sp>
         <p:nvSpPr>
-          <p:cNvPr id="30" name="Rounded Rectangle 29"/>
+          <p:cNvPr id="32" name="TextBox 31"/>
+          <p:cNvSpPr txBox="1"/>
+          <p:nvPr/>
+        </p:nvSpPr>
+        <p:spPr>
+          <a:xfrm>
+            <a:off x="3529127" y="1000800"/>
+            <a:ext cx="4100022" cy="180000"/>
+          </a:xfrm>
+          <a:prstGeom prst="rect">
+            <a:avLst/>
+          </a:prstGeom>
+          <a:noFill/>
+        </p:spPr>
+        <p:txBody>
+          <a:bodyPr wrap="square">
+            <a:spAutoFit/>
+          </a:bodyPr>
+          <a:lstStyle/>
+          <a:p>
+            <a:pPr algn="ctr"/>
+            <a:r>
+              <a:rPr sz="950" b="1" i="0">
+                <a:solidFill>
+                  <a:srgbClr val="1C3A5F"/>
+                </a:solidFill>
+              </a:rPr>
+              <a:t>👤  FA 담당자</a:t>
+            </a:r>
+          </a:p>
+        </p:txBody>
+      </p:sp>
+      <p:sp>
+        <p:nvSpPr>
+          <p:cNvPr id="33" name="TextBox 32"/>
+          <p:cNvSpPr txBox="1"/>
+          <p:nvPr/>
+        </p:nvSpPr>
+        <p:spPr>
+          <a:xfrm>
+            <a:off x="3529127" y="1170000"/>
+            <a:ext cx="4100022" cy="144000"/>
+          </a:xfrm>
+          <a:prstGeom prst="rect">
+            <a:avLst/>
+          </a:prstGeom>
+          <a:noFill/>
+        </p:spPr>
+        <p:txBody>
+          <a:bodyPr wrap="square">
+            <a:spAutoFit/>
+          </a:bodyPr>
+          <a:lstStyle/>
+          <a:p>
+            <a:pPr algn="ctr"/>
+            <a:r>
+              <a:rPr sz="800" b="0" i="0">
+                <a:solidFill>
+                  <a:srgbClr val="888888"/>
+                </a:solidFill>
+              </a:rPr>
+              <a:t>SN 입력 요청</a:t>
+            </a:r>
+          </a:p>
+        </p:txBody>
+      </p:sp>
+      <p:sp>
+        <p:nvSpPr>
+          <p:cNvPr id="34" name="Parallelogram 33"/>
           <p:cNvSpPr/>
           <p:nvPr/>
         </p:nvSpPr>
         <p:spPr>
           <a:xfrm>
-            <a:off x="5375496" y="1054800"/>
-            <a:ext cx="1296000" cy="306000"/>
-          </a:xfrm>
-          <a:prstGeom prst="roundRect">
+            <a:off x="5514338" y="1267200"/>
+            <a:ext cx="129600" cy="54432000000"/>
+          </a:xfrm>
+          <a:prstGeom prst="parallelogram">
             <a:avLst/>
           </a:prstGeom>
           <a:solidFill>
-            <a:srgbClr val="1E3A5F"/>
+            <a:srgbClr val="888888"/>
           </a:solidFill>
           <a:ln>
             <a:noFill/>
@@ -4181,40 +4313,68 @@
           </a:fontRef>
         </p:style>
         <p:txBody>
-          <a:bodyPr rtlCol="0" anchor="ctr" wrap="square"/>
+          <a:bodyPr rtlCol="0" anchor="ctr"/>
           <a:lstStyle/>
           <a:p>
             <a:pPr algn="ctr"/>
-            <a:r>
-              <a:rPr sz="1000" b="1">
-                <a:solidFill>
-                  <a:srgbClr val="FFFFFF"/>
+          </a:p>
+        </p:txBody>
+      </p:sp>
+      <p:sp>
+        <p:nvSpPr>
+          <p:cNvPr id="35" name="TextBox 34"/>
+          <p:cNvSpPr txBox="1"/>
+          <p:nvPr/>
+        </p:nvSpPr>
+        <p:spPr>
+          <a:xfrm>
+            <a:off x="5679938" y="1285200"/>
+            <a:ext cx="648000" cy="115200"/>
+          </a:xfrm>
+          <a:prstGeom prst="rect">
+            <a:avLst/>
+          </a:prstGeom>
+          <a:noFill/>
+        </p:spPr>
+        <p:txBody>
+          <a:bodyPr wrap="square">
+            <a:spAutoFit/>
+          </a:bodyPr>
+          <a:lstStyle/>
+          <a:p>
+            <a:pPr algn="l"/>
+            <a:r>
+              <a:rPr sz="750" b="0" i="0">
+                <a:solidFill>
+                  <a:srgbClr val="888888"/>
                 </a:solidFill>
               </a:rPr>
-              <a:t>👤 FA 담당자 (Knox Messenger)</a:t>
-            </a:r>
-          </a:p>
-        </p:txBody>
-      </p:sp>
-      <p:sp>
-        <p:nvSpPr>
-          <p:cNvPr id="31" name="Parallelogram 30"/>
+              <a:t>SN 입력</a:t>
+            </a:r>
+          </a:p>
+        </p:txBody>
+      </p:sp>
+      <p:sp>
+        <p:nvSpPr>
+          <p:cNvPr id="36" name="Rectangle 35"/>
           <p:cNvSpPr/>
           <p:nvPr/>
         </p:nvSpPr>
         <p:spPr>
           <a:xfrm>
-            <a:off x="5933496" y="1396800"/>
-            <a:ext cx="180000" cy="251999"/>
-          </a:xfrm>
-          <a:prstGeom prst="parallelogram">
+            <a:off x="3529127" y="1418400"/>
+            <a:ext cx="4100022" cy="295200"/>
+          </a:xfrm>
+          <a:prstGeom prst="rect">
             <a:avLst/>
           </a:prstGeom>
           <a:solidFill>
-            <a:srgbClr val="0078D4"/>
+            <a:srgbClr val="FFFFFF"/>
           </a:solidFill>
-          <a:ln>
-            <a:noFill/>
+          <a:ln w="10160">
+            <a:solidFill>
+              <a:srgbClr val="1C3A5F"/>
+            </a:solidFill>
           </a:ln>
         </p:spPr>
         <p:style>
@@ -4241,14 +4401,14 @@
       </p:sp>
       <p:sp>
         <p:nvSpPr>
-          <p:cNvPr id="32" name="TextBox 31"/>
+          <p:cNvPr id="37" name="TextBox 36"/>
           <p:cNvSpPr txBox="1"/>
           <p:nvPr/>
         </p:nvSpPr>
         <p:spPr>
           <a:xfrm>
-            <a:off x="6149495" y="1414800"/>
-            <a:ext cx="648000" cy="144000"/>
+            <a:off x="3529127" y="1447200"/>
+            <a:ext cx="4100022" cy="180000"/>
           </a:xfrm>
           <a:prstGeom prst="rect">
             <a:avLst/>
@@ -4261,34 +4421,68 @@
           </a:bodyPr>
           <a:lstStyle/>
           <a:p>
-            <a:pPr algn="l"/>
-            <a:r>
-              <a:rPr sz="800" b="1" i="0">
-                <a:solidFill>
-                  <a:srgbClr val="0078D4"/>
+            <a:pPr algn="ctr"/>
+            <a:r>
+              <a:rPr sz="950" b="1" i="0">
+                <a:solidFill>
+                  <a:srgbClr val="1C3A5F"/>
                 </a:solidFill>
               </a:rPr>
-              <a:t>SN 입력</a:t>
-            </a:r>
-          </a:p>
-        </p:txBody>
-      </p:sp>
-      <p:sp>
-        <p:nvSpPr>
-          <p:cNvPr id="33" name="Rounded Rectangle 32"/>
+              <a:t>💬  Knox Messenger</a:t>
+            </a:r>
+          </a:p>
+        </p:txBody>
+      </p:sp>
+      <p:sp>
+        <p:nvSpPr>
+          <p:cNvPr id="38" name="TextBox 37"/>
+          <p:cNvSpPr txBox="1"/>
+          <p:nvPr/>
+        </p:nvSpPr>
+        <p:spPr>
+          <a:xfrm>
+            <a:off x="3529127" y="1616400"/>
+            <a:ext cx="4100022" cy="144000"/>
+          </a:xfrm>
+          <a:prstGeom prst="rect">
+            <a:avLst/>
+          </a:prstGeom>
+          <a:noFill/>
+        </p:spPr>
+        <p:txBody>
+          <a:bodyPr wrap="square">
+            <a:spAutoFit/>
+          </a:bodyPr>
+          <a:lstStyle/>
+          <a:p>
+            <a:pPr algn="ctr"/>
+            <a:r>
+              <a:rPr sz="800" b="0" i="0">
+                <a:solidFill>
+                  <a:srgbClr val="888888"/>
+                </a:solidFill>
+              </a:rPr>
+              <a:t>메시지 전달</a:t>
+            </a:r>
+          </a:p>
+        </p:txBody>
+      </p:sp>
+      <p:sp>
+        <p:nvSpPr>
+          <p:cNvPr id="39" name="Parallelogram 38"/>
           <p:cNvSpPr/>
           <p:nvPr/>
         </p:nvSpPr>
         <p:spPr>
           <a:xfrm>
-            <a:off x="5375496" y="1684800"/>
-            <a:ext cx="1296000" cy="306000"/>
-          </a:xfrm>
-          <a:prstGeom prst="roundRect">
+            <a:off x="5514338" y="1713600"/>
+            <a:ext cx="129600" cy="54432000000"/>
+          </a:xfrm>
+          <a:prstGeom prst="parallelogram">
             <a:avLst/>
           </a:prstGeom>
           <a:solidFill>
-            <a:srgbClr val="008000"/>
+            <a:srgbClr val="888888"/>
           </a:solidFill>
           <a:ln>
             <a:noFill/>
@@ -4309,40 +4503,68 @@
           </a:fontRef>
         </p:style>
         <p:txBody>
-          <a:bodyPr rtlCol="0" anchor="ctr" wrap="square"/>
+          <a:bodyPr rtlCol="0" anchor="ctr"/>
           <a:lstStyle/>
           <a:p>
             <a:pPr algn="ctr"/>
-            <a:r>
-              <a:rPr sz="1000" b="1">
-                <a:solidFill>
-                  <a:srgbClr val="FFFFFF"/>
+          </a:p>
+        </p:txBody>
+      </p:sp>
+      <p:sp>
+        <p:nvSpPr>
+          <p:cNvPr id="40" name="TextBox 39"/>
+          <p:cNvSpPr txBox="1"/>
+          <p:nvPr/>
+        </p:nvSpPr>
+        <p:spPr>
+          <a:xfrm>
+            <a:off x="5679938" y="1731600"/>
+            <a:ext cx="648000" cy="115200"/>
+          </a:xfrm>
+          <a:prstGeom prst="rect">
+            <a:avLst/>
+          </a:prstGeom>
+          <a:noFill/>
+        </p:spPr>
+        <p:txBody>
+          <a:bodyPr wrap="square">
+            <a:spAutoFit/>
+          </a:bodyPr>
+          <a:lstStyle/>
+          <a:p>
+            <a:pPr algn="l"/>
+            <a:r>
+              <a:rPr sz="750" b="0" i="0">
+                <a:solidFill>
+                  <a:srgbClr val="888888"/>
                 </a:solidFill>
               </a:rPr>
-              <a:t>💬 Knox Messenger</a:t>
-            </a:r>
-          </a:p>
-        </p:txBody>
-      </p:sp>
-      <p:sp>
-        <p:nvSpPr>
-          <p:cNvPr id="34" name="Parallelogram 33"/>
+              <a:t>Webhook 수신</a:t>
+            </a:r>
+          </a:p>
+        </p:txBody>
+      </p:sp>
+      <p:sp>
+        <p:nvSpPr>
+          <p:cNvPr id="41" name="Rectangle 40"/>
           <p:cNvSpPr/>
           <p:nvPr/>
         </p:nvSpPr>
         <p:spPr>
           <a:xfrm>
-            <a:off x="5933496" y="2026800"/>
-            <a:ext cx="180000" cy="251999"/>
-          </a:xfrm>
-          <a:prstGeom prst="parallelogram">
+            <a:off x="3529127" y="1864800"/>
+            <a:ext cx="4100022" cy="295200"/>
+          </a:xfrm>
+          <a:prstGeom prst="rect">
             <a:avLst/>
           </a:prstGeom>
           <a:solidFill>
-            <a:srgbClr val="2D5A9E"/>
+            <a:srgbClr val="FFFFFF"/>
           </a:solidFill>
-          <a:ln>
-            <a:noFill/>
+          <a:ln w="10160">
+            <a:solidFill>
+              <a:srgbClr val="1C3A5F"/>
+            </a:solidFill>
           </a:ln>
         </p:spPr>
         <p:style>
@@ -4369,14 +4591,14 @@
       </p:sp>
       <p:sp>
         <p:nvSpPr>
-          <p:cNvPr id="35" name="TextBox 34"/>
+          <p:cNvPr id="42" name="TextBox 41"/>
           <p:cNvSpPr txBox="1"/>
           <p:nvPr/>
         </p:nvSpPr>
         <p:spPr>
           <a:xfrm>
-            <a:off x="6149495" y="2044800"/>
-            <a:ext cx="648000" cy="144000"/>
+            <a:off x="3529127" y="1893600"/>
+            <a:ext cx="4100022" cy="180000"/>
           </a:xfrm>
           <a:prstGeom prst="rect">
             <a:avLst/>
@@ -4389,34 +4611,68 @@
           </a:bodyPr>
           <a:lstStyle/>
           <a:p>
-            <a:pPr algn="l"/>
+            <a:pPr algn="ctr"/>
+            <a:r>
+              <a:rPr sz="950" b="1" i="0">
+                <a:solidFill>
+                  <a:srgbClr val="1C3A5F"/>
+                </a:solidFill>
+              </a:rPr>
+              <a:t>⚙  FA 챗봇 서비스</a:t>
+            </a:r>
+          </a:p>
+        </p:txBody>
+      </p:sp>
+      <p:sp>
+        <p:nvSpPr>
+          <p:cNvPr id="43" name="TextBox 42"/>
+          <p:cNvSpPr txBox="1"/>
+          <p:nvPr/>
+        </p:nvSpPr>
+        <p:spPr>
+          <a:xfrm>
+            <a:off x="3529127" y="2062800"/>
+            <a:ext cx="4100022" cy="144000"/>
+          </a:xfrm>
+          <a:prstGeom prst="rect">
+            <a:avLst/>
+          </a:prstGeom>
+          <a:noFill/>
+        </p:spPr>
+        <p:txBody>
+          <a:bodyPr wrap="square">
+            <a:spAutoFit/>
+          </a:bodyPr>
+          <a:lstStyle/>
+          <a:p>
+            <a:pPr algn="ctr"/>
             <a:r>
               <a:rPr sz="800" b="0" i="0">
                 <a:solidFill>
-                  <a:srgbClr val="2D5A9E"/>
+                  <a:srgbClr val="888888"/>
                 </a:solidFill>
               </a:rPr>
-              <a:t>Webhook</a:t>
-            </a:r>
-          </a:p>
-        </p:txBody>
-      </p:sp>
-      <p:sp>
-        <p:nvSpPr>
-          <p:cNvPr id="36" name="Rounded Rectangle 35"/>
+              <a:t>FastAPI 서버</a:t>
+            </a:r>
+          </a:p>
+        </p:txBody>
+      </p:sp>
+      <p:sp>
+        <p:nvSpPr>
+          <p:cNvPr id="44" name="Parallelogram 43"/>
           <p:cNvSpPr/>
           <p:nvPr/>
         </p:nvSpPr>
         <p:spPr>
           <a:xfrm>
-            <a:off x="5375496" y="2314800"/>
-            <a:ext cx="1296000" cy="306000"/>
-          </a:xfrm>
-          <a:prstGeom prst="roundRect">
+            <a:off x="5514338" y="2160000"/>
+            <a:ext cx="129600" cy="54432000000"/>
+          </a:xfrm>
+          <a:prstGeom prst="parallelogram">
             <a:avLst/>
           </a:prstGeom>
           <a:solidFill>
-            <a:srgbClr val="0078D4"/>
+            <a:srgbClr val="888888"/>
           </a:solidFill>
           <a:ln>
             <a:noFill/>
@@ -4437,40 +4693,68 @@
           </a:fontRef>
         </p:style>
         <p:txBody>
-          <a:bodyPr rtlCol="0" anchor="ctr" wrap="square"/>
+          <a:bodyPr rtlCol="0" anchor="ctr"/>
           <a:lstStyle/>
           <a:p>
             <a:pPr algn="ctr"/>
-            <a:r>
-              <a:rPr sz="1000" b="1">
-                <a:solidFill>
-                  <a:srgbClr val="FFFFFF"/>
+          </a:p>
+        </p:txBody>
+      </p:sp>
+      <p:sp>
+        <p:nvSpPr>
+          <p:cNvPr id="45" name="TextBox 44"/>
+          <p:cNvSpPr txBox="1"/>
+          <p:nvPr/>
+        </p:nvSpPr>
+        <p:spPr>
+          <a:xfrm>
+            <a:off x="5679938" y="2178000"/>
+            <a:ext cx="648000" cy="115200"/>
+          </a:xfrm>
+          <a:prstGeom prst="rect">
+            <a:avLst/>
+          </a:prstGeom>
+          <a:noFill/>
+        </p:spPr>
+        <p:txBody>
+          <a:bodyPr wrap="square">
+            <a:spAutoFit/>
+          </a:bodyPr>
+          <a:lstStyle/>
+          <a:p>
+            <a:pPr algn="l"/>
+            <a:r>
+              <a:rPr sz="750" b="0" i="0">
+                <a:solidFill>
+                  <a:srgbClr val="888888"/>
                 </a:solidFill>
               </a:rPr>
-              <a:t>⚙️ FA 챗봇 서비스 (FastAPI)</a:t>
-            </a:r>
-          </a:p>
-        </p:txBody>
-      </p:sp>
-      <p:sp>
-        <p:nvSpPr>
-          <p:cNvPr id="37" name="Parallelogram 36"/>
+              <a:t>자동 조회</a:t>
+            </a:r>
+          </a:p>
+        </p:txBody>
+      </p:sp>
+      <p:sp>
+        <p:nvSpPr>
+          <p:cNvPr id="46" name="Rectangle 45"/>
           <p:cNvSpPr/>
           <p:nvPr/>
         </p:nvSpPr>
         <p:spPr>
           <a:xfrm>
-            <a:off x="5933496" y="2656800"/>
-            <a:ext cx="180000" cy="251999"/>
-          </a:xfrm>
-          <a:prstGeom prst="parallelogram">
+            <a:off x="3529127" y="2311200"/>
+            <a:ext cx="4100022" cy="295200"/>
+          </a:xfrm>
+          <a:prstGeom prst="rect">
             <a:avLst/>
           </a:prstGeom>
           <a:solidFill>
-            <a:srgbClr val="6050A0"/>
+            <a:srgbClr val="FFFFFF"/>
           </a:solidFill>
-          <a:ln>
-            <a:noFill/>
+          <a:ln w="10160">
+            <a:solidFill>
+              <a:srgbClr val="1C3A5F"/>
+            </a:solidFill>
           </a:ln>
         </p:spPr>
         <p:style>
@@ -4497,14 +4781,14 @@
       </p:sp>
       <p:sp>
         <p:nvSpPr>
-          <p:cNvPr id="38" name="TextBox 37"/>
+          <p:cNvPr id="47" name="TextBox 46"/>
           <p:cNvSpPr txBox="1"/>
           <p:nvPr/>
         </p:nvSpPr>
         <p:spPr>
           <a:xfrm>
-            <a:off x="6149495" y="2674800"/>
-            <a:ext cx="648000" cy="144000"/>
+            <a:off x="3529127" y="2340000"/>
+            <a:ext cx="4100022" cy="180000"/>
           </a:xfrm>
           <a:prstGeom prst="rect">
             <a:avLst/>
@@ -4517,34 +4801,68 @@
           </a:bodyPr>
           <a:lstStyle/>
           <a:p>
-            <a:pPr algn="l"/>
+            <a:pPr algn="ctr"/>
+            <a:r>
+              <a:rPr sz="950" b="1" i="0">
+                <a:solidFill>
+                  <a:srgbClr val="1C3A5F"/>
+                </a:solidFill>
+              </a:rPr>
+              <a:t>🗄  빅데이터 포털</a:t>
+            </a:r>
+          </a:p>
+        </p:txBody>
+      </p:sp>
+      <p:sp>
+        <p:nvSpPr>
+          <p:cNvPr id="48" name="TextBox 47"/>
+          <p:cNvSpPr txBox="1"/>
+          <p:nvPr/>
+        </p:nvSpPr>
+        <p:spPr>
+          <a:xfrm>
+            <a:off x="3529127" y="2509200"/>
+            <a:ext cx="4100022" cy="144000"/>
+          </a:xfrm>
+          <a:prstGeom prst="rect">
+            <a:avLst/>
+          </a:prstGeom>
+          <a:noFill/>
+        </p:spPr>
+        <p:txBody>
+          <a:bodyPr wrap="square">
+            <a:spAutoFit/>
+          </a:bodyPr>
+          <a:lstStyle/>
+          <a:p>
+            <a:pPr algn="ctr"/>
             <a:r>
               <a:rPr sz="800" b="0" i="0">
                 <a:solidFill>
-                  <a:srgbClr val="6050A0"/>
+                  <a:srgbClr val="888888"/>
                 </a:solidFill>
               </a:rPr>
-              <a:t>자동 조회</a:t>
-            </a:r>
-          </a:p>
-        </p:txBody>
-      </p:sp>
-      <p:sp>
-        <p:nvSpPr>
-          <p:cNvPr id="39" name="Rounded Rectangle 38"/>
+              <a:t>자동 로그인·조회</a:t>
+            </a:r>
+          </a:p>
+        </p:txBody>
+      </p:sp>
+      <p:sp>
+        <p:nvSpPr>
+          <p:cNvPr id="49" name="Parallelogram 48"/>
           <p:cNvSpPr/>
           <p:nvPr/>
         </p:nvSpPr>
         <p:spPr>
           <a:xfrm>
-            <a:off x="5375496" y="2944800"/>
-            <a:ext cx="1296000" cy="306000"/>
-          </a:xfrm>
-          <a:prstGeom prst="roundRect">
+            <a:off x="5514338" y="2606400"/>
+            <a:ext cx="129600" cy="54432000000"/>
+          </a:xfrm>
+          <a:prstGeom prst="parallelogram">
             <a:avLst/>
           </a:prstGeom>
           <a:solidFill>
-            <a:srgbClr val="6050A0"/>
+            <a:srgbClr val="888888"/>
           </a:solidFill>
           <a:ln>
             <a:noFill/>
@@ -4565,31 +4883,23 @@
           </a:fontRef>
         </p:style>
         <p:txBody>
-          <a:bodyPr rtlCol="0" anchor="ctr" wrap="square"/>
+          <a:bodyPr rtlCol="0" anchor="ctr"/>
           <a:lstStyle/>
           <a:p>
             <a:pPr algn="ctr"/>
-            <a:r>
-              <a:rPr sz="1000" b="1">
-                <a:solidFill>
-                  <a:srgbClr val="FFFFFF"/>
-                </a:solidFill>
-              </a:rPr>
-              <a:t>🗄️ 삼성 빅데이터 포털</a:t>
-            </a:r>
-          </a:p>
-        </p:txBody>
-      </p:sp>
-      <p:sp>
-        <p:nvSpPr>
-          <p:cNvPr id="40" name="TextBox 39"/>
+          </a:p>
+        </p:txBody>
+      </p:sp>
+      <p:sp>
+        <p:nvSpPr>
+          <p:cNvPr id="50" name="TextBox 49"/>
           <p:cNvSpPr txBox="1"/>
           <p:nvPr/>
         </p:nvSpPr>
         <p:spPr>
           <a:xfrm>
-            <a:off x="3657706" y="2530799"/>
-            <a:ext cx="4767580" cy="144000"/>
+            <a:off x="5679938" y="2624400"/>
+            <a:ext cx="648000" cy="115200"/>
           </a:xfrm>
           <a:prstGeom prst="rect">
             <a:avLst/>
@@ -4602,72 +4912,38 @@
           </a:bodyPr>
           <a:lstStyle/>
           <a:p>
-            <a:pPr algn="ctr"/>
-            <a:r>
-              <a:rPr sz="800" b="1" i="0">
-                <a:solidFill>
-                  <a:srgbClr val="107C10"/>
+            <a:pPr algn="l"/>
+            <a:r>
+              <a:rPr sz="750" b="0" i="0">
+                <a:solidFill>
+                  <a:srgbClr val="888888"/>
                 </a:solidFill>
               </a:rPr>
-              <a:t>← 분석결과 자동 전송</a:t>
-            </a:r>
-          </a:p>
-        </p:txBody>
-      </p:sp>
-      <p:sp>
-        <p:nvSpPr>
-          <p:cNvPr id="41" name="TextBox 40"/>
-          <p:cNvSpPr txBox="1"/>
-          <p:nvPr/>
-        </p:nvSpPr>
-        <p:spPr>
-          <a:xfrm>
-            <a:off x="3657706" y="2170800"/>
-            <a:ext cx="4767580" cy="144000"/>
-          </a:xfrm>
-          <a:prstGeom prst="rect">
-            <a:avLst/>
-          </a:prstGeom>
-          <a:noFill/>
-        </p:spPr>
-        <p:txBody>
-          <a:bodyPr wrap="square">
-            <a:spAutoFit/>
-          </a:bodyPr>
-          <a:lstStyle/>
-          <a:p>
-            <a:pPr algn="ctr"/>
-            <a:r>
-              <a:rPr sz="800" b="1" i="0">
-                <a:solidFill>
-                  <a:srgbClr val="107C10"/>
-                </a:solidFill>
-              </a:rPr>
-              <a:t>← PDF/리포트 자동 생성·전달</a:t>
-            </a:r>
-          </a:p>
-        </p:txBody>
-      </p:sp>
-      <p:sp>
-        <p:nvSpPr>
-          <p:cNvPr id="42" name="Rectangle 41"/>
+              <a:t>결과 반환</a:t>
+            </a:r>
+          </a:p>
+        </p:txBody>
+      </p:sp>
+      <p:sp>
+        <p:nvSpPr>
+          <p:cNvPr id="51" name="Rectangle 50"/>
           <p:cNvSpPr/>
           <p:nvPr/>
         </p:nvSpPr>
         <p:spPr>
           <a:xfrm>
-            <a:off x="8526087" y="964800"/>
-            <a:ext cx="3720464" cy="5569200"/>
+            <a:off x="3529127" y="2757600"/>
+            <a:ext cx="4100022" cy="295200"/>
           </a:xfrm>
           <a:prstGeom prst="rect">
             <a:avLst/>
           </a:prstGeom>
           <a:solidFill>
-            <a:srgbClr val="F0F4FA"/>
+            <a:srgbClr val="FFFFFF"/>
           </a:solidFill>
-          <a:ln w="9525">
+          <a:ln w="10160">
             <a:solidFill>
-              <a:srgbClr val="E0E8F0"/>
+              <a:srgbClr val="1C3A5F"/>
             </a:solidFill>
           </a:ln>
         </p:spPr>
@@ -4695,25 +4971,91 @@
       </p:sp>
       <p:sp>
         <p:nvSpPr>
-          <p:cNvPr id="43" name="Rectangle 42"/>
+          <p:cNvPr id="52" name="TextBox 51"/>
+          <p:cNvSpPr txBox="1"/>
+          <p:nvPr/>
+        </p:nvSpPr>
+        <p:spPr>
+          <a:xfrm>
+            <a:off x="3529127" y="2786400"/>
+            <a:ext cx="4100022" cy="180000"/>
+          </a:xfrm>
+          <a:prstGeom prst="rect">
+            <a:avLst/>
+          </a:prstGeom>
+          <a:noFill/>
+        </p:spPr>
+        <p:txBody>
+          <a:bodyPr wrap="square">
+            <a:spAutoFit/>
+          </a:bodyPr>
+          <a:lstStyle/>
+          <a:p>
+            <a:pPr algn="ctr"/>
+            <a:r>
+              <a:rPr sz="950" b="1" i="0">
+                <a:solidFill>
+                  <a:srgbClr val="1C3A5F"/>
+                </a:solidFill>
+              </a:rPr>
+              <a:t>📄  분석 결과 생성</a:t>
+            </a:r>
+          </a:p>
+        </p:txBody>
+      </p:sp>
+      <p:sp>
+        <p:nvSpPr>
+          <p:cNvPr id="53" name="TextBox 52"/>
+          <p:cNvSpPr txBox="1"/>
+          <p:nvPr/>
+        </p:nvSpPr>
+        <p:spPr>
+          <a:xfrm>
+            <a:off x="3529127" y="2955600"/>
+            <a:ext cx="4100022" cy="144000"/>
+          </a:xfrm>
+          <a:prstGeom prst="rect">
+            <a:avLst/>
+          </a:prstGeom>
+          <a:noFill/>
+        </p:spPr>
+        <p:txBody>
+          <a:bodyPr wrap="square">
+            <a:spAutoFit/>
+          </a:bodyPr>
+          <a:lstStyle/>
+          <a:p>
+            <a:pPr algn="ctr"/>
+            <a:r>
+              <a:rPr sz="800" b="0" i="0">
+                <a:solidFill>
+                  <a:srgbClr val="888888"/>
+                </a:solidFill>
+              </a:rPr>
+              <a:t>PDF / HTML 리포트</a:t>
+            </a:r>
+          </a:p>
+        </p:txBody>
+      </p:sp>
+      <p:sp>
+        <p:nvSpPr>
+          <p:cNvPr id="54" name="Parallelogram 53"/>
           <p:cNvSpPr/>
           <p:nvPr/>
         </p:nvSpPr>
         <p:spPr>
           <a:xfrm>
-            <a:off x="8580087" y="1018800"/>
-            <a:ext cx="3612464" cy="576000"/>
-          </a:xfrm>
-          <a:prstGeom prst="rect">
+            <a:off x="5514338" y="3052800"/>
+            <a:ext cx="129600" cy="54432000000"/>
+          </a:xfrm>
+          <a:prstGeom prst="parallelogram">
             <a:avLst/>
           </a:prstGeom>
           <a:solidFill>
-            <a:srgbClr val="FFFFFF"/>
+            <a:srgbClr val="888888"/>
           </a:solidFill>
-          <a:ln w="15240">
-            <a:solidFill>
-              <a:srgbClr val="1E3A5F"/>
-            </a:solidFill>
+          <a:ln>
+            <a:noFill/>
           </a:ln>
         </p:spPr>
         <p:style>
@@ -4740,23 +5082,59 @@
       </p:sp>
       <p:sp>
         <p:nvSpPr>
-          <p:cNvPr id="44" name="Rectangle 43"/>
+          <p:cNvPr id="55" name="TextBox 54"/>
+          <p:cNvSpPr txBox="1"/>
+          <p:nvPr/>
+        </p:nvSpPr>
+        <p:spPr>
+          <a:xfrm>
+            <a:off x="5679938" y="3070800"/>
+            <a:ext cx="648000" cy="115200"/>
+          </a:xfrm>
+          <a:prstGeom prst="rect">
+            <a:avLst/>
+          </a:prstGeom>
+          <a:noFill/>
+        </p:spPr>
+        <p:txBody>
+          <a:bodyPr wrap="square">
+            <a:spAutoFit/>
+          </a:bodyPr>
+          <a:lstStyle/>
+          <a:p>
+            <a:pPr algn="l"/>
+            <a:r>
+              <a:rPr sz="750" b="0" i="0">
+                <a:solidFill>
+                  <a:srgbClr val="888888"/>
+                </a:solidFill>
+              </a:rPr>
+              <a:t>자동 전송</a:t>
+            </a:r>
+          </a:p>
+        </p:txBody>
+      </p:sp>
+      <p:sp>
+        <p:nvSpPr>
+          <p:cNvPr id="56" name="Rectangle 55"/>
           <p:cNvSpPr/>
           <p:nvPr/>
         </p:nvSpPr>
         <p:spPr>
           <a:xfrm>
-            <a:off x="8580087" y="1018800"/>
-            <a:ext cx="90000" cy="576000"/>
+            <a:off x="3529127" y="3204000"/>
+            <a:ext cx="4100022" cy="295200"/>
           </a:xfrm>
           <a:prstGeom prst="rect">
             <a:avLst/>
           </a:prstGeom>
           <a:solidFill>
-            <a:srgbClr val="1E3A5F"/>
+            <a:srgbClr val="FFFFFF"/>
           </a:solidFill>
-          <a:ln>
-            <a:noFill/>
+          <a:ln w="10160">
+            <a:solidFill>
+              <a:srgbClr val="1C3A5F"/>
+            </a:solidFill>
           </a:ln>
         </p:spPr>
         <p:style>
@@ -4783,14 +5161,14 @@
       </p:sp>
       <p:sp>
         <p:nvSpPr>
-          <p:cNvPr id="45" name="TextBox 44"/>
+          <p:cNvPr id="57" name="TextBox 56"/>
           <p:cNvSpPr txBox="1"/>
           <p:nvPr/>
         </p:nvSpPr>
         <p:spPr>
           <a:xfrm>
-            <a:off x="8724087" y="1054800"/>
-            <a:ext cx="3468465" cy="162000"/>
+            <a:off x="3529127" y="3232800"/>
+            <a:ext cx="4100022" cy="180000"/>
           </a:xfrm>
           <a:prstGeom prst="rect">
             <a:avLst/>
@@ -4803,28 +5181,28 @@
           </a:bodyPr>
           <a:lstStyle/>
           <a:p>
-            <a:pPr algn="l"/>
-            <a:r>
-              <a:rPr sz="1000" b="1" i="0">
-                <a:solidFill>
-                  <a:srgbClr val="1E3A5F"/>
+            <a:pPr algn="ctr"/>
+            <a:r>
+              <a:rPr sz="950" b="1" i="0">
+                <a:solidFill>
+                  <a:srgbClr val="1C3A5F"/>
                 </a:solidFill>
               </a:rPr>
-              <a:t>SN 기반 자동 분석</a:t>
-            </a:r>
-          </a:p>
-        </p:txBody>
-      </p:sp>
-      <p:sp>
-        <p:nvSpPr>
-          <p:cNvPr id="46" name="TextBox 45"/>
+              <a:t>💬  Knox Messenger</a:t>
+            </a:r>
+          </a:p>
+        </p:txBody>
+      </p:sp>
+      <p:sp>
+        <p:nvSpPr>
+          <p:cNvPr id="58" name="TextBox 57"/>
           <p:cNvSpPr txBox="1"/>
           <p:nvPr/>
         </p:nvSpPr>
         <p:spPr>
           <a:xfrm>
-            <a:off x="8724087" y="1216800"/>
-            <a:ext cx="3468465" cy="360000"/>
+            <a:off x="3529127" y="3402000"/>
+            <a:ext cx="4100022" cy="144000"/>
           </a:xfrm>
           <a:prstGeom prst="rect">
             <a:avLst/>
@@ -4837,40 +5215,37 @@
           </a:bodyPr>
           <a:lstStyle/>
           <a:p>
-            <a:pPr algn="l"/>
-            <a:r>
-              <a:rPr sz="900" b="0" i="0">
-                <a:solidFill>
-                  <a:srgbClr val="555555"/>
+            <a:pPr algn="ctr"/>
+            <a:r>
+              <a:rPr sz="800" b="0" i="0">
+                <a:solidFill>
+                  <a:srgbClr val="888888"/>
                 </a:solidFill>
               </a:rPr>
-              <a:t>Knox Messenger 챗봇으로 SN 입력
-Adaptive Card UI · 다중 SN 지원</a:t>
-            </a:r>
-          </a:p>
-        </p:txBody>
-      </p:sp>
-      <p:sp>
-        <p:nvSpPr>
-          <p:cNvPr id="47" name="Rectangle 46"/>
+              <a:t>결과 메시지 수신</a:t>
+            </a:r>
+          </a:p>
+        </p:txBody>
+      </p:sp>
+      <p:sp>
+        <p:nvSpPr>
+          <p:cNvPr id="59" name="Parallelogram 58"/>
           <p:cNvSpPr/>
           <p:nvPr/>
         </p:nvSpPr>
         <p:spPr>
           <a:xfrm>
-            <a:off x="8580087" y="1648800"/>
-            <a:ext cx="3612464" cy="576000"/>
-          </a:xfrm>
-          <a:prstGeom prst="rect">
+            <a:off x="5514338" y="3499200"/>
+            <a:ext cx="129600" cy="54432000000"/>
+          </a:xfrm>
+          <a:prstGeom prst="parallelogram">
             <a:avLst/>
           </a:prstGeom>
           <a:solidFill>
-            <a:srgbClr val="FFFFFF"/>
+            <a:srgbClr val="888888"/>
           </a:solidFill>
-          <a:ln w="15240">
-            <a:solidFill>
-              <a:srgbClr val="0078D4"/>
-            </a:solidFill>
+          <a:ln>
+            <a:noFill/>
           </a:ln>
         </p:spPr>
         <p:style>
@@ -4897,23 +5272,59 @@
       </p:sp>
       <p:sp>
         <p:nvSpPr>
-          <p:cNvPr id="48" name="Rectangle 47"/>
+          <p:cNvPr id="60" name="TextBox 59"/>
+          <p:cNvSpPr txBox="1"/>
+          <p:nvPr/>
+        </p:nvSpPr>
+        <p:spPr>
+          <a:xfrm>
+            <a:off x="5679938" y="3517200"/>
+            <a:ext cx="648000" cy="115200"/>
+          </a:xfrm>
+          <a:prstGeom prst="rect">
+            <a:avLst/>
+          </a:prstGeom>
+          <a:noFill/>
+        </p:spPr>
+        <p:txBody>
+          <a:bodyPr wrap="square">
+            <a:spAutoFit/>
+          </a:bodyPr>
+          <a:lstStyle/>
+          <a:p>
+            <a:pPr algn="l"/>
+            <a:r>
+              <a:rPr sz="750" b="0" i="0">
+                <a:solidFill>
+                  <a:srgbClr val="888888"/>
+                </a:solidFill>
+              </a:rPr>
+              <a:t>알림 수신</a:t>
+            </a:r>
+          </a:p>
+        </p:txBody>
+      </p:sp>
+      <p:sp>
+        <p:nvSpPr>
+          <p:cNvPr id="61" name="Rectangle 60"/>
           <p:cNvSpPr/>
           <p:nvPr/>
         </p:nvSpPr>
         <p:spPr>
           <a:xfrm>
-            <a:off x="8580087" y="1648800"/>
-            <a:ext cx="90000" cy="576000"/>
+            <a:off x="3529127" y="3650400"/>
+            <a:ext cx="4100022" cy="295200"/>
           </a:xfrm>
           <a:prstGeom prst="rect">
             <a:avLst/>
           </a:prstGeom>
           <a:solidFill>
-            <a:srgbClr val="0078D4"/>
+            <a:srgbClr val="FFFFFF"/>
           </a:solidFill>
-          <a:ln>
-            <a:noFill/>
+          <a:ln w="10160">
+            <a:solidFill>
+              <a:srgbClr val="1C3A5F"/>
+            </a:solidFill>
           </a:ln>
         </p:spPr>
         <p:style>
@@ -4940,14 +5351,14 @@
       </p:sp>
       <p:sp>
         <p:nvSpPr>
-          <p:cNvPr id="49" name="TextBox 48"/>
+          <p:cNvPr id="62" name="TextBox 61"/>
           <p:cNvSpPr txBox="1"/>
           <p:nvPr/>
         </p:nvSpPr>
         <p:spPr>
           <a:xfrm>
-            <a:off x="8724087" y="1684800"/>
-            <a:ext cx="3468465" cy="162000"/>
+            <a:off x="3529127" y="3679200"/>
+            <a:ext cx="4100022" cy="180000"/>
           </a:xfrm>
           <a:prstGeom prst="rect">
             <a:avLst/>
@@ -4960,28 +5371,28 @@
           </a:bodyPr>
           <a:lstStyle/>
           <a:p>
-            <a:pPr algn="l"/>
-            <a:r>
-              <a:rPr sz="1000" b="1" i="0">
-                <a:solidFill>
-                  <a:srgbClr val="0078D4"/>
+            <a:pPr algn="ctr"/>
+            <a:r>
+              <a:rPr sz="950" b="1" i="0">
+                <a:solidFill>
+                  <a:srgbClr val="1C3A5F"/>
                 </a:solidFill>
               </a:rPr>
-              <a:t>빅데이터 자동 조회</a:t>
-            </a:r>
-          </a:p>
-        </p:txBody>
-      </p:sp>
-      <p:sp>
-        <p:nvSpPr>
-          <p:cNvPr id="50" name="TextBox 49"/>
+              <a:t>👤  FA 담당자</a:t>
+            </a:r>
+          </a:p>
+        </p:txBody>
+      </p:sp>
+      <p:sp>
+        <p:nvSpPr>
+          <p:cNvPr id="63" name="TextBox 62"/>
           <p:cNvSpPr txBox="1"/>
           <p:nvPr/>
         </p:nvSpPr>
         <p:spPr>
           <a:xfrm>
-            <a:off x="8724087" y="1846800"/>
-            <a:ext cx="3468465" cy="360000"/>
+            <a:off x="3529127" y="3848400"/>
+            <a:ext cx="4100022" cy="144000"/>
           </a:xfrm>
           <a:prstGeom prst="rect">
             <a:avLst/>
@@ -4994,40 +5405,37 @@
           </a:bodyPr>
           <a:lstStyle/>
           <a:p>
-            <a:pPr algn="l"/>
-            <a:r>
-              <a:rPr sz="900" b="0" i="0">
-                <a:solidFill>
-                  <a:srgbClr val="555555"/>
+            <a:pPr algn="ctr"/>
+            <a:r>
+              <a:rPr sz="800" b="0" i="0">
+                <a:solidFill>
+                  <a:srgbClr val="888888"/>
                 </a:solidFill>
               </a:rPr>
-              <a:t>포털 자동 로그인·조회 (Playwright)
-병렬 처리로 분석 속도 최적화</a:t>
-            </a:r>
-          </a:p>
-        </p:txBody>
-      </p:sp>
-      <p:sp>
-        <p:nvSpPr>
-          <p:cNvPr id="51" name="Rectangle 50"/>
+              <a:t>현장 대응 준비</a:t>
+            </a:r>
+          </a:p>
+        </p:txBody>
+      </p:sp>
+      <p:sp>
+        <p:nvSpPr>
+          <p:cNvPr id="64" name="Rectangle 63"/>
           <p:cNvSpPr/>
           <p:nvPr/>
         </p:nvSpPr>
         <p:spPr>
           <a:xfrm>
-            <a:off x="8580087" y="2278800"/>
-            <a:ext cx="3612464" cy="576000"/>
+            <a:off x="7881150" y="720000"/>
+            <a:ext cx="64800" cy="198000"/>
           </a:xfrm>
           <a:prstGeom prst="rect">
             <a:avLst/>
           </a:prstGeom>
           <a:solidFill>
-            <a:srgbClr val="FFFFFF"/>
+            <a:srgbClr val="1C3A5F"/>
           </a:solidFill>
-          <a:ln w="15240">
-            <a:solidFill>
-              <a:srgbClr val="107C10"/>
-            </a:solidFill>
+          <a:ln>
+            <a:noFill/>
           </a:ln>
         </p:spPr>
         <p:style>
@@ -5054,20 +5462,54 @@
       </p:sp>
       <p:sp>
         <p:nvSpPr>
-          <p:cNvPr id="52" name="Rectangle 51"/>
+          <p:cNvPr id="65" name="TextBox 64"/>
+          <p:cNvSpPr txBox="1"/>
+          <p:nvPr/>
+        </p:nvSpPr>
+        <p:spPr>
+          <a:xfrm>
+            <a:off x="7989150" y="702000"/>
+            <a:ext cx="4091801" cy="234000"/>
+          </a:xfrm>
+          <a:prstGeom prst="rect">
+            <a:avLst/>
+          </a:prstGeom>
+          <a:noFill/>
+        </p:spPr>
+        <p:txBody>
+          <a:bodyPr wrap="square">
+            <a:spAutoFit/>
+          </a:bodyPr>
+          <a:lstStyle/>
+          <a:p>
+            <a:pPr algn="l"/>
+            <a:r>
+              <a:rPr sz="1050" b="1" i="0">
+                <a:solidFill>
+                  <a:srgbClr val="1C3A5F"/>
+                </a:solidFill>
+              </a:rPr>
+              <a:t>주요 기능</a:t>
+            </a:r>
+          </a:p>
+        </p:txBody>
+      </p:sp>
+      <p:sp>
+        <p:nvSpPr>
+          <p:cNvPr id="66" name="Rectangle 65"/>
           <p:cNvSpPr/>
           <p:nvPr/>
         </p:nvSpPr>
         <p:spPr>
           <a:xfrm>
-            <a:off x="8580087" y="2278800"/>
-            <a:ext cx="90000" cy="576000"/>
+            <a:off x="7935150" y="989999"/>
+            <a:ext cx="36000" cy="180000"/>
           </a:xfrm>
           <a:prstGeom prst="rect">
             <a:avLst/>
           </a:prstGeom>
           <a:solidFill>
-            <a:srgbClr val="107C10"/>
+            <a:srgbClr val="D8D8D8"/>
           </a:solidFill>
           <a:ln>
             <a:noFill/>
@@ -5097,14 +5539,14 @@
       </p:sp>
       <p:sp>
         <p:nvSpPr>
-          <p:cNvPr id="53" name="TextBox 52"/>
+          <p:cNvPr id="67" name="TextBox 66"/>
           <p:cNvSpPr txBox="1"/>
           <p:nvPr/>
         </p:nvSpPr>
         <p:spPr>
           <a:xfrm>
-            <a:off x="8724087" y="2314800"/>
-            <a:ext cx="3468465" cy="162000"/>
+            <a:off x="8025150" y="971999"/>
+            <a:ext cx="4037801" cy="162000"/>
           </a:xfrm>
           <a:prstGeom prst="rect">
             <a:avLst/>
@@ -5119,26 +5561,26 @@
           <a:p>
             <a:pPr algn="l"/>
             <a:r>
-              <a:rPr sz="1000" b="1" i="0">
-                <a:solidFill>
-                  <a:srgbClr val="107C10"/>
+              <a:rPr sz="950" b="1" i="0">
+                <a:solidFill>
+                  <a:srgbClr val="404040"/>
                 </a:solidFill>
               </a:rPr>
-              <a:t>분석 리포트 자동 전송</a:t>
-            </a:r>
-          </a:p>
-        </p:txBody>
-      </p:sp>
-      <p:sp>
-        <p:nvSpPr>
-          <p:cNvPr id="54" name="TextBox 53"/>
+              <a:t>SN 기반 자동 분석</a:t>
+            </a:r>
+          </a:p>
+        </p:txBody>
+      </p:sp>
+      <p:sp>
+        <p:nvSpPr>
+          <p:cNvPr id="68" name="TextBox 67"/>
           <p:cNvSpPr txBox="1"/>
           <p:nvPr/>
         </p:nvSpPr>
         <p:spPr>
           <a:xfrm>
-            <a:off x="8724087" y="2476800"/>
-            <a:ext cx="3468465" cy="360000"/>
+            <a:off x="8025150" y="1126799"/>
+            <a:ext cx="4037801" cy="251999"/>
           </a:xfrm>
           <a:prstGeom prst="rect">
             <a:avLst/>
@@ -5153,38 +5595,36 @@
           <a:p>
             <a:pPr algn="l"/>
             <a:r>
-              <a:rPr sz="900" b="0" i="0">
-                <a:solidFill>
-                  <a:srgbClr val="555555"/>
+              <a:rPr sz="850" b="0" i="0">
+                <a:solidFill>
+                  <a:srgbClr val="888888"/>
                 </a:solidFill>
               </a:rPr>
-              <a:t>PDF/HTML 리포트 자동 생성
-Knox Messenger로 즉시 전달</a:t>
-            </a:r>
-          </a:p>
-        </p:txBody>
-      </p:sp>
-      <p:sp>
-        <p:nvSpPr>
-          <p:cNvPr id="55" name="Rectangle 54"/>
+              <a:t>Knox Messenger 챗봇으로 SN 입력
+Adaptive Card UI · 다중 SN 동시 지원</a:t>
+            </a:r>
+          </a:p>
+        </p:txBody>
+      </p:sp>
+      <p:sp>
+        <p:nvSpPr>
+          <p:cNvPr id="69" name="Rectangle 68"/>
           <p:cNvSpPr/>
           <p:nvPr/>
         </p:nvSpPr>
         <p:spPr>
           <a:xfrm>
-            <a:off x="8580087" y="2908800"/>
-            <a:ext cx="3612464" cy="576000"/>
+            <a:off x="7935150" y="1414799"/>
+            <a:ext cx="4145801" cy="7200"/>
           </a:xfrm>
           <a:prstGeom prst="rect">
             <a:avLst/>
           </a:prstGeom>
           <a:solidFill>
-            <a:srgbClr val="FFFFFF"/>
+            <a:srgbClr val="D8D8D8"/>
           </a:solidFill>
-          <a:ln w="15240">
-            <a:solidFill>
-              <a:srgbClr val="6050A0"/>
-            </a:solidFill>
+          <a:ln>
+            <a:noFill/>
           </a:ln>
         </p:spPr>
         <p:style>
@@ -5211,20 +5651,20 @@
       </p:sp>
       <p:sp>
         <p:nvSpPr>
-          <p:cNvPr id="56" name="Rectangle 55"/>
+          <p:cNvPr id="70" name="Rectangle 69"/>
           <p:cNvSpPr/>
           <p:nvPr/>
         </p:nvSpPr>
         <p:spPr>
           <a:xfrm>
-            <a:off x="8580087" y="2908800"/>
-            <a:ext cx="90000" cy="576000"/>
+            <a:off x="7935150" y="1486799"/>
+            <a:ext cx="36000" cy="180000"/>
           </a:xfrm>
           <a:prstGeom prst="rect">
             <a:avLst/>
           </a:prstGeom>
           <a:solidFill>
-            <a:srgbClr val="6050A0"/>
+            <a:srgbClr val="D8D8D8"/>
           </a:solidFill>
           <a:ln>
             <a:noFill/>
@@ -5254,14 +5694,14 @@
       </p:sp>
       <p:sp>
         <p:nvSpPr>
-          <p:cNvPr id="57" name="TextBox 56"/>
+          <p:cNvPr id="71" name="TextBox 70"/>
           <p:cNvSpPr txBox="1"/>
           <p:nvPr/>
         </p:nvSpPr>
         <p:spPr>
           <a:xfrm>
-            <a:off x="8724087" y="2944800"/>
-            <a:ext cx="3468465" cy="162000"/>
+            <a:off x="8025150" y="1468799"/>
+            <a:ext cx="4037801" cy="162000"/>
           </a:xfrm>
           <a:prstGeom prst="rect">
             <a:avLst/>
@@ -5276,26 +5716,26 @@
           <a:p>
             <a:pPr algn="l"/>
             <a:r>
-              <a:rPr sz="1000" b="1" i="0">
-                <a:solidFill>
-                  <a:srgbClr val="6050A0"/>
+              <a:rPr sz="950" b="1" i="0">
+                <a:solidFill>
+                  <a:srgbClr val="404040"/>
                 </a:solidFill>
               </a:rPr>
-              <a:t>24/7 무인 대응</a:t>
-            </a:r>
-          </a:p>
-        </p:txBody>
-      </p:sp>
-      <p:sp>
-        <p:nvSpPr>
-          <p:cNvPr id="58" name="TextBox 57"/>
+              <a:t>빅데이터 자동 조회</a:t>
+            </a:r>
+          </a:p>
+        </p:txBody>
+      </p:sp>
+      <p:sp>
+        <p:nvSpPr>
+          <p:cNvPr id="72" name="TextBox 71"/>
           <p:cNvSpPr txBox="1"/>
           <p:nvPr/>
         </p:nvSpPr>
         <p:spPr>
           <a:xfrm>
-            <a:off x="8724087" y="3106800"/>
-            <a:ext cx="3468465" cy="360000"/>
+            <a:off x="8025150" y="1623599"/>
+            <a:ext cx="4037801" cy="251999"/>
           </a:xfrm>
           <a:prstGeom prst="rect">
             <a:avLst/>
@@ -5310,33 +5750,33 @@
           <a:p>
             <a:pPr algn="l"/>
             <a:r>
-              <a:rPr sz="900" b="0" i="0">
-                <a:solidFill>
-                  <a:srgbClr val="555555"/>
+              <a:rPr sz="850" b="0" i="0">
+                <a:solidFill>
+                  <a:srgbClr val="888888"/>
                 </a:solidFill>
               </a:rPr>
-              <a:t>주말·야간 자동 처리
-오류 알림 · 타임아웃 자동 처리</a:t>
-            </a:r>
-          </a:p>
-        </p:txBody>
-      </p:sp>
-      <p:sp>
-        <p:nvSpPr>
-          <p:cNvPr id="59" name="Rectangle 58"/>
+              <a:t>포털 자동 로그인·조회 (Playwright)
+병렬 처리로 속도 최적화</a:t>
+            </a:r>
+          </a:p>
+        </p:txBody>
+      </p:sp>
+      <p:sp>
+        <p:nvSpPr>
+          <p:cNvPr id="73" name="Rectangle 72"/>
           <p:cNvSpPr/>
           <p:nvPr/>
         </p:nvSpPr>
         <p:spPr>
           <a:xfrm>
-            <a:off x="8580087" y="3520800"/>
-            <a:ext cx="1204154" cy="180000"/>
+            <a:off x="7935150" y="1911599"/>
+            <a:ext cx="4145801" cy="7200"/>
           </a:xfrm>
           <a:prstGeom prst="rect">
             <a:avLst/>
           </a:prstGeom>
           <a:solidFill>
-            <a:srgbClr val="1E3A5F"/>
+            <a:srgbClr val="D8D8D8"/>
           </a:solidFill>
           <a:ln>
             <a:noFill/>
@@ -5366,54 +5806,20 @@
       </p:sp>
       <p:sp>
         <p:nvSpPr>
-          <p:cNvPr id="60" name="TextBox 59"/>
-          <p:cNvSpPr txBox="1"/>
-          <p:nvPr/>
-        </p:nvSpPr>
-        <p:spPr>
-          <a:xfrm>
-            <a:off x="8580087" y="3538800"/>
-            <a:ext cx="1204154" cy="144000"/>
-          </a:xfrm>
-          <a:prstGeom prst="rect">
-            <a:avLst/>
-          </a:prstGeom>
-          <a:noFill/>
-        </p:spPr>
-        <p:txBody>
-          <a:bodyPr wrap="square">
-            <a:spAutoFit/>
-          </a:bodyPr>
-          <a:lstStyle/>
-          <a:p>
-            <a:pPr algn="ctr"/>
-            <a:r>
-              <a:rPr sz="900" b="1" i="0">
-                <a:solidFill>
-                  <a:srgbClr val="FFFFFF"/>
-                </a:solidFill>
-              </a:rPr>
-              <a:t>VOC 해결율↑</a:t>
-            </a:r>
-          </a:p>
-        </p:txBody>
-      </p:sp>
-      <p:sp>
-        <p:nvSpPr>
-          <p:cNvPr id="61" name="Rectangle 60"/>
+          <p:cNvPr id="74" name="Rectangle 73"/>
           <p:cNvSpPr/>
           <p:nvPr/>
         </p:nvSpPr>
         <p:spPr>
           <a:xfrm>
-            <a:off x="9802242" y="3520800"/>
-            <a:ext cx="1204154" cy="180000"/>
+            <a:off x="7935150" y="1983599"/>
+            <a:ext cx="36000" cy="180000"/>
           </a:xfrm>
           <a:prstGeom prst="rect">
             <a:avLst/>
           </a:prstGeom>
           <a:solidFill>
-            <a:srgbClr val="0078D4"/>
+            <a:srgbClr val="D8D8D8"/>
           </a:solidFill>
           <a:ln>
             <a:noFill/>
@@ -5443,14 +5849,14 @@
       </p:sp>
       <p:sp>
         <p:nvSpPr>
-          <p:cNvPr id="62" name="TextBox 61"/>
+          <p:cNvPr id="75" name="TextBox 74"/>
           <p:cNvSpPr txBox="1"/>
           <p:nvPr/>
         </p:nvSpPr>
         <p:spPr>
           <a:xfrm>
-            <a:off x="9802242" y="3538800"/>
-            <a:ext cx="1204154" cy="144000"/>
+            <a:off x="8025150" y="1965599"/>
+            <a:ext cx="4037801" cy="162000"/>
           </a:xfrm>
           <a:prstGeom prst="rect">
             <a:avLst/>
@@ -5463,34 +5869,69 @@
           </a:bodyPr>
           <a:lstStyle/>
           <a:p>
-            <a:pPr algn="ctr"/>
-            <a:r>
-              <a:rPr sz="900" b="1" i="0">
-                <a:solidFill>
-                  <a:srgbClr val="FFFFFF"/>
+            <a:pPr algn="l"/>
+            <a:r>
+              <a:rPr sz="950" b="1" i="0">
+                <a:solidFill>
+                  <a:srgbClr val="404040"/>
                 </a:solidFill>
               </a:rPr>
-              <a:t>대기시간 제거</a:t>
-            </a:r>
-          </a:p>
-        </p:txBody>
-      </p:sp>
-      <p:sp>
-        <p:nvSpPr>
-          <p:cNvPr id="63" name="Rectangle 62"/>
+              <a:t>분석 리포트 자동 전송</a:t>
+            </a:r>
+          </a:p>
+        </p:txBody>
+      </p:sp>
+      <p:sp>
+        <p:nvSpPr>
+          <p:cNvPr id="76" name="TextBox 75"/>
+          <p:cNvSpPr txBox="1"/>
+          <p:nvPr/>
+        </p:nvSpPr>
+        <p:spPr>
+          <a:xfrm>
+            <a:off x="8025150" y="2120399"/>
+            <a:ext cx="4037801" cy="251999"/>
+          </a:xfrm>
+          <a:prstGeom prst="rect">
+            <a:avLst/>
+          </a:prstGeom>
+          <a:noFill/>
+        </p:spPr>
+        <p:txBody>
+          <a:bodyPr wrap="square">
+            <a:spAutoFit/>
+          </a:bodyPr>
+          <a:lstStyle/>
+          <a:p>
+            <a:pPr algn="l"/>
+            <a:r>
+              <a:rPr sz="850" b="0" i="0">
+                <a:solidFill>
+                  <a:srgbClr val="888888"/>
+                </a:solidFill>
+              </a:rPr>
+              <a:t>PDF·HTML 리포트 자동 생성
+Knox Messenger로 즉시 전달</a:t>
+            </a:r>
+          </a:p>
+        </p:txBody>
+      </p:sp>
+      <p:sp>
+        <p:nvSpPr>
+          <p:cNvPr id="77" name="Rectangle 76"/>
           <p:cNvSpPr/>
           <p:nvPr/>
         </p:nvSpPr>
         <p:spPr>
           <a:xfrm>
-            <a:off x="11024397" y="3520800"/>
-            <a:ext cx="1204154" cy="180000"/>
+            <a:off x="7935150" y="2408399"/>
+            <a:ext cx="4145801" cy="7200"/>
           </a:xfrm>
           <a:prstGeom prst="rect">
             <a:avLst/>
           </a:prstGeom>
           <a:solidFill>
-            <a:srgbClr val="107C10"/>
+            <a:srgbClr val="D8D8D8"/>
           </a:solidFill>
           <a:ln>
             <a:noFill/>
@@ -5520,54 +5961,20 @@
       </p:sp>
       <p:sp>
         <p:nvSpPr>
-          <p:cNvPr id="64" name="TextBox 63"/>
-          <p:cNvSpPr txBox="1"/>
-          <p:nvPr/>
-        </p:nvSpPr>
-        <p:spPr>
-          <a:xfrm>
-            <a:off x="11024397" y="3538800"/>
-            <a:ext cx="1204154" cy="144000"/>
-          </a:xfrm>
-          <a:prstGeom prst="rect">
-            <a:avLst/>
-          </a:prstGeom>
-          <a:noFill/>
-        </p:spPr>
-        <p:txBody>
-          <a:bodyPr wrap="square">
-            <a:spAutoFit/>
-          </a:bodyPr>
-          <a:lstStyle/>
-          <a:p>
-            <a:pPr algn="ctr"/>
-            <a:r>
-              <a:rPr sz="900" b="1" i="0">
-                <a:solidFill>
-                  <a:srgbClr val="FFFFFF"/>
-                </a:solidFill>
-              </a:rPr>
-              <a:t>FA 비용↓</a:t>
-            </a:r>
-          </a:p>
-        </p:txBody>
-      </p:sp>
-      <p:sp>
-        <p:nvSpPr>
-          <p:cNvPr id="65" name="Rectangle 64"/>
+          <p:cNvPr id="78" name="Rectangle 77"/>
           <p:cNvSpPr/>
           <p:nvPr/>
         </p:nvSpPr>
         <p:spPr>
           <a:xfrm>
-            <a:off x="0" y="6588000"/>
-            <a:ext cx="12188952" cy="270000"/>
+            <a:off x="7935150" y="2480399"/>
+            <a:ext cx="36000" cy="180000"/>
           </a:xfrm>
           <a:prstGeom prst="rect">
             <a:avLst/>
           </a:prstGeom>
           <a:solidFill>
-            <a:srgbClr val="1E3A5F"/>
+            <a:srgbClr val="D8D8D8"/>
           </a:solidFill>
           <a:ln>
             <a:noFill/>
@@ -5597,14 +6004,14 @@
       </p:sp>
       <p:sp>
         <p:nvSpPr>
-          <p:cNvPr id="66" name="TextBox 65"/>
+          <p:cNvPr id="79" name="TextBox 78"/>
           <p:cNvSpPr txBox="1"/>
           <p:nvPr/>
         </p:nvSpPr>
         <p:spPr>
           <a:xfrm>
-            <a:off x="180000" y="6606001"/>
-            <a:ext cx="8532266" cy="234000"/>
+            <a:off x="8025150" y="2462399"/>
+            <a:ext cx="4037801" cy="162000"/>
           </a:xfrm>
           <a:prstGeom prst="rect">
             <a:avLst/>
@@ -5619,26 +6026,26 @@
           <a:p>
             <a:pPr algn="l"/>
             <a:r>
-              <a:rPr sz="850" b="0" i="0">
-                <a:solidFill>
-                  <a:srgbClr val="AABBCC"/>
+              <a:rPr sz="950" b="1" i="0">
+                <a:solidFill>
+                  <a:srgbClr val="404040"/>
                 </a:solidFill>
               </a:rPr>
-              <a:t>Samsung Electronics Service  |  Field Analysis 챗봇 자동화  |  2025</a:t>
-            </a:r>
-          </a:p>
-        </p:txBody>
-      </p:sp>
-      <p:sp>
-        <p:nvSpPr>
-          <p:cNvPr id="67" name="TextBox 66"/>
+              <a:t>24/7 무인 대응</a:t>
+            </a:r>
+          </a:p>
+        </p:txBody>
+      </p:sp>
+      <p:sp>
+        <p:nvSpPr>
+          <p:cNvPr id="80" name="TextBox 79"/>
           <p:cNvSpPr txBox="1"/>
           <p:nvPr/>
         </p:nvSpPr>
         <p:spPr>
           <a:xfrm>
-            <a:off x="11288952" y="6606001"/>
-            <a:ext cx="792000" cy="234000"/>
+            <a:off x="8025150" y="2617199"/>
+            <a:ext cx="4037801" cy="251999"/>
           </a:xfrm>
           <a:prstGeom prst="rect">
             <a:avLst/>
@@ -5651,9 +6058,377 @@
           </a:bodyPr>
           <a:lstStyle/>
           <a:p>
+            <a:pPr algn="l"/>
+            <a:r>
+              <a:rPr sz="850" b="0" i="0">
+                <a:solidFill>
+                  <a:srgbClr val="888888"/>
+                </a:solidFill>
+              </a:rPr>
+              <a:t>주말·야간 무인 자동 처리
+오류 알림·타임아웃 자동 처리</a:t>
+            </a:r>
+          </a:p>
+        </p:txBody>
+      </p:sp>
+      <p:sp>
+        <p:nvSpPr>
+          <p:cNvPr id="81" name="Rectangle 80"/>
+          <p:cNvSpPr/>
+          <p:nvPr/>
+        </p:nvSpPr>
+        <p:spPr>
+          <a:xfrm>
+            <a:off x="7881150" y="2977199"/>
+            <a:ext cx="4199801" cy="7200"/>
+          </a:xfrm>
+          <a:prstGeom prst="rect">
+            <a:avLst/>
+          </a:prstGeom>
+          <a:solidFill>
+            <a:srgbClr val="D8D8D8"/>
+          </a:solidFill>
+          <a:ln>
+            <a:noFill/>
+          </a:ln>
+        </p:spPr>
+        <p:style>
+          <a:lnRef idx="1">
+            <a:schemeClr val="accent1"/>
+          </a:lnRef>
+          <a:fillRef idx="3">
+            <a:schemeClr val="accent1"/>
+          </a:fillRef>
+          <a:effectRef idx="2">
+            <a:schemeClr val="accent1"/>
+          </a:effectRef>
+          <a:fontRef idx="minor">
+            <a:schemeClr val="lt1"/>
+          </a:fontRef>
+        </p:style>
+        <p:txBody>
+          <a:bodyPr rtlCol="0" anchor="ctr"/>
+          <a:lstStyle/>
+          <a:p>
+            <a:pPr algn="ctr"/>
+          </a:p>
+        </p:txBody>
+      </p:sp>
+      <p:sp>
+        <p:nvSpPr>
+          <p:cNvPr id="82" name="Rectangle 81"/>
+          <p:cNvSpPr/>
+          <p:nvPr/>
+        </p:nvSpPr>
+        <p:spPr>
+          <a:xfrm>
+            <a:off x="7881150" y="3085199"/>
+            <a:ext cx="64800" cy="198000"/>
+          </a:xfrm>
+          <a:prstGeom prst="rect">
+            <a:avLst/>
+          </a:prstGeom>
+          <a:solidFill>
+            <a:srgbClr val="1C3A5F"/>
+          </a:solidFill>
+          <a:ln>
+            <a:noFill/>
+          </a:ln>
+        </p:spPr>
+        <p:style>
+          <a:lnRef idx="1">
+            <a:schemeClr val="accent1"/>
+          </a:lnRef>
+          <a:fillRef idx="3">
+            <a:schemeClr val="accent1"/>
+          </a:fillRef>
+          <a:effectRef idx="2">
+            <a:schemeClr val="accent1"/>
+          </a:effectRef>
+          <a:fontRef idx="minor">
+            <a:schemeClr val="lt1"/>
+          </a:fontRef>
+        </p:style>
+        <p:txBody>
+          <a:bodyPr rtlCol="0" anchor="ctr"/>
+          <a:lstStyle/>
+          <a:p>
+            <a:pPr algn="ctr"/>
+          </a:p>
+        </p:txBody>
+      </p:sp>
+      <p:sp>
+        <p:nvSpPr>
+          <p:cNvPr id="83" name="TextBox 82"/>
+          <p:cNvSpPr txBox="1"/>
+          <p:nvPr/>
+        </p:nvSpPr>
+        <p:spPr>
+          <a:xfrm>
+            <a:off x="7989150" y="3067199"/>
+            <a:ext cx="4091801" cy="234000"/>
+          </a:xfrm>
+          <a:prstGeom prst="rect">
+            <a:avLst/>
+          </a:prstGeom>
+          <a:noFill/>
+        </p:spPr>
+        <p:txBody>
+          <a:bodyPr wrap="square">
+            <a:spAutoFit/>
+          </a:bodyPr>
+          <a:lstStyle/>
+          <a:p>
+            <a:pPr algn="l"/>
+            <a:r>
+              <a:rPr sz="1050" b="1" i="0">
+                <a:solidFill>
+                  <a:srgbClr val="1C3A5F"/>
+                </a:solidFill>
+              </a:rPr>
+              <a:t>기대 효과</a:t>
+            </a:r>
+          </a:p>
+        </p:txBody>
+      </p:sp>
+      <p:sp>
+        <p:nvSpPr>
+          <p:cNvPr id="84" name="TextBox 83"/>
+          <p:cNvSpPr txBox="1"/>
+          <p:nvPr/>
+        </p:nvSpPr>
+        <p:spPr>
+          <a:xfrm>
+            <a:off x="7953150" y="3337199"/>
+            <a:ext cx="4127801" cy="162000"/>
+          </a:xfrm>
+          <a:prstGeom prst="rect">
+            <a:avLst/>
+          </a:prstGeom>
+          <a:noFill/>
+        </p:spPr>
+        <p:txBody>
+          <a:bodyPr wrap="square">
+            <a:spAutoFit/>
+          </a:bodyPr>
+          <a:lstStyle/>
+          <a:p>
+            <a:pPr algn="l"/>
+            <a:r>
+              <a:rPr sz="900" b="0" i="0">
+                <a:solidFill>
+                  <a:srgbClr val="404040"/>
+                </a:solidFill>
+              </a:rPr>
+              <a:t>▸  고객 VOC 해결율 향상 (24/7 즉각 대응)</a:t>
+            </a:r>
+          </a:p>
+        </p:txBody>
+      </p:sp>
+      <p:sp>
+        <p:nvSpPr>
+          <p:cNvPr id="85" name="TextBox 84"/>
+          <p:cNvSpPr txBox="1"/>
+          <p:nvPr/>
+        </p:nvSpPr>
+        <p:spPr>
+          <a:xfrm>
+            <a:off x="7953150" y="3506399"/>
+            <a:ext cx="4127801" cy="162000"/>
+          </a:xfrm>
+          <a:prstGeom prst="rect">
+            <a:avLst/>
+          </a:prstGeom>
+          <a:noFill/>
+        </p:spPr>
+        <p:txBody>
+          <a:bodyPr wrap="square">
+            <a:spAutoFit/>
+          </a:bodyPr>
+          <a:lstStyle/>
+          <a:p>
+            <a:pPr algn="l"/>
+            <a:r>
+              <a:rPr sz="900" b="0" i="0">
+                <a:solidFill>
+                  <a:srgbClr val="404040"/>
+                </a:solidFill>
+              </a:rPr>
+              <a:t>▸  본사 분석 인력 업무 효율 제고</a:t>
+            </a:r>
+          </a:p>
+        </p:txBody>
+      </p:sp>
+      <p:sp>
+        <p:nvSpPr>
+          <p:cNvPr id="86" name="TextBox 85"/>
+          <p:cNvSpPr txBox="1"/>
+          <p:nvPr/>
+        </p:nvSpPr>
+        <p:spPr>
+          <a:xfrm>
+            <a:off x="7953150" y="3675599"/>
+            <a:ext cx="4127801" cy="162000"/>
+          </a:xfrm>
+          <a:prstGeom prst="rect">
+            <a:avLst/>
+          </a:prstGeom>
+          <a:noFill/>
+        </p:spPr>
+        <p:txBody>
+          <a:bodyPr wrap="square">
+            <a:spAutoFit/>
+          </a:bodyPr>
+          <a:lstStyle/>
+          <a:p>
+            <a:pPr algn="l"/>
+            <a:r>
+              <a:rPr sz="900" b="0" i="0">
+                <a:solidFill>
+                  <a:srgbClr val="404040"/>
+                </a:solidFill>
+              </a:rPr>
+              <a:t>▸  FA 현장 대응 비용 절감</a:t>
+            </a:r>
+          </a:p>
+        </p:txBody>
+      </p:sp>
+      <p:sp>
+        <p:nvSpPr>
+          <p:cNvPr id="87" name="TextBox 86"/>
+          <p:cNvSpPr txBox="1"/>
+          <p:nvPr/>
+        </p:nvSpPr>
+        <p:spPr>
+          <a:xfrm>
+            <a:off x="7953150" y="3844799"/>
+            <a:ext cx="4127801" cy="162000"/>
+          </a:xfrm>
+          <a:prstGeom prst="rect">
+            <a:avLst/>
+          </a:prstGeom>
+          <a:noFill/>
+        </p:spPr>
+        <p:txBody>
+          <a:bodyPr wrap="square">
+            <a:spAutoFit/>
+          </a:bodyPr>
+          <a:lstStyle/>
+          <a:p>
+            <a:pPr algn="l"/>
+            <a:r>
+              <a:rPr sz="900" b="0" i="0">
+                <a:solidFill>
+                  <a:srgbClr val="404040"/>
+                </a:solidFill>
+              </a:rPr>
+              <a:t>▸  서비스센터 FA 이관 이슈 사전 분류</a:t>
+            </a:r>
+          </a:p>
+        </p:txBody>
+      </p:sp>
+      <p:sp>
+        <p:nvSpPr>
+          <p:cNvPr id="88" name="Rectangle 87"/>
+          <p:cNvSpPr/>
+          <p:nvPr/>
+        </p:nvSpPr>
+        <p:spPr>
+          <a:xfrm>
+            <a:off x="0" y="6660000"/>
+            <a:ext cx="12188952" cy="198000"/>
+          </a:xfrm>
+          <a:prstGeom prst="rect">
+            <a:avLst/>
+          </a:prstGeom>
+          <a:solidFill>
+            <a:srgbClr val="1C3A5F"/>
+          </a:solidFill>
+          <a:ln>
+            <a:noFill/>
+          </a:ln>
+        </p:spPr>
+        <p:style>
+          <a:lnRef idx="1">
+            <a:schemeClr val="accent1"/>
+          </a:lnRef>
+          <a:fillRef idx="3">
+            <a:schemeClr val="accent1"/>
+          </a:fillRef>
+          <a:effectRef idx="2">
+            <a:schemeClr val="accent1"/>
+          </a:effectRef>
+          <a:fontRef idx="minor">
+            <a:schemeClr val="lt1"/>
+          </a:fontRef>
+        </p:style>
+        <p:txBody>
+          <a:bodyPr rtlCol="0" anchor="ctr"/>
+          <a:lstStyle/>
+          <a:p>
+            <a:pPr algn="ctr"/>
+          </a:p>
+        </p:txBody>
+      </p:sp>
+      <p:sp>
+        <p:nvSpPr>
+          <p:cNvPr id="89" name="TextBox 88"/>
+          <p:cNvSpPr txBox="1"/>
+          <p:nvPr/>
+        </p:nvSpPr>
+        <p:spPr>
+          <a:xfrm>
+            <a:off x="216000" y="6696000"/>
+            <a:ext cx="9141714" cy="136800"/>
+          </a:xfrm>
+          <a:prstGeom prst="rect">
+            <a:avLst/>
+          </a:prstGeom>
+          <a:noFill/>
+        </p:spPr>
+        <p:txBody>
+          <a:bodyPr wrap="square">
+            <a:spAutoFit/>
+          </a:bodyPr>
+          <a:lstStyle/>
+          <a:p>
+            <a:pPr algn="l"/>
+            <a:r>
+              <a:rPr sz="800" b="0" i="0">
+                <a:solidFill>
+                  <a:srgbClr val="A0B2CC"/>
+                </a:solidFill>
+              </a:rPr>
+              <a:t>Samsung Electronics Service  ·  Field Analysis Chatbot Automation  ·  2025</a:t>
+            </a:r>
+          </a:p>
+        </p:txBody>
+      </p:sp>
+      <p:sp>
+        <p:nvSpPr>
+          <p:cNvPr id="90" name="TextBox 89"/>
+          <p:cNvSpPr txBox="1"/>
+          <p:nvPr/>
+        </p:nvSpPr>
+        <p:spPr>
+          <a:xfrm>
+            <a:off x="11360953" y="6696000"/>
+            <a:ext cx="720000" cy="136800"/>
+          </a:xfrm>
+          <a:prstGeom prst="rect">
+            <a:avLst/>
+          </a:prstGeom>
+          <a:noFill/>
+        </p:spPr>
+        <p:txBody>
+          <a:bodyPr wrap="square">
+            <a:spAutoFit/>
+          </a:bodyPr>
+          <a:lstStyle/>
+          <a:p>
             <a:pPr algn="r"/>
             <a:r>
-              <a:rPr sz="900" b="1" i="0">
+              <a:rPr sz="800" b="1" i="0">
                 <a:solidFill>
                   <a:srgbClr val="FFFFFF"/>
                 </a:solidFill>

--- a/FA_챗봇_보고서.pptx
+++ b/FA_챗봇_보고서.pptx
@@ -3140,7 +3140,7 @@
         <p:spPr>
           <a:xfrm>
             <a:off x="0" y="0"/>
-            <a:ext cx="12188952" cy="576000"/>
+            <a:ext cx="12188952" cy="558000"/>
           </a:xfrm>
           <a:prstGeom prst="rect">
             <a:avLst/>
@@ -3182,8 +3182,8 @@
         </p:nvSpPr>
         <p:spPr>
           <a:xfrm>
-            <a:off x="251999" y="64800"/>
-            <a:ext cx="8288487" cy="306000"/>
+            <a:off x="251999" y="54000"/>
+            <a:ext cx="8776045" cy="306000"/>
           </a:xfrm>
           <a:prstGeom prst="rect">
             <a:avLst/>
@@ -3216,8 +3216,8 @@
         </p:nvSpPr>
         <p:spPr>
           <a:xfrm>
-            <a:off x="251999" y="349200"/>
-            <a:ext cx="4875580" cy="180000"/>
+            <a:off x="251999" y="352800"/>
+            <a:ext cx="6094476" cy="162000"/>
           </a:xfrm>
           <a:prstGeom prst="rect">
             <a:avLst/>
@@ -3232,60 +3232,26 @@
           <a:p>
             <a:pPr algn="l"/>
             <a:r>
-              <a:rPr sz="950" b="0" i="0">
-                <a:solidFill>
-                  <a:srgbClr val="B0BED4"/>
+              <a:rPr sz="900" b="0" i="0">
+                <a:solidFill>
+                  <a:srgbClr val="A8BAD2"/>
                 </a:solidFill>
               </a:rPr>
-              <a:t>(주)삼성전자서비스</a:t>
-            </a:r>
-          </a:p>
-        </p:txBody>
-      </p:sp>
-      <p:sp>
-        <p:nvSpPr>
-          <p:cNvPr id="6" name="TextBox 5"/>
-          <p:cNvSpPr txBox="1"/>
-          <p:nvPr/>
-        </p:nvSpPr>
-        <p:spPr>
-          <a:xfrm>
-            <a:off x="11396952" y="349200"/>
-            <a:ext cx="648000" cy="180000"/>
-          </a:xfrm>
-          <a:prstGeom prst="rect">
-            <a:avLst/>
-          </a:prstGeom>
-          <a:noFill/>
-        </p:spPr>
-        <p:txBody>
-          <a:bodyPr wrap="square">
-            <a:spAutoFit/>
-          </a:bodyPr>
-          <a:lstStyle/>
-          <a:p>
-            <a:pPr algn="r"/>
-            <a:r>
-              <a:rPr sz="950" b="0" i="0">
-                <a:solidFill>
-                  <a:srgbClr val="B0BED4"/>
-                </a:solidFill>
-              </a:rPr>
-              <a:t>2025</a:t>
-            </a:r>
-          </a:p>
-        </p:txBody>
-      </p:sp>
-      <p:sp>
-        <p:nvSpPr>
-          <p:cNvPr id="7" name="Rectangle 6"/>
+              <a:t>(주)삼성전자서비스  ·  2025</a:t>
+            </a:r>
+          </a:p>
+        </p:txBody>
+      </p:sp>
+      <p:sp>
+        <p:nvSpPr>
+          <p:cNvPr id="6" name="Rectangle 5"/>
           <p:cNvSpPr/>
           <p:nvPr/>
         </p:nvSpPr>
         <p:spPr>
           <a:xfrm>
-            <a:off x="3331127" y="666000"/>
-            <a:ext cx="7200" cy="5976000"/>
+            <a:off x="4080984" y="637200"/>
+            <a:ext cx="7200" cy="1278000"/>
           </a:xfrm>
           <a:prstGeom prst="rect">
             <a:avLst/>
@@ -3321,14 +3287,14 @@
       </p:sp>
       <p:sp>
         <p:nvSpPr>
-          <p:cNvPr id="8" name="Rectangle 7"/>
+          <p:cNvPr id="7" name="Rectangle 6"/>
           <p:cNvSpPr/>
           <p:nvPr/>
         </p:nvSpPr>
         <p:spPr>
           <a:xfrm>
-            <a:off x="7827150" y="666000"/>
-            <a:ext cx="7200" cy="5976000"/>
+            <a:off x="8107968" y="637200"/>
+            <a:ext cx="7200" cy="1278000"/>
           </a:xfrm>
           <a:prstGeom prst="rect">
             <a:avLst/>
@@ -3364,14 +3330,14 @@
       </p:sp>
       <p:sp>
         <p:nvSpPr>
-          <p:cNvPr id="9" name="Rectangle 8"/>
+          <p:cNvPr id="8" name="Rectangle 7"/>
           <p:cNvSpPr/>
           <p:nvPr/>
         </p:nvSpPr>
         <p:spPr>
           <a:xfrm>
-            <a:off x="108000" y="720000"/>
-            <a:ext cx="64800" cy="198000"/>
+            <a:off x="108000" y="662400"/>
+            <a:ext cx="57600" cy="180000"/>
           </a:xfrm>
           <a:prstGeom prst="rect">
             <a:avLst/>
@@ -3407,14 +3373,14 @@
       </p:sp>
       <p:sp>
         <p:nvSpPr>
-          <p:cNvPr id="10" name="TextBox 9"/>
+          <p:cNvPr id="9" name="TextBox 8"/>
           <p:cNvSpPr txBox="1"/>
           <p:nvPr/>
         </p:nvSpPr>
         <p:spPr>
           <a:xfrm>
-            <a:off x="216000" y="702000"/>
-            <a:ext cx="3061127" cy="234000"/>
+            <a:off x="216000" y="637200"/>
+            <a:ext cx="3918984" cy="223200"/>
           </a:xfrm>
           <a:prstGeom prst="rect">
             <a:avLst/>
@@ -3441,14 +3407,14 @@
       </p:sp>
       <p:sp>
         <p:nvSpPr>
-          <p:cNvPr id="11" name="TextBox 10"/>
+          <p:cNvPr id="10" name="TextBox 9"/>
           <p:cNvSpPr txBox="1"/>
           <p:nvPr/>
         </p:nvSpPr>
         <p:spPr>
           <a:xfrm>
-            <a:off x="180000" y="953999"/>
-            <a:ext cx="3097127" cy="324000"/>
+            <a:off x="162000" y="871200"/>
+            <a:ext cx="3864984" cy="295200"/>
           </a:xfrm>
           <a:prstGeom prst="rect">
             <a:avLst/>
@@ -3468,21 +3434,21 @@
                   <a:srgbClr val="404040"/>
                 </a:solidFill>
               </a:rPr>
-              <a:t>• 서비스센터 고객 VOC 발생 시 FA가 현장 방문하여 문제 해결 지원</a:t>
-            </a:r>
-          </a:p>
-        </p:txBody>
-      </p:sp>
-      <p:sp>
-        <p:nvSpPr>
-          <p:cNvPr id="12" name="TextBox 11"/>
+              <a:t>• 서비스센터 고객 VOC 발생 시 FA가 현장 방문, 빅데이터 분석 결과를 사전 공유하여 체계적 대응 지원</a:t>
+            </a:r>
+          </a:p>
+        </p:txBody>
+      </p:sp>
+      <p:sp>
+        <p:nvSpPr>
+          <p:cNvPr id="11" name="TextBox 10"/>
           <p:cNvSpPr txBox="1"/>
           <p:nvPr/>
         </p:nvSpPr>
         <p:spPr>
           <a:xfrm>
-            <a:off x="180000" y="1285199"/>
-            <a:ext cx="3097127" cy="324000"/>
+            <a:off x="162000" y="1177200"/>
+            <a:ext cx="3864984" cy="295200"/>
           </a:xfrm>
           <a:prstGeom prst="rect">
             <a:avLst/>
@@ -3502,21 +3468,796 @@
                   <a:srgbClr val="404040"/>
                 </a:solidFill>
               </a:rPr>
-              <a:t>• 빅데이터 분석 결과를 사전 공유, 통신사 이관 이슈 조기 분류 →진성 단말 이슈에 집중</a:t>
-            </a:r>
-          </a:p>
-        </p:txBody>
-      </p:sp>
-      <p:sp>
-        <p:nvSpPr>
-          <p:cNvPr id="13" name="Rectangle 12"/>
+              <a:t>• 통신사 이관 이슈 조기 분류 → 진성 단말 이슈에 집중 가능</a:t>
+            </a:r>
+          </a:p>
+        </p:txBody>
+      </p:sp>
+      <p:sp>
+        <p:nvSpPr>
+          <p:cNvPr id="12" name="Rectangle 11"/>
           <p:cNvSpPr/>
           <p:nvPr/>
         </p:nvSpPr>
         <p:spPr>
           <a:xfrm>
-            <a:off x="108000" y="1670399"/>
-            <a:ext cx="3169127" cy="7200"/>
+            <a:off x="108000" y="1544400"/>
+            <a:ext cx="57600" cy="180000"/>
+          </a:xfrm>
+          <a:prstGeom prst="rect">
+            <a:avLst/>
+          </a:prstGeom>
+          <a:solidFill>
+            <a:srgbClr val="1C3A5F"/>
+          </a:solidFill>
+          <a:ln>
+            <a:noFill/>
+          </a:ln>
+        </p:spPr>
+        <p:style>
+          <a:lnRef idx="1">
+            <a:schemeClr val="accent1"/>
+          </a:lnRef>
+          <a:fillRef idx="3">
+            <a:schemeClr val="accent1"/>
+          </a:fillRef>
+          <a:effectRef idx="2">
+            <a:schemeClr val="accent1"/>
+          </a:effectRef>
+          <a:fontRef idx="minor">
+            <a:schemeClr val="lt1"/>
+          </a:fontRef>
+        </p:style>
+        <p:txBody>
+          <a:bodyPr rtlCol="0" anchor="ctr"/>
+          <a:lstStyle/>
+          <a:p>
+            <a:pPr algn="ctr"/>
+          </a:p>
+        </p:txBody>
+      </p:sp>
+      <p:sp>
+        <p:nvSpPr>
+          <p:cNvPr id="13" name="TextBox 12"/>
+          <p:cNvSpPr txBox="1"/>
+          <p:nvPr/>
+        </p:nvSpPr>
+        <p:spPr>
+          <a:xfrm>
+            <a:off x="216000" y="1519200"/>
+            <a:ext cx="3918984" cy="223200"/>
+          </a:xfrm>
+          <a:prstGeom prst="rect">
+            <a:avLst/>
+          </a:prstGeom>
+          <a:noFill/>
+        </p:spPr>
+        <p:txBody>
+          <a:bodyPr wrap="square">
+            <a:spAutoFit/>
+          </a:bodyPr>
+          <a:lstStyle/>
+          <a:p>
+            <a:pPr algn="l"/>
+            <a:r>
+              <a:rPr sz="1050" b="1" i="0">
+                <a:solidFill>
+                  <a:srgbClr val="1C3A5F"/>
+                </a:solidFill>
+              </a:rPr>
+              <a:t>문제점</a:t>
+            </a:r>
+          </a:p>
+        </p:txBody>
+      </p:sp>
+      <p:sp>
+        <p:nvSpPr>
+          <p:cNvPr id="14" name="TextBox 13"/>
+          <p:cNvSpPr txBox="1"/>
+          <p:nvPr/>
+        </p:nvSpPr>
+        <p:spPr>
+          <a:xfrm>
+            <a:off x="162000" y="1753200"/>
+            <a:ext cx="3864984" cy="162000"/>
+          </a:xfrm>
+          <a:prstGeom prst="rect">
+            <a:avLst/>
+          </a:prstGeom>
+          <a:noFill/>
+        </p:spPr>
+        <p:txBody>
+          <a:bodyPr wrap="square">
+            <a:spAutoFit/>
+          </a:bodyPr>
+          <a:lstStyle/>
+          <a:p>
+            <a:pPr algn="l"/>
+            <a:r>
+              <a:rPr sz="900" b="0" i="0">
+                <a:solidFill>
+                  <a:srgbClr val="404040"/>
+                </a:solidFill>
+              </a:rPr>
+              <a:t>• 주말·야간 대응 불가  (본사 인력 부재)</a:t>
+            </a:r>
+          </a:p>
+        </p:txBody>
+      </p:sp>
+      <p:sp>
+        <p:nvSpPr>
+          <p:cNvPr id="15" name="TextBox 14"/>
+          <p:cNvSpPr txBox="1"/>
+          <p:nvPr/>
+        </p:nvSpPr>
+        <p:spPr>
+          <a:xfrm>
+            <a:off x="162000" y="1918800"/>
+            <a:ext cx="3864984" cy="162000"/>
+          </a:xfrm>
+          <a:prstGeom prst="rect">
+            <a:avLst/>
+          </a:prstGeom>
+          <a:noFill/>
+        </p:spPr>
+        <p:txBody>
+          <a:bodyPr wrap="square">
+            <a:spAutoFit/>
+          </a:bodyPr>
+          <a:lstStyle/>
+          <a:p>
+            <a:pPr algn="l"/>
+            <a:r>
+              <a:rPr sz="900" b="0" i="0">
+                <a:solidFill>
+                  <a:srgbClr val="404040"/>
+                </a:solidFill>
+              </a:rPr>
+              <a:t>• 수동 조회 대기시간 발생</a:t>
+            </a:r>
+          </a:p>
+        </p:txBody>
+      </p:sp>
+      <p:sp>
+        <p:nvSpPr>
+          <p:cNvPr id="16" name="TextBox 15"/>
+          <p:cNvSpPr txBox="1"/>
+          <p:nvPr/>
+        </p:nvSpPr>
+        <p:spPr>
+          <a:xfrm>
+            <a:off x="162000" y="2084400"/>
+            <a:ext cx="3864984" cy="162000"/>
+          </a:xfrm>
+          <a:prstGeom prst="rect">
+            <a:avLst/>
+          </a:prstGeom>
+          <a:noFill/>
+        </p:spPr>
+        <p:txBody>
+          <a:bodyPr wrap="square">
+            <a:spAutoFit/>
+          </a:bodyPr>
+          <a:lstStyle/>
+          <a:p>
+            <a:pPr algn="l"/>
+            <a:r>
+              <a:rPr sz="900" b="0" i="0">
+                <a:solidFill>
+                  <a:srgbClr val="404040"/>
+                </a:solidFill>
+              </a:rPr>
+              <a:t>• 반복 업무로 인력 비효율</a:t>
+            </a:r>
+          </a:p>
+        </p:txBody>
+      </p:sp>
+      <p:sp>
+        <p:nvSpPr>
+          <p:cNvPr id="17" name="Rectangle 16"/>
+          <p:cNvSpPr/>
+          <p:nvPr/>
+        </p:nvSpPr>
+        <p:spPr>
+          <a:xfrm>
+            <a:off x="4134984" y="662400"/>
+            <a:ext cx="57600" cy="180000"/>
+          </a:xfrm>
+          <a:prstGeom prst="rect">
+            <a:avLst/>
+          </a:prstGeom>
+          <a:solidFill>
+            <a:srgbClr val="1C3A5F"/>
+          </a:solidFill>
+          <a:ln>
+            <a:noFill/>
+          </a:ln>
+        </p:spPr>
+        <p:style>
+          <a:lnRef idx="1">
+            <a:schemeClr val="accent1"/>
+          </a:lnRef>
+          <a:fillRef idx="3">
+            <a:schemeClr val="accent1"/>
+          </a:fillRef>
+          <a:effectRef idx="2">
+            <a:schemeClr val="accent1"/>
+          </a:effectRef>
+          <a:fontRef idx="minor">
+            <a:schemeClr val="lt1"/>
+          </a:fontRef>
+        </p:style>
+        <p:txBody>
+          <a:bodyPr rtlCol="0" anchor="ctr"/>
+          <a:lstStyle/>
+          <a:p>
+            <a:pPr algn="ctr"/>
+          </a:p>
+        </p:txBody>
+      </p:sp>
+      <p:sp>
+        <p:nvSpPr>
+          <p:cNvPr id="18" name="TextBox 17"/>
+          <p:cNvSpPr txBox="1"/>
+          <p:nvPr/>
+        </p:nvSpPr>
+        <p:spPr>
+          <a:xfrm>
+            <a:off x="4242984" y="637200"/>
+            <a:ext cx="3918984" cy="223200"/>
+          </a:xfrm>
+          <a:prstGeom prst="rect">
+            <a:avLst/>
+          </a:prstGeom>
+          <a:noFill/>
+        </p:spPr>
+        <p:txBody>
+          <a:bodyPr wrap="square">
+            <a:spAutoFit/>
+          </a:bodyPr>
+          <a:lstStyle/>
+          <a:p>
+            <a:pPr algn="l"/>
+            <a:r>
+              <a:rPr sz="1050" b="1" i="0">
+                <a:solidFill>
+                  <a:srgbClr val="1C3A5F"/>
+                </a:solidFill>
+              </a:rPr>
+              <a:t>개선 목표</a:t>
+            </a:r>
+          </a:p>
+        </p:txBody>
+      </p:sp>
+      <p:sp>
+        <p:nvSpPr>
+          <p:cNvPr id="19" name="TextBox 18"/>
+          <p:cNvSpPr txBox="1"/>
+          <p:nvPr/>
+        </p:nvSpPr>
+        <p:spPr>
+          <a:xfrm>
+            <a:off x="4188984" y="871200"/>
+            <a:ext cx="3864984" cy="172800"/>
+          </a:xfrm>
+          <a:prstGeom prst="rect">
+            <a:avLst/>
+          </a:prstGeom>
+          <a:noFill/>
+        </p:spPr>
+        <p:txBody>
+          <a:bodyPr wrap="square">
+            <a:spAutoFit/>
+          </a:bodyPr>
+          <a:lstStyle/>
+          <a:p>
+            <a:pPr algn="l"/>
+            <a:r>
+              <a:rPr sz="900" b="0" i="0">
+                <a:solidFill>
+                  <a:srgbClr val="404040"/>
+                </a:solidFill>
+              </a:rPr>
+              <a:t>▸  챗봇 기반 24/7 자동 분석 체계 구축</a:t>
+            </a:r>
+          </a:p>
+        </p:txBody>
+      </p:sp>
+      <p:sp>
+        <p:nvSpPr>
+          <p:cNvPr id="20" name="TextBox 19"/>
+          <p:cNvSpPr txBox="1"/>
+          <p:nvPr/>
+        </p:nvSpPr>
+        <p:spPr>
+          <a:xfrm>
+            <a:off x="4188984" y="1047600"/>
+            <a:ext cx="3864984" cy="172800"/>
+          </a:xfrm>
+          <a:prstGeom prst="rect">
+            <a:avLst/>
+          </a:prstGeom>
+          <a:noFill/>
+        </p:spPr>
+        <p:txBody>
+          <a:bodyPr wrap="square">
+            <a:spAutoFit/>
+          </a:bodyPr>
+          <a:lstStyle/>
+          <a:p>
+            <a:pPr algn="l"/>
+            <a:r>
+              <a:rPr sz="900" b="0" i="0">
+                <a:solidFill>
+                  <a:srgbClr val="404040"/>
+                </a:solidFill>
+              </a:rPr>
+              <a:t>▸  고객 VOC 해결율 향상</a:t>
+            </a:r>
+          </a:p>
+        </p:txBody>
+      </p:sp>
+      <p:sp>
+        <p:nvSpPr>
+          <p:cNvPr id="21" name="TextBox 20"/>
+          <p:cNvSpPr txBox="1"/>
+          <p:nvPr/>
+        </p:nvSpPr>
+        <p:spPr>
+          <a:xfrm>
+            <a:off x="4188984" y="1224000"/>
+            <a:ext cx="3864984" cy="172800"/>
+          </a:xfrm>
+          <a:prstGeom prst="rect">
+            <a:avLst/>
+          </a:prstGeom>
+          <a:noFill/>
+        </p:spPr>
+        <p:txBody>
+          <a:bodyPr wrap="square">
+            <a:spAutoFit/>
+          </a:bodyPr>
+          <a:lstStyle/>
+          <a:p>
+            <a:pPr algn="l"/>
+            <a:r>
+              <a:rPr sz="900" b="0" i="0">
+                <a:solidFill>
+                  <a:srgbClr val="404040"/>
+                </a:solidFill>
+              </a:rPr>
+              <a:t>▸  본사 업무 효율성 제고</a:t>
+            </a:r>
+          </a:p>
+        </p:txBody>
+      </p:sp>
+      <p:sp>
+        <p:nvSpPr>
+          <p:cNvPr id="22" name="TextBox 21"/>
+          <p:cNvSpPr txBox="1"/>
+          <p:nvPr/>
+        </p:nvSpPr>
+        <p:spPr>
+          <a:xfrm>
+            <a:off x="4188984" y="1400400"/>
+            <a:ext cx="3864984" cy="172800"/>
+          </a:xfrm>
+          <a:prstGeom prst="rect">
+            <a:avLst/>
+          </a:prstGeom>
+          <a:noFill/>
+        </p:spPr>
+        <p:txBody>
+          <a:bodyPr wrap="square">
+            <a:spAutoFit/>
+          </a:bodyPr>
+          <a:lstStyle/>
+          <a:p>
+            <a:pPr algn="l"/>
+            <a:r>
+              <a:rPr sz="900" b="0" i="0">
+                <a:solidFill>
+                  <a:srgbClr val="404040"/>
+                </a:solidFill>
+              </a:rPr>
+              <a:t>▸  FA 대응 비용 절감</a:t>
+            </a:r>
+          </a:p>
+        </p:txBody>
+      </p:sp>
+      <p:sp>
+        <p:nvSpPr>
+          <p:cNvPr id="23" name="TextBox 22"/>
+          <p:cNvSpPr txBox="1"/>
+          <p:nvPr/>
+        </p:nvSpPr>
+        <p:spPr>
+          <a:xfrm>
+            <a:off x="4188984" y="1576800"/>
+            <a:ext cx="3864984" cy="172800"/>
+          </a:xfrm>
+          <a:prstGeom prst="rect">
+            <a:avLst/>
+          </a:prstGeom>
+          <a:noFill/>
+        </p:spPr>
+        <p:txBody>
+          <a:bodyPr wrap="square">
+            <a:spAutoFit/>
+          </a:bodyPr>
+          <a:lstStyle/>
+          <a:p>
+            <a:pPr algn="l"/>
+            <a:r>
+              <a:rPr sz="900" b="0" i="0">
+                <a:solidFill>
+                  <a:srgbClr val="404040"/>
+                </a:solidFill>
+              </a:rPr>
+              <a:t>▸  서비스센터 FA 이관 이슈 사전 분류</a:t>
+            </a:r>
+          </a:p>
+        </p:txBody>
+      </p:sp>
+      <p:sp>
+        <p:nvSpPr>
+          <p:cNvPr id="24" name="Rectangle 23"/>
+          <p:cNvSpPr/>
+          <p:nvPr/>
+        </p:nvSpPr>
+        <p:spPr>
+          <a:xfrm>
+            <a:off x="8161968" y="662400"/>
+            <a:ext cx="57600" cy="180000"/>
+          </a:xfrm>
+          <a:prstGeom prst="rect">
+            <a:avLst/>
+          </a:prstGeom>
+          <a:solidFill>
+            <a:srgbClr val="1C3A5F"/>
+          </a:solidFill>
+          <a:ln>
+            <a:noFill/>
+          </a:ln>
+        </p:spPr>
+        <p:style>
+          <a:lnRef idx="1">
+            <a:schemeClr val="accent1"/>
+          </a:lnRef>
+          <a:fillRef idx="3">
+            <a:schemeClr val="accent1"/>
+          </a:fillRef>
+          <a:effectRef idx="2">
+            <a:schemeClr val="accent1"/>
+          </a:effectRef>
+          <a:fontRef idx="minor">
+            <a:schemeClr val="lt1"/>
+          </a:fontRef>
+        </p:style>
+        <p:txBody>
+          <a:bodyPr rtlCol="0" anchor="ctr"/>
+          <a:lstStyle/>
+          <a:p>
+            <a:pPr algn="ctr"/>
+          </a:p>
+        </p:txBody>
+      </p:sp>
+      <p:sp>
+        <p:nvSpPr>
+          <p:cNvPr id="25" name="TextBox 24"/>
+          <p:cNvSpPr txBox="1"/>
+          <p:nvPr/>
+        </p:nvSpPr>
+        <p:spPr>
+          <a:xfrm>
+            <a:off x="8269968" y="637200"/>
+            <a:ext cx="3918984" cy="223200"/>
+          </a:xfrm>
+          <a:prstGeom prst="rect">
+            <a:avLst/>
+          </a:prstGeom>
+          <a:noFill/>
+        </p:spPr>
+        <p:txBody>
+          <a:bodyPr wrap="square">
+            <a:spAutoFit/>
+          </a:bodyPr>
+          <a:lstStyle/>
+          <a:p>
+            <a:pPr algn="l"/>
+            <a:r>
+              <a:rPr sz="1050" b="1" i="0">
+                <a:solidFill>
+                  <a:srgbClr val="1C3A5F"/>
+                </a:solidFill>
+              </a:rPr>
+              <a:t>주요 기능</a:t>
+            </a:r>
+          </a:p>
+        </p:txBody>
+      </p:sp>
+      <p:sp>
+        <p:nvSpPr>
+          <p:cNvPr id="26" name="TextBox 25"/>
+          <p:cNvSpPr txBox="1"/>
+          <p:nvPr/>
+        </p:nvSpPr>
+        <p:spPr>
+          <a:xfrm>
+            <a:off x="8215968" y="871200"/>
+            <a:ext cx="3864984" cy="144000"/>
+          </a:xfrm>
+          <a:prstGeom prst="rect">
+            <a:avLst/>
+          </a:prstGeom>
+          <a:noFill/>
+        </p:spPr>
+        <p:txBody>
+          <a:bodyPr wrap="square">
+            <a:spAutoFit/>
+          </a:bodyPr>
+          <a:lstStyle/>
+          <a:p>
+            <a:pPr algn="l"/>
+            <a:r>
+              <a:rPr sz="900" b="1" i="0">
+                <a:solidFill>
+                  <a:srgbClr val="404040"/>
+                </a:solidFill>
+              </a:rPr>
+              <a:t>SN 기반 자동 분석</a:t>
+            </a:r>
+          </a:p>
+        </p:txBody>
+      </p:sp>
+      <p:sp>
+        <p:nvSpPr>
+          <p:cNvPr id="27" name="TextBox 26"/>
+          <p:cNvSpPr txBox="1"/>
+          <p:nvPr/>
+        </p:nvSpPr>
+        <p:spPr>
+          <a:xfrm>
+            <a:off x="8215968" y="1008000"/>
+            <a:ext cx="3864984" cy="125999"/>
+          </a:xfrm>
+          <a:prstGeom prst="rect">
+            <a:avLst/>
+          </a:prstGeom>
+          <a:noFill/>
+        </p:spPr>
+        <p:txBody>
+          <a:bodyPr wrap="square">
+            <a:spAutoFit/>
+          </a:bodyPr>
+          <a:lstStyle/>
+          <a:p>
+            <a:pPr algn="l"/>
+            <a:r>
+              <a:rPr sz="800" b="0" i="1">
+                <a:solidFill>
+                  <a:srgbClr val="888888"/>
+                </a:solidFill>
+              </a:rPr>
+              <a:t>Knox Messenger · Adaptive Card · 다중 SN</a:t>
+            </a:r>
+          </a:p>
+        </p:txBody>
+      </p:sp>
+      <p:sp>
+        <p:nvSpPr>
+          <p:cNvPr id="28" name="TextBox 27"/>
+          <p:cNvSpPr txBox="1"/>
+          <p:nvPr/>
+        </p:nvSpPr>
+        <p:spPr>
+          <a:xfrm>
+            <a:off x="8215968" y="1166400"/>
+            <a:ext cx="3864984" cy="144000"/>
+          </a:xfrm>
+          <a:prstGeom prst="rect">
+            <a:avLst/>
+          </a:prstGeom>
+          <a:noFill/>
+        </p:spPr>
+        <p:txBody>
+          <a:bodyPr wrap="square">
+            <a:spAutoFit/>
+          </a:bodyPr>
+          <a:lstStyle/>
+          <a:p>
+            <a:pPr algn="l"/>
+            <a:r>
+              <a:rPr sz="900" b="1" i="0">
+                <a:solidFill>
+                  <a:srgbClr val="404040"/>
+                </a:solidFill>
+              </a:rPr>
+              <a:t>빅데이터 자동 조회</a:t>
+            </a:r>
+          </a:p>
+        </p:txBody>
+      </p:sp>
+      <p:sp>
+        <p:nvSpPr>
+          <p:cNvPr id="29" name="TextBox 28"/>
+          <p:cNvSpPr txBox="1"/>
+          <p:nvPr/>
+        </p:nvSpPr>
+        <p:spPr>
+          <a:xfrm>
+            <a:off x="8215968" y="1303200"/>
+            <a:ext cx="3864984" cy="125999"/>
+          </a:xfrm>
+          <a:prstGeom prst="rect">
+            <a:avLst/>
+          </a:prstGeom>
+          <a:noFill/>
+        </p:spPr>
+        <p:txBody>
+          <a:bodyPr wrap="square">
+            <a:spAutoFit/>
+          </a:bodyPr>
+          <a:lstStyle/>
+          <a:p>
+            <a:pPr algn="l"/>
+            <a:r>
+              <a:rPr sz="800" b="0" i="1">
+                <a:solidFill>
+                  <a:srgbClr val="888888"/>
+                </a:solidFill>
+              </a:rPr>
+              <a:t>포털 자동화 (Playwright) · 병렬 처리</a:t>
+            </a:r>
+          </a:p>
+        </p:txBody>
+      </p:sp>
+      <p:sp>
+        <p:nvSpPr>
+          <p:cNvPr id="30" name="TextBox 29"/>
+          <p:cNvSpPr txBox="1"/>
+          <p:nvPr/>
+        </p:nvSpPr>
+        <p:spPr>
+          <a:xfrm>
+            <a:off x="8215968" y="1461600"/>
+            <a:ext cx="3864984" cy="144000"/>
+          </a:xfrm>
+          <a:prstGeom prst="rect">
+            <a:avLst/>
+          </a:prstGeom>
+          <a:noFill/>
+        </p:spPr>
+        <p:txBody>
+          <a:bodyPr wrap="square">
+            <a:spAutoFit/>
+          </a:bodyPr>
+          <a:lstStyle/>
+          <a:p>
+            <a:pPr algn="l"/>
+            <a:r>
+              <a:rPr sz="900" b="1" i="0">
+                <a:solidFill>
+                  <a:srgbClr val="404040"/>
+                </a:solidFill>
+              </a:rPr>
+              <a:t>분석 리포트 자동 전송</a:t>
+            </a:r>
+          </a:p>
+        </p:txBody>
+      </p:sp>
+      <p:sp>
+        <p:nvSpPr>
+          <p:cNvPr id="31" name="TextBox 30"/>
+          <p:cNvSpPr txBox="1"/>
+          <p:nvPr/>
+        </p:nvSpPr>
+        <p:spPr>
+          <a:xfrm>
+            <a:off x="8215968" y="1598400"/>
+            <a:ext cx="3864984" cy="125999"/>
+          </a:xfrm>
+          <a:prstGeom prst="rect">
+            <a:avLst/>
+          </a:prstGeom>
+          <a:noFill/>
+        </p:spPr>
+        <p:txBody>
+          <a:bodyPr wrap="square">
+            <a:spAutoFit/>
+          </a:bodyPr>
+          <a:lstStyle/>
+          <a:p>
+            <a:pPr algn="l"/>
+            <a:r>
+              <a:rPr sz="800" b="0" i="1">
+                <a:solidFill>
+                  <a:srgbClr val="888888"/>
+                </a:solidFill>
+              </a:rPr>
+              <a:t>PDF / HTML 생성 → Knox Messenger 전달</a:t>
+            </a:r>
+          </a:p>
+        </p:txBody>
+      </p:sp>
+      <p:sp>
+        <p:nvSpPr>
+          <p:cNvPr id="32" name="TextBox 31"/>
+          <p:cNvSpPr txBox="1"/>
+          <p:nvPr/>
+        </p:nvSpPr>
+        <p:spPr>
+          <a:xfrm>
+            <a:off x="8215968" y="1756800"/>
+            <a:ext cx="3864984" cy="144000"/>
+          </a:xfrm>
+          <a:prstGeom prst="rect">
+            <a:avLst/>
+          </a:prstGeom>
+          <a:noFill/>
+        </p:spPr>
+        <p:txBody>
+          <a:bodyPr wrap="square">
+            <a:spAutoFit/>
+          </a:bodyPr>
+          <a:lstStyle/>
+          <a:p>
+            <a:pPr algn="l"/>
+            <a:r>
+              <a:rPr sz="900" b="1" i="0">
+                <a:solidFill>
+                  <a:srgbClr val="404040"/>
+                </a:solidFill>
+              </a:rPr>
+              <a:t>24/7 무인 대응</a:t>
+            </a:r>
+          </a:p>
+        </p:txBody>
+      </p:sp>
+      <p:sp>
+        <p:nvSpPr>
+          <p:cNvPr id="33" name="TextBox 32"/>
+          <p:cNvSpPr txBox="1"/>
+          <p:nvPr/>
+        </p:nvSpPr>
+        <p:spPr>
+          <a:xfrm>
+            <a:off x="8215968" y="1893600"/>
+            <a:ext cx="3864984" cy="125999"/>
+          </a:xfrm>
+          <a:prstGeom prst="rect">
+            <a:avLst/>
+          </a:prstGeom>
+          <a:noFill/>
+        </p:spPr>
+        <p:txBody>
+          <a:bodyPr wrap="square">
+            <a:spAutoFit/>
+          </a:bodyPr>
+          <a:lstStyle/>
+          <a:p>
+            <a:pPr algn="l"/>
+            <a:r>
+              <a:rPr sz="800" b="0" i="1">
+                <a:solidFill>
+                  <a:srgbClr val="888888"/>
+                </a:solidFill>
+              </a:rPr>
+              <a:t>주말·야간 자동 처리 · 오류 알림</a:t>
+            </a:r>
+          </a:p>
+        </p:txBody>
+      </p:sp>
+      <p:sp>
+        <p:nvSpPr>
+          <p:cNvPr id="34" name="Rectangle 33"/>
+          <p:cNvSpPr/>
+          <p:nvPr/>
+        </p:nvSpPr>
+        <p:spPr>
+          <a:xfrm>
+            <a:off x="108000" y="1980000"/>
+            <a:ext cx="11972952" cy="7200"/>
           </a:xfrm>
           <a:prstGeom prst="rect">
             <a:avLst/>
@@ -3552,14 +4293,14 @@
       </p:sp>
       <p:sp>
         <p:nvSpPr>
-          <p:cNvPr id="14" name="Rectangle 13"/>
+          <p:cNvPr id="35" name="Rectangle 34"/>
           <p:cNvSpPr/>
           <p:nvPr/>
         </p:nvSpPr>
         <p:spPr>
           <a:xfrm>
-            <a:off x="108000" y="1760399"/>
-            <a:ext cx="64800" cy="198000"/>
+            <a:off x="108000" y="2041200"/>
+            <a:ext cx="57600" cy="180000"/>
           </a:xfrm>
           <a:prstGeom prst="rect">
             <a:avLst/>
@@ -3595,14 +4336,14 @@
       </p:sp>
       <p:sp>
         <p:nvSpPr>
-          <p:cNvPr id="15" name="TextBox 14"/>
+          <p:cNvPr id="36" name="TextBox 35"/>
           <p:cNvSpPr txBox="1"/>
           <p:nvPr/>
         </p:nvSpPr>
         <p:spPr>
           <a:xfrm>
-            <a:off x="216000" y="1742399"/>
-            <a:ext cx="3061127" cy="234000"/>
+            <a:off x="216000" y="2016000"/>
+            <a:ext cx="11972952" cy="223200"/>
           </a:xfrm>
           <a:prstGeom prst="rect">
             <a:avLst/>
@@ -3622,21 +4363,66 @@
                   <a:srgbClr val="1C3A5F"/>
                 </a:solidFill>
               </a:rPr>
-              <a:t>현황 및 문제점</a:t>
-            </a:r>
-          </a:p>
-        </p:txBody>
-      </p:sp>
-      <p:sp>
-        <p:nvSpPr>
-          <p:cNvPr id="16" name="TextBox 15"/>
+              <a:t>시스템 구성</a:t>
+            </a:r>
+          </a:p>
+        </p:txBody>
+      </p:sp>
+      <p:sp>
+        <p:nvSpPr>
+          <p:cNvPr id="37" name="Rectangle 36"/>
+          <p:cNvSpPr/>
+          <p:nvPr/>
+        </p:nvSpPr>
+        <p:spPr>
+          <a:xfrm>
+            <a:off x="108000" y="4244400"/>
+            <a:ext cx="1494422" cy="396000"/>
+          </a:xfrm>
+          <a:prstGeom prst="rect">
+            <a:avLst/>
+          </a:prstGeom>
+          <a:solidFill>
+            <a:srgbClr val="FFFFFF"/>
+          </a:solidFill>
+          <a:ln w="9525">
+            <a:solidFill>
+              <a:srgbClr val="1C3A5F"/>
+            </a:solidFill>
+          </a:ln>
+        </p:spPr>
+        <p:style>
+          <a:lnRef idx="1">
+            <a:schemeClr val="accent1"/>
+          </a:lnRef>
+          <a:fillRef idx="3">
+            <a:schemeClr val="accent1"/>
+          </a:fillRef>
+          <a:effectRef idx="2">
+            <a:schemeClr val="accent1"/>
+          </a:effectRef>
+          <a:fontRef idx="minor">
+            <a:schemeClr val="lt1"/>
+          </a:fontRef>
+        </p:style>
+        <p:txBody>
+          <a:bodyPr rtlCol="0" anchor="ctr"/>
+          <a:lstStyle/>
+          <a:p>
+            <a:pPr algn="ctr"/>
+          </a:p>
+        </p:txBody>
+      </p:sp>
+      <p:sp>
+        <p:nvSpPr>
+          <p:cNvPr id="38" name="TextBox 37"/>
           <p:cNvSpPr txBox="1"/>
           <p:nvPr/>
         </p:nvSpPr>
         <p:spPr>
           <a:xfrm>
-            <a:off x="180000" y="1994398"/>
-            <a:ext cx="3097127" cy="144000"/>
+            <a:off x="108000" y="4280400"/>
+            <a:ext cx="1494422" cy="162000"/>
           </a:xfrm>
           <a:prstGeom prst="rect">
             <a:avLst/>
@@ -3649,28 +4435,28 @@
           </a:bodyPr>
           <a:lstStyle/>
           <a:p>
-            <a:pPr algn="l"/>
+            <a:pPr algn="ctr"/>
             <a:r>
               <a:rPr sz="900" b="1" i="0">
                 <a:solidFill>
-                  <a:srgbClr val="404040"/>
+                  <a:srgbClr val="1C3A5F"/>
                 </a:solidFill>
               </a:rPr>
-              <a:t>주말·야간 대응 불가</a:t>
-            </a:r>
-          </a:p>
-        </p:txBody>
-      </p:sp>
-      <p:sp>
-        <p:nvSpPr>
-          <p:cNvPr id="17" name="TextBox 16"/>
+              <a:t>👤 FA 담당자</a:t>
+            </a:r>
+          </a:p>
+        </p:txBody>
+      </p:sp>
+      <p:sp>
+        <p:nvSpPr>
+          <p:cNvPr id="39" name="TextBox 38"/>
           <p:cNvSpPr txBox="1"/>
           <p:nvPr/>
         </p:nvSpPr>
         <p:spPr>
           <a:xfrm>
-            <a:off x="180000" y="2127598"/>
-            <a:ext cx="3097127" cy="144000"/>
+            <a:off x="108000" y="4431600"/>
+            <a:ext cx="1494422" cy="136800"/>
           </a:xfrm>
           <a:prstGeom prst="rect">
             <a:avLst/>
@@ -3683,166 +4469,30 @@
           </a:bodyPr>
           <a:lstStyle/>
           <a:p>
-            <a:pPr algn="l"/>
-            <a:r>
-              <a:rPr sz="850" b="0" i="1">
+            <a:pPr algn="ctr"/>
+            <a:r>
+              <a:rPr sz="750" b="0" i="0">
                 <a:solidFill>
                   <a:srgbClr val="888888"/>
                 </a:solidFill>
               </a:rPr>
-              <a:t>본사 인력 부재 시 분석 지원 중단</a:t>
-            </a:r>
-          </a:p>
-        </p:txBody>
-      </p:sp>
-      <p:sp>
-        <p:nvSpPr>
-          <p:cNvPr id="18" name="TextBox 17"/>
-          <p:cNvSpPr txBox="1"/>
-          <p:nvPr/>
-        </p:nvSpPr>
-        <p:spPr>
-          <a:xfrm>
-            <a:off x="180000" y="2300398"/>
-            <a:ext cx="3097127" cy="144000"/>
-          </a:xfrm>
-          <a:prstGeom prst="rect">
-            <a:avLst/>
-          </a:prstGeom>
-          <a:noFill/>
-        </p:spPr>
-        <p:txBody>
-          <a:bodyPr wrap="square">
-            <a:spAutoFit/>
-          </a:bodyPr>
-          <a:lstStyle/>
-          <a:p>
-            <a:pPr algn="l"/>
-            <a:r>
-              <a:rPr sz="900" b="1" i="0">
-                <a:solidFill>
-                  <a:srgbClr val="404040"/>
-                </a:solidFill>
-              </a:rPr>
-              <a:t>수동 조회 대기시간</a:t>
-            </a:r>
-          </a:p>
-        </p:txBody>
-      </p:sp>
-      <p:sp>
-        <p:nvSpPr>
-          <p:cNvPr id="19" name="TextBox 18"/>
-          <p:cNvSpPr txBox="1"/>
-          <p:nvPr/>
-        </p:nvSpPr>
-        <p:spPr>
-          <a:xfrm>
-            <a:off x="180000" y="2433598"/>
-            <a:ext cx="3097127" cy="144000"/>
-          </a:xfrm>
-          <a:prstGeom prst="rect">
-            <a:avLst/>
-          </a:prstGeom>
-          <a:noFill/>
-        </p:spPr>
-        <p:txBody>
-          <a:bodyPr wrap="square">
-            <a:spAutoFit/>
-          </a:bodyPr>
-          <a:lstStyle/>
-          <a:p>
-            <a:pPr algn="l"/>
-            <a:r>
-              <a:rPr sz="850" b="0" i="1">
-                <a:solidFill>
-                  <a:srgbClr val="888888"/>
-                </a:solidFill>
-              </a:rPr>
-              <a:t>빅데이터 수동 조회로 현장 대응 지연</a:t>
-            </a:r>
-          </a:p>
-        </p:txBody>
-      </p:sp>
-      <p:sp>
-        <p:nvSpPr>
-          <p:cNvPr id="20" name="TextBox 19"/>
-          <p:cNvSpPr txBox="1"/>
-          <p:nvPr/>
-        </p:nvSpPr>
-        <p:spPr>
-          <a:xfrm>
-            <a:off x="180000" y="2606398"/>
-            <a:ext cx="3097127" cy="144000"/>
-          </a:xfrm>
-          <a:prstGeom prst="rect">
-            <a:avLst/>
-          </a:prstGeom>
-          <a:noFill/>
-        </p:spPr>
-        <p:txBody>
-          <a:bodyPr wrap="square">
-            <a:spAutoFit/>
-          </a:bodyPr>
-          <a:lstStyle/>
-          <a:p>
-            <a:pPr algn="l"/>
-            <a:r>
-              <a:rPr sz="900" b="1" i="0">
-                <a:solidFill>
-                  <a:srgbClr val="404040"/>
-                </a:solidFill>
-              </a:rPr>
-              <a:t>인력 비효율</a:t>
-            </a:r>
-          </a:p>
-        </p:txBody>
-      </p:sp>
-      <p:sp>
-        <p:nvSpPr>
-          <p:cNvPr id="21" name="TextBox 20"/>
-          <p:cNvSpPr txBox="1"/>
-          <p:nvPr/>
-        </p:nvSpPr>
-        <p:spPr>
-          <a:xfrm>
-            <a:off x="180000" y="2739598"/>
-            <a:ext cx="3097127" cy="144000"/>
-          </a:xfrm>
-          <a:prstGeom prst="rect">
-            <a:avLst/>
-          </a:prstGeom>
-          <a:noFill/>
-        </p:spPr>
-        <p:txBody>
-          <a:bodyPr wrap="square">
-            <a:spAutoFit/>
-          </a:bodyPr>
-          <a:lstStyle/>
-          <a:p>
-            <a:pPr algn="l"/>
-            <a:r>
-              <a:rPr sz="850" b="0" i="1">
-                <a:solidFill>
-                  <a:srgbClr val="888888"/>
-                </a:solidFill>
-              </a:rPr>
-              <a:t>반복 단순업무로 핵심 업무 집중 저하</a:t>
-            </a:r>
-          </a:p>
-        </p:txBody>
-      </p:sp>
-      <p:sp>
-        <p:nvSpPr>
-          <p:cNvPr id="22" name="Rectangle 21"/>
+              <a:t>SN 입력</a:t>
+            </a:r>
+          </a:p>
+        </p:txBody>
+      </p:sp>
+      <p:sp>
+        <p:nvSpPr>
+          <p:cNvPr id="40" name="Can 39"/>
           <p:cNvSpPr/>
           <p:nvPr/>
         </p:nvSpPr>
         <p:spPr>
           <a:xfrm>
-            <a:off x="108000" y="2966398"/>
-            <a:ext cx="3169127" cy="7200"/>
-          </a:xfrm>
-          <a:prstGeom prst="rect">
+            <a:off x="1602422" y="4374000"/>
+            <a:ext cx="251999" cy="136800"/>
+          </a:xfrm>
+          <a:prstGeom prst="can">
             <a:avLst/>
           </a:prstGeom>
           <a:solidFill>
@@ -3876,14 +4526,907 @@
       </p:sp>
       <p:sp>
         <p:nvSpPr>
-          <p:cNvPr id="23" name="Rectangle 22"/>
+          <p:cNvPr id="41" name="Rectangle 40"/>
           <p:cNvSpPr/>
           <p:nvPr/>
         </p:nvSpPr>
         <p:spPr>
           <a:xfrm>
-            <a:off x="108000" y="3056398"/>
-            <a:ext cx="64800" cy="198000"/>
+            <a:off x="1854421" y="4244400"/>
+            <a:ext cx="1494422" cy="396000"/>
+          </a:xfrm>
+          <a:prstGeom prst="rect">
+            <a:avLst/>
+          </a:prstGeom>
+          <a:solidFill>
+            <a:srgbClr val="FFFFFF"/>
+          </a:solidFill>
+          <a:ln w="9525">
+            <a:solidFill>
+              <a:srgbClr val="1C3A5F"/>
+            </a:solidFill>
+          </a:ln>
+        </p:spPr>
+        <p:style>
+          <a:lnRef idx="1">
+            <a:schemeClr val="accent1"/>
+          </a:lnRef>
+          <a:fillRef idx="3">
+            <a:schemeClr val="accent1"/>
+          </a:fillRef>
+          <a:effectRef idx="2">
+            <a:schemeClr val="accent1"/>
+          </a:effectRef>
+          <a:fontRef idx="minor">
+            <a:schemeClr val="lt1"/>
+          </a:fontRef>
+        </p:style>
+        <p:txBody>
+          <a:bodyPr rtlCol="0" anchor="ctr"/>
+          <a:lstStyle/>
+          <a:p>
+            <a:pPr algn="ctr"/>
+          </a:p>
+        </p:txBody>
+      </p:sp>
+      <p:sp>
+        <p:nvSpPr>
+          <p:cNvPr id="42" name="TextBox 41"/>
+          <p:cNvSpPr txBox="1"/>
+          <p:nvPr/>
+        </p:nvSpPr>
+        <p:spPr>
+          <a:xfrm>
+            <a:off x="1854421" y="4280400"/>
+            <a:ext cx="1494422" cy="162000"/>
+          </a:xfrm>
+          <a:prstGeom prst="rect">
+            <a:avLst/>
+          </a:prstGeom>
+          <a:noFill/>
+        </p:spPr>
+        <p:txBody>
+          <a:bodyPr wrap="square">
+            <a:spAutoFit/>
+          </a:bodyPr>
+          <a:lstStyle/>
+          <a:p>
+            <a:pPr algn="ctr"/>
+            <a:r>
+              <a:rPr sz="900" b="1" i="0">
+                <a:solidFill>
+                  <a:srgbClr val="1C3A5F"/>
+                </a:solidFill>
+              </a:rPr>
+              <a:t>💬 Knox Messenger</a:t>
+            </a:r>
+          </a:p>
+        </p:txBody>
+      </p:sp>
+      <p:sp>
+        <p:nvSpPr>
+          <p:cNvPr id="43" name="TextBox 42"/>
+          <p:cNvSpPr txBox="1"/>
+          <p:nvPr/>
+        </p:nvSpPr>
+        <p:spPr>
+          <a:xfrm>
+            <a:off x="1854421" y="4431600"/>
+            <a:ext cx="1494422" cy="136800"/>
+          </a:xfrm>
+          <a:prstGeom prst="rect">
+            <a:avLst/>
+          </a:prstGeom>
+          <a:noFill/>
+        </p:spPr>
+        <p:txBody>
+          <a:bodyPr wrap="square">
+            <a:spAutoFit/>
+          </a:bodyPr>
+          <a:lstStyle/>
+          <a:p>
+            <a:pPr algn="ctr"/>
+            <a:r>
+              <a:rPr sz="750" b="0" i="0">
+                <a:solidFill>
+                  <a:srgbClr val="888888"/>
+                </a:solidFill>
+              </a:rPr>
+              <a:t>메시지 전달</a:t>
+            </a:r>
+          </a:p>
+        </p:txBody>
+      </p:sp>
+      <p:sp>
+        <p:nvSpPr>
+          <p:cNvPr id="44" name="Can 43"/>
+          <p:cNvSpPr/>
+          <p:nvPr/>
+        </p:nvSpPr>
+        <p:spPr>
+          <a:xfrm>
+            <a:off x="3348844" y="4374000"/>
+            <a:ext cx="251999" cy="136800"/>
+          </a:xfrm>
+          <a:prstGeom prst="can">
+            <a:avLst/>
+          </a:prstGeom>
+          <a:solidFill>
+            <a:srgbClr val="D8D8D8"/>
+          </a:solidFill>
+          <a:ln>
+            <a:noFill/>
+          </a:ln>
+        </p:spPr>
+        <p:style>
+          <a:lnRef idx="1">
+            <a:schemeClr val="accent1"/>
+          </a:lnRef>
+          <a:fillRef idx="3">
+            <a:schemeClr val="accent1"/>
+          </a:fillRef>
+          <a:effectRef idx="2">
+            <a:schemeClr val="accent1"/>
+          </a:effectRef>
+          <a:fontRef idx="minor">
+            <a:schemeClr val="lt1"/>
+          </a:fontRef>
+        </p:style>
+        <p:txBody>
+          <a:bodyPr rtlCol="0" anchor="ctr"/>
+          <a:lstStyle/>
+          <a:p>
+            <a:pPr algn="ctr"/>
+          </a:p>
+        </p:txBody>
+      </p:sp>
+      <p:sp>
+        <p:nvSpPr>
+          <p:cNvPr id="45" name="Rectangle 44"/>
+          <p:cNvSpPr/>
+          <p:nvPr/>
+        </p:nvSpPr>
+        <p:spPr>
+          <a:xfrm>
+            <a:off x="3600843" y="4244400"/>
+            <a:ext cx="1494422" cy="396000"/>
+          </a:xfrm>
+          <a:prstGeom prst="rect">
+            <a:avLst/>
+          </a:prstGeom>
+          <a:solidFill>
+            <a:srgbClr val="FFFFFF"/>
+          </a:solidFill>
+          <a:ln w="9525">
+            <a:solidFill>
+              <a:srgbClr val="1C3A5F"/>
+            </a:solidFill>
+          </a:ln>
+        </p:spPr>
+        <p:style>
+          <a:lnRef idx="1">
+            <a:schemeClr val="accent1"/>
+          </a:lnRef>
+          <a:fillRef idx="3">
+            <a:schemeClr val="accent1"/>
+          </a:fillRef>
+          <a:effectRef idx="2">
+            <a:schemeClr val="accent1"/>
+          </a:effectRef>
+          <a:fontRef idx="minor">
+            <a:schemeClr val="lt1"/>
+          </a:fontRef>
+        </p:style>
+        <p:txBody>
+          <a:bodyPr rtlCol="0" anchor="ctr"/>
+          <a:lstStyle/>
+          <a:p>
+            <a:pPr algn="ctr"/>
+          </a:p>
+        </p:txBody>
+      </p:sp>
+      <p:sp>
+        <p:nvSpPr>
+          <p:cNvPr id="46" name="TextBox 45"/>
+          <p:cNvSpPr txBox="1"/>
+          <p:nvPr/>
+        </p:nvSpPr>
+        <p:spPr>
+          <a:xfrm>
+            <a:off x="3600843" y="4280400"/>
+            <a:ext cx="1494422" cy="162000"/>
+          </a:xfrm>
+          <a:prstGeom prst="rect">
+            <a:avLst/>
+          </a:prstGeom>
+          <a:noFill/>
+        </p:spPr>
+        <p:txBody>
+          <a:bodyPr wrap="square">
+            <a:spAutoFit/>
+          </a:bodyPr>
+          <a:lstStyle/>
+          <a:p>
+            <a:pPr algn="ctr"/>
+            <a:r>
+              <a:rPr sz="900" b="1" i="0">
+                <a:solidFill>
+                  <a:srgbClr val="1C3A5F"/>
+                </a:solidFill>
+              </a:rPr>
+              <a:t>⚙ FA 분석 자동화 서버</a:t>
+            </a:r>
+          </a:p>
+        </p:txBody>
+      </p:sp>
+      <p:sp>
+        <p:nvSpPr>
+          <p:cNvPr id="47" name="TextBox 46"/>
+          <p:cNvSpPr txBox="1"/>
+          <p:nvPr/>
+        </p:nvSpPr>
+        <p:spPr>
+          <a:xfrm>
+            <a:off x="3600843" y="4431600"/>
+            <a:ext cx="1494422" cy="136800"/>
+          </a:xfrm>
+          <a:prstGeom prst="rect">
+            <a:avLst/>
+          </a:prstGeom>
+          <a:noFill/>
+        </p:spPr>
+        <p:txBody>
+          <a:bodyPr wrap="square">
+            <a:spAutoFit/>
+          </a:bodyPr>
+          <a:lstStyle/>
+          <a:p>
+            <a:pPr algn="ctr"/>
+            <a:r>
+              <a:rPr sz="750" b="0" i="0">
+                <a:solidFill>
+                  <a:srgbClr val="888888"/>
+                </a:solidFill>
+              </a:rPr>
+              <a:t>분석 요청 수신</a:t>
+            </a:r>
+          </a:p>
+        </p:txBody>
+      </p:sp>
+      <p:sp>
+        <p:nvSpPr>
+          <p:cNvPr id="48" name="Can 47"/>
+          <p:cNvSpPr/>
+          <p:nvPr/>
+        </p:nvSpPr>
+        <p:spPr>
+          <a:xfrm>
+            <a:off x="5095265" y="4374000"/>
+            <a:ext cx="251999" cy="136800"/>
+          </a:xfrm>
+          <a:prstGeom prst="can">
+            <a:avLst/>
+          </a:prstGeom>
+          <a:solidFill>
+            <a:srgbClr val="D8D8D8"/>
+          </a:solidFill>
+          <a:ln>
+            <a:noFill/>
+          </a:ln>
+        </p:spPr>
+        <p:style>
+          <a:lnRef idx="1">
+            <a:schemeClr val="accent1"/>
+          </a:lnRef>
+          <a:fillRef idx="3">
+            <a:schemeClr val="accent1"/>
+          </a:fillRef>
+          <a:effectRef idx="2">
+            <a:schemeClr val="accent1"/>
+          </a:effectRef>
+          <a:fontRef idx="minor">
+            <a:schemeClr val="lt1"/>
+          </a:fontRef>
+        </p:style>
+        <p:txBody>
+          <a:bodyPr rtlCol="0" anchor="ctr"/>
+          <a:lstStyle/>
+          <a:p>
+            <a:pPr algn="ctr"/>
+          </a:p>
+        </p:txBody>
+      </p:sp>
+      <p:sp>
+        <p:nvSpPr>
+          <p:cNvPr id="49" name="Rectangle 48"/>
+          <p:cNvSpPr/>
+          <p:nvPr/>
+        </p:nvSpPr>
+        <p:spPr>
+          <a:xfrm>
+            <a:off x="5347264" y="4244400"/>
+            <a:ext cx="1494422" cy="396000"/>
+          </a:xfrm>
+          <a:prstGeom prst="rect">
+            <a:avLst/>
+          </a:prstGeom>
+          <a:solidFill>
+            <a:srgbClr val="FFFFFF"/>
+          </a:solidFill>
+          <a:ln w="9525">
+            <a:solidFill>
+              <a:srgbClr val="1C3A5F"/>
+            </a:solidFill>
+          </a:ln>
+        </p:spPr>
+        <p:style>
+          <a:lnRef idx="1">
+            <a:schemeClr val="accent1"/>
+          </a:lnRef>
+          <a:fillRef idx="3">
+            <a:schemeClr val="accent1"/>
+          </a:fillRef>
+          <a:effectRef idx="2">
+            <a:schemeClr val="accent1"/>
+          </a:effectRef>
+          <a:fontRef idx="minor">
+            <a:schemeClr val="lt1"/>
+          </a:fontRef>
+        </p:style>
+        <p:txBody>
+          <a:bodyPr rtlCol="0" anchor="ctr"/>
+          <a:lstStyle/>
+          <a:p>
+            <a:pPr algn="ctr"/>
+          </a:p>
+        </p:txBody>
+      </p:sp>
+      <p:sp>
+        <p:nvSpPr>
+          <p:cNvPr id="50" name="TextBox 49"/>
+          <p:cNvSpPr txBox="1"/>
+          <p:nvPr/>
+        </p:nvSpPr>
+        <p:spPr>
+          <a:xfrm>
+            <a:off x="5347264" y="4280400"/>
+            <a:ext cx="1494422" cy="162000"/>
+          </a:xfrm>
+          <a:prstGeom prst="rect">
+            <a:avLst/>
+          </a:prstGeom>
+          <a:noFill/>
+        </p:spPr>
+        <p:txBody>
+          <a:bodyPr wrap="square">
+            <a:spAutoFit/>
+          </a:bodyPr>
+          <a:lstStyle/>
+          <a:p>
+            <a:pPr algn="ctr"/>
+            <a:r>
+              <a:rPr sz="900" b="1" i="0">
+                <a:solidFill>
+                  <a:srgbClr val="1C3A5F"/>
+                </a:solidFill>
+              </a:rPr>
+              <a:t>🗄 빅데이터 포털</a:t>
+            </a:r>
+          </a:p>
+        </p:txBody>
+      </p:sp>
+      <p:sp>
+        <p:nvSpPr>
+          <p:cNvPr id="51" name="TextBox 50"/>
+          <p:cNvSpPr txBox="1"/>
+          <p:nvPr/>
+        </p:nvSpPr>
+        <p:spPr>
+          <a:xfrm>
+            <a:off x="5347264" y="4431600"/>
+            <a:ext cx="1494422" cy="136800"/>
+          </a:xfrm>
+          <a:prstGeom prst="rect">
+            <a:avLst/>
+          </a:prstGeom>
+          <a:noFill/>
+        </p:spPr>
+        <p:txBody>
+          <a:bodyPr wrap="square">
+            <a:spAutoFit/>
+          </a:bodyPr>
+          <a:lstStyle/>
+          <a:p>
+            <a:pPr algn="ctr"/>
+            <a:r>
+              <a:rPr sz="750" b="0" i="0">
+                <a:solidFill>
+                  <a:srgbClr val="888888"/>
+                </a:solidFill>
+              </a:rPr>
+              <a:t>자동 조회</a:t>
+            </a:r>
+          </a:p>
+        </p:txBody>
+      </p:sp>
+      <p:sp>
+        <p:nvSpPr>
+          <p:cNvPr id="52" name="Can 51"/>
+          <p:cNvSpPr/>
+          <p:nvPr/>
+        </p:nvSpPr>
+        <p:spPr>
+          <a:xfrm>
+            <a:off x="6841687" y="4374000"/>
+            <a:ext cx="251999" cy="136800"/>
+          </a:xfrm>
+          <a:prstGeom prst="can">
+            <a:avLst/>
+          </a:prstGeom>
+          <a:solidFill>
+            <a:srgbClr val="D8D8D8"/>
+          </a:solidFill>
+          <a:ln>
+            <a:noFill/>
+          </a:ln>
+        </p:spPr>
+        <p:style>
+          <a:lnRef idx="1">
+            <a:schemeClr val="accent1"/>
+          </a:lnRef>
+          <a:fillRef idx="3">
+            <a:schemeClr val="accent1"/>
+          </a:fillRef>
+          <a:effectRef idx="2">
+            <a:schemeClr val="accent1"/>
+          </a:effectRef>
+          <a:fontRef idx="minor">
+            <a:schemeClr val="lt1"/>
+          </a:fontRef>
+        </p:style>
+        <p:txBody>
+          <a:bodyPr rtlCol="0" anchor="ctr"/>
+          <a:lstStyle/>
+          <a:p>
+            <a:pPr algn="ctr"/>
+          </a:p>
+        </p:txBody>
+      </p:sp>
+      <p:sp>
+        <p:nvSpPr>
+          <p:cNvPr id="53" name="Rectangle 52"/>
+          <p:cNvSpPr/>
+          <p:nvPr/>
+        </p:nvSpPr>
+        <p:spPr>
+          <a:xfrm>
+            <a:off x="7093686" y="4244400"/>
+            <a:ext cx="1494422" cy="396000"/>
+          </a:xfrm>
+          <a:prstGeom prst="rect">
+            <a:avLst/>
+          </a:prstGeom>
+          <a:solidFill>
+            <a:srgbClr val="FFFFFF"/>
+          </a:solidFill>
+          <a:ln w="9525">
+            <a:solidFill>
+              <a:srgbClr val="1C3A5F"/>
+            </a:solidFill>
+          </a:ln>
+        </p:spPr>
+        <p:style>
+          <a:lnRef idx="1">
+            <a:schemeClr val="accent1"/>
+          </a:lnRef>
+          <a:fillRef idx="3">
+            <a:schemeClr val="accent1"/>
+          </a:fillRef>
+          <a:effectRef idx="2">
+            <a:schemeClr val="accent1"/>
+          </a:effectRef>
+          <a:fontRef idx="minor">
+            <a:schemeClr val="lt1"/>
+          </a:fontRef>
+        </p:style>
+        <p:txBody>
+          <a:bodyPr rtlCol="0" anchor="ctr"/>
+          <a:lstStyle/>
+          <a:p>
+            <a:pPr algn="ctr"/>
+          </a:p>
+        </p:txBody>
+      </p:sp>
+      <p:sp>
+        <p:nvSpPr>
+          <p:cNvPr id="54" name="TextBox 53"/>
+          <p:cNvSpPr txBox="1"/>
+          <p:nvPr/>
+        </p:nvSpPr>
+        <p:spPr>
+          <a:xfrm>
+            <a:off x="7093686" y="4280400"/>
+            <a:ext cx="1494422" cy="162000"/>
+          </a:xfrm>
+          <a:prstGeom prst="rect">
+            <a:avLst/>
+          </a:prstGeom>
+          <a:noFill/>
+        </p:spPr>
+        <p:txBody>
+          <a:bodyPr wrap="square">
+            <a:spAutoFit/>
+          </a:bodyPr>
+          <a:lstStyle/>
+          <a:p>
+            <a:pPr algn="ctr"/>
+            <a:r>
+              <a:rPr sz="900" b="1" i="0">
+                <a:solidFill>
+                  <a:srgbClr val="1C3A5F"/>
+                </a:solidFill>
+              </a:rPr>
+              <a:t>📄 분석 결과 생성</a:t>
+            </a:r>
+          </a:p>
+        </p:txBody>
+      </p:sp>
+      <p:sp>
+        <p:nvSpPr>
+          <p:cNvPr id="55" name="TextBox 54"/>
+          <p:cNvSpPr txBox="1"/>
+          <p:nvPr/>
+        </p:nvSpPr>
+        <p:spPr>
+          <a:xfrm>
+            <a:off x="7093686" y="4431600"/>
+            <a:ext cx="1494422" cy="136800"/>
+          </a:xfrm>
+          <a:prstGeom prst="rect">
+            <a:avLst/>
+          </a:prstGeom>
+          <a:noFill/>
+        </p:spPr>
+        <p:txBody>
+          <a:bodyPr wrap="square">
+            <a:spAutoFit/>
+          </a:bodyPr>
+          <a:lstStyle/>
+          <a:p>
+            <a:pPr algn="ctr"/>
+            <a:r>
+              <a:rPr sz="750" b="0" i="0">
+                <a:solidFill>
+                  <a:srgbClr val="888888"/>
+                </a:solidFill>
+              </a:rPr>
+              <a:t>PDF / HTML</a:t>
+            </a:r>
+          </a:p>
+        </p:txBody>
+      </p:sp>
+      <p:sp>
+        <p:nvSpPr>
+          <p:cNvPr id="56" name="Can 55"/>
+          <p:cNvSpPr/>
+          <p:nvPr/>
+        </p:nvSpPr>
+        <p:spPr>
+          <a:xfrm>
+            <a:off x="8588108" y="4374000"/>
+            <a:ext cx="251999" cy="136800"/>
+          </a:xfrm>
+          <a:prstGeom prst="can">
+            <a:avLst/>
+          </a:prstGeom>
+          <a:solidFill>
+            <a:srgbClr val="D8D8D8"/>
+          </a:solidFill>
+          <a:ln>
+            <a:noFill/>
+          </a:ln>
+        </p:spPr>
+        <p:style>
+          <a:lnRef idx="1">
+            <a:schemeClr val="accent1"/>
+          </a:lnRef>
+          <a:fillRef idx="3">
+            <a:schemeClr val="accent1"/>
+          </a:fillRef>
+          <a:effectRef idx="2">
+            <a:schemeClr val="accent1"/>
+          </a:effectRef>
+          <a:fontRef idx="minor">
+            <a:schemeClr val="lt1"/>
+          </a:fontRef>
+        </p:style>
+        <p:txBody>
+          <a:bodyPr rtlCol="0" anchor="ctr"/>
+          <a:lstStyle/>
+          <a:p>
+            <a:pPr algn="ctr"/>
+          </a:p>
+        </p:txBody>
+      </p:sp>
+      <p:sp>
+        <p:nvSpPr>
+          <p:cNvPr id="57" name="Rectangle 56"/>
+          <p:cNvSpPr/>
+          <p:nvPr/>
+        </p:nvSpPr>
+        <p:spPr>
+          <a:xfrm>
+            <a:off x="8840107" y="4244400"/>
+            <a:ext cx="1494422" cy="396000"/>
+          </a:xfrm>
+          <a:prstGeom prst="rect">
+            <a:avLst/>
+          </a:prstGeom>
+          <a:solidFill>
+            <a:srgbClr val="FFFFFF"/>
+          </a:solidFill>
+          <a:ln w="9525">
+            <a:solidFill>
+              <a:srgbClr val="1C3A5F"/>
+            </a:solidFill>
+          </a:ln>
+        </p:spPr>
+        <p:style>
+          <a:lnRef idx="1">
+            <a:schemeClr val="accent1"/>
+          </a:lnRef>
+          <a:fillRef idx="3">
+            <a:schemeClr val="accent1"/>
+          </a:fillRef>
+          <a:effectRef idx="2">
+            <a:schemeClr val="accent1"/>
+          </a:effectRef>
+          <a:fontRef idx="minor">
+            <a:schemeClr val="lt1"/>
+          </a:fontRef>
+        </p:style>
+        <p:txBody>
+          <a:bodyPr rtlCol="0" anchor="ctr"/>
+          <a:lstStyle/>
+          <a:p>
+            <a:pPr algn="ctr"/>
+          </a:p>
+        </p:txBody>
+      </p:sp>
+      <p:sp>
+        <p:nvSpPr>
+          <p:cNvPr id="58" name="TextBox 57"/>
+          <p:cNvSpPr txBox="1"/>
+          <p:nvPr/>
+        </p:nvSpPr>
+        <p:spPr>
+          <a:xfrm>
+            <a:off x="8840107" y="4280400"/>
+            <a:ext cx="1494422" cy="162000"/>
+          </a:xfrm>
+          <a:prstGeom prst="rect">
+            <a:avLst/>
+          </a:prstGeom>
+          <a:noFill/>
+        </p:spPr>
+        <p:txBody>
+          <a:bodyPr wrap="square">
+            <a:spAutoFit/>
+          </a:bodyPr>
+          <a:lstStyle/>
+          <a:p>
+            <a:pPr algn="ctr"/>
+            <a:r>
+              <a:rPr sz="900" b="1" i="0">
+                <a:solidFill>
+                  <a:srgbClr val="1C3A5F"/>
+                </a:solidFill>
+              </a:rPr>
+              <a:t>💬 Knox Messenger</a:t>
+            </a:r>
+          </a:p>
+        </p:txBody>
+      </p:sp>
+      <p:sp>
+        <p:nvSpPr>
+          <p:cNvPr id="59" name="TextBox 58"/>
+          <p:cNvSpPr txBox="1"/>
+          <p:nvPr/>
+        </p:nvSpPr>
+        <p:spPr>
+          <a:xfrm>
+            <a:off x="8840107" y="4431600"/>
+            <a:ext cx="1494422" cy="136800"/>
+          </a:xfrm>
+          <a:prstGeom prst="rect">
+            <a:avLst/>
+          </a:prstGeom>
+          <a:noFill/>
+        </p:spPr>
+        <p:txBody>
+          <a:bodyPr wrap="square">
+            <a:spAutoFit/>
+          </a:bodyPr>
+          <a:lstStyle/>
+          <a:p>
+            <a:pPr algn="ctr"/>
+            <a:r>
+              <a:rPr sz="750" b="0" i="0">
+                <a:solidFill>
+                  <a:srgbClr val="888888"/>
+                </a:solidFill>
+              </a:rPr>
+              <a:t>결과 전달</a:t>
+            </a:r>
+          </a:p>
+        </p:txBody>
+      </p:sp>
+      <p:sp>
+        <p:nvSpPr>
+          <p:cNvPr id="60" name="Can 59"/>
+          <p:cNvSpPr/>
+          <p:nvPr/>
+        </p:nvSpPr>
+        <p:spPr>
+          <a:xfrm>
+            <a:off x="10334530" y="4374000"/>
+            <a:ext cx="251999" cy="136800"/>
+          </a:xfrm>
+          <a:prstGeom prst="can">
+            <a:avLst/>
+          </a:prstGeom>
+          <a:solidFill>
+            <a:srgbClr val="D8D8D8"/>
+          </a:solidFill>
+          <a:ln>
+            <a:noFill/>
+          </a:ln>
+        </p:spPr>
+        <p:style>
+          <a:lnRef idx="1">
+            <a:schemeClr val="accent1"/>
+          </a:lnRef>
+          <a:fillRef idx="3">
+            <a:schemeClr val="accent1"/>
+          </a:fillRef>
+          <a:effectRef idx="2">
+            <a:schemeClr val="accent1"/>
+          </a:effectRef>
+          <a:fontRef idx="minor">
+            <a:schemeClr val="lt1"/>
+          </a:fontRef>
+        </p:style>
+        <p:txBody>
+          <a:bodyPr rtlCol="0" anchor="ctr"/>
+          <a:lstStyle/>
+          <a:p>
+            <a:pPr algn="ctr"/>
+          </a:p>
+        </p:txBody>
+      </p:sp>
+      <p:sp>
+        <p:nvSpPr>
+          <p:cNvPr id="61" name="Rectangle 60"/>
+          <p:cNvSpPr/>
+          <p:nvPr/>
+        </p:nvSpPr>
+        <p:spPr>
+          <a:xfrm>
+            <a:off x="10586529" y="4244400"/>
+            <a:ext cx="1494422" cy="396000"/>
+          </a:xfrm>
+          <a:prstGeom prst="rect">
+            <a:avLst/>
+          </a:prstGeom>
+          <a:solidFill>
+            <a:srgbClr val="FFFFFF"/>
+          </a:solidFill>
+          <a:ln w="9525">
+            <a:solidFill>
+              <a:srgbClr val="1C3A5F"/>
+            </a:solidFill>
+          </a:ln>
+        </p:spPr>
+        <p:style>
+          <a:lnRef idx="1">
+            <a:schemeClr val="accent1"/>
+          </a:lnRef>
+          <a:fillRef idx="3">
+            <a:schemeClr val="accent1"/>
+          </a:fillRef>
+          <a:effectRef idx="2">
+            <a:schemeClr val="accent1"/>
+          </a:effectRef>
+          <a:fontRef idx="minor">
+            <a:schemeClr val="lt1"/>
+          </a:fontRef>
+        </p:style>
+        <p:txBody>
+          <a:bodyPr rtlCol="0" anchor="ctr"/>
+          <a:lstStyle/>
+          <a:p>
+            <a:pPr algn="ctr"/>
+          </a:p>
+        </p:txBody>
+      </p:sp>
+      <p:sp>
+        <p:nvSpPr>
+          <p:cNvPr id="62" name="TextBox 61"/>
+          <p:cNvSpPr txBox="1"/>
+          <p:nvPr/>
+        </p:nvSpPr>
+        <p:spPr>
+          <a:xfrm>
+            <a:off x="10586529" y="4280400"/>
+            <a:ext cx="1494422" cy="162000"/>
+          </a:xfrm>
+          <a:prstGeom prst="rect">
+            <a:avLst/>
+          </a:prstGeom>
+          <a:noFill/>
+        </p:spPr>
+        <p:txBody>
+          <a:bodyPr wrap="square">
+            <a:spAutoFit/>
+          </a:bodyPr>
+          <a:lstStyle/>
+          <a:p>
+            <a:pPr algn="ctr"/>
+            <a:r>
+              <a:rPr sz="900" b="1" i="0">
+                <a:solidFill>
+                  <a:srgbClr val="1C3A5F"/>
+                </a:solidFill>
+              </a:rPr>
+              <a:t>👤 FA 담당자</a:t>
+            </a:r>
+          </a:p>
+        </p:txBody>
+      </p:sp>
+      <p:sp>
+        <p:nvSpPr>
+          <p:cNvPr id="63" name="TextBox 62"/>
+          <p:cNvSpPr txBox="1"/>
+          <p:nvPr/>
+        </p:nvSpPr>
+        <p:spPr>
+          <a:xfrm>
+            <a:off x="10586529" y="4431600"/>
+            <a:ext cx="1494422" cy="136800"/>
+          </a:xfrm>
+          <a:prstGeom prst="rect">
+            <a:avLst/>
+          </a:prstGeom>
+          <a:noFill/>
+        </p:spPr>
+        <p:txBody>
+          <a:bodyPr wrap="square">
+            <a:spAutoFit/>
+          </a:bodyPr>
+          <a:lstStyle/>
+          <a:p>
+            <a:pPr algn="ctr"/>
+            <a:r>
+              <a:rPr sz="750" b="0" i="0">
+                <a:solidFill>
+                  <a:srgbClr val="888888"/>
+                </a:solidFill>
+              </a:rPr>
+              <a:t>결과 수신</a:t>
+            </a:r>
+          </a:p>
+        </p:txBody>
+      </p:sp>
+      <p:sp>
+        <p:nvSpPr>
+          <p:cNvPr id="64" name="Rectangle 63"/>
+          <p:cNvSpPr/>
+          <p:nvPr/>
+        </p:nvSpPr>
+        <p:spPr>
+          <a:xfrm>
+            <a:off x="0" y="6670800"/>
+            <a:ext cx="12188952" cy="187200"/>
           </a:xfrm>
           <a:prstGeom prst="rect">
             <a:avLst/>
@@ -3919,14 +5462,14 @@
       </p:sp>
       <p:sp>
         <p:nvSpPr>
-          <p:cNvPr id="24" name="TextBox 23"/>
+          <p:cNvPr id="65" name="TextBox 64"/>
           <p:cNvSpPr txBox="1"/>
           <p:nvPr/>
         </p:nvSpPr>
         <p:spPr>
           <a:xfrm>
-            <a:off x="216000" y="3038398"/>
-            <a:ext cx="3061127" cy="234000"/>
+            <a:off x="216000" y="6685200"/>
+            <a:ext cx="9141714" cy="136800"/>
           </a:xfrm>
           <a:prstGeom prst="rect">
             <a:avLst/>
@@ -3941,2460 +5484,7 @@
           <a:p>
             <a:pPr algn="l"/>
             <a:r>
-              <a:rPr sz="1050" b="1" i="0">
-                <a:solidFill>
-                  <a:srgbClr val="1C3A5F"/>
-                </a:solidFill>
-              </a:rPr>
-              <a:t>개선 목표</a:t>
-            </a:r>
-          </a:p>
-        </p:txBody>
-      </p:sp>
-      <p:sp>
-        <p:nvSpPr>
-          <p:cNvPr id="25" name="TextBox 24"/>
-          <p:cNvSpPr txBox="1"/>
-          <p:nvPr/>
-        </p:nvSpPr>
-        <p:spPr>
-          <a:xfrm>
-            <a:off x="180000" y="3290397"/>
-            <a:ext cx="3097127" cy="180000"/>
-          </a:xfrm>
-          <a:prstGeom prst="rect">
-            <a:avLst/>
-          </a:prstGeom>
-          <a:noFill/>
-        </p:spPr>
-        <p:txBody>
-          <a:bodyPr wrap="square">
-            <a:spAutoFit/>
-          </a:bodyPr>
-          <a:lstStyle/>
-          <a:p>
-            <a:pPr algn="l"/>
-            <a:r>
-              <a:rPr sz="900" b="0" i="0">
-                <a:solidFill>
-                  <a:srgbClr val="404040"/>
-                </a:solidFill>
-              </a:rPr>
-              <a:t>▸  챗봇 기반 24/7 자동 분석 체계 구축</a:t>
-            </a:r>
-          </a:p>
-        </p:txBody>
-      </p:sp>
-      <p:sp>
-        <p:nvSpPr>
-          <p:cNvPr id="26" name="TextBox 25"/>
-          <p:cNvSpPr txBox="1"/>
-          <p:nvPr/>
-        </p:nvSpPr>
-        <p:spPr>
-          <a:xfrm>
-            <a:off x="180000" y="3470397"/>
-            <a:ext cx="3097127" cy="180000"/>
-          </a:xfrm>
-          <a:prstGeom prst="rect">
-            <a:avLst/>
-          </a:prstGeom>
-          <a:noFill/>
-        </p:spPr>
-        <p:txBody>
-          <a:bodyPr wrap="square">
-            <a:spAutoFit/>
-          </a:bodyPr>
-          <a:lstStyle/>
-          <a:p>
-            <a:pPr algn="l"/>
-            <a:r>
-              <a:rPr sz="900" b="0" i="0">
-                <a:solidFill>
-                  <a:srgbClr val="404040"/>
-                </a:solidFill>
-              </a:rPr>
-              <a:t>▸  고객 VOC 해결율 향상</a:t>
-            </a:r>
-          </a:p>
-        </p:txBody>
-      </p:sp>
-      <p:sp>
-        <p:nvSpPr>
-          <p:cNvPr id="27" name="TextBox 26"/>
-          <p:cNvSpPr txBox="1"/>
-          <p:nvPr/>
-        </p:nvSpPr>
-        <p:spPr>
-          <a:xfrm>
-            <a:off x="180000" y="3650397"/>
-            <a:ext cx="3097127" cy="180000"/>
-          </a:xfrm>
-          <a:prstGeom prst="rect">
-            <a:avLst/>
-          </a:prstGeom>
-          <a:noFill/>
-        </p:spPr>
-        <p:txBody>
-          <a:bodyPr wrap="square">
-            <a:spAutoFit/>
-          </a:bodyPr>
-          <a:lstStyle/>
-          <a:p>
-            <a:pPr algn="l"/>
-            <a:r>
-              <a:rPr sz="900" b="0" i="0">
-                <a:solidFill>
-                  <a:srgbClr val="404040"/>
-                </a:solidFill>
-              </a:rPr>
-              <a:t>▸  본사 업무 효율성 제고</a:t>
-            </a:r>
-          </a:p>
-        </p:txBody>
-      </p:sp>
-      <p:sp>
-        <p:nvSpPr>
-          <p:cNvPr id="28" name="TextBox 27"/>
-          <p:cNvSpPr txBox="1"/>
-          <p:nvPr/>
-        </p:nvSpPr>
-        <p:spPr>
-          <a:xfrm>
-            <a:off x="180000" y="3830397"/>
-            <a:ext cx="3097127" cy="180000"/>
-          </a:xfrm>
-          <a:prstGeom prst="rect">
-            <a:avLst/>
-          </a:prstGeom>
-          <a:noFill/>
-        </p:spPr>
-        <p:txBody>
-          <a:bodyPr wrap="square">
-            <a:spAutoFit/>
-          </a:bodyPr>
-          <a:lstStyle/>
-          <a:p>
-            <a:pPr algn="l"/>
-            <a:r>
-              <a:rPr sz="900" b="0" i="0">
-                <a:solidFill>
-                  <a:srgbClr val="404040"/>
-                </a:solidFill>
-              </a:rPr>
-              <a:t>▸  FA 대응 비용 절감</a:t>
-            </a:r>
-          </a:p>
-        </p:txBody>
-      </p:sp>
-      <p:sp>
-        <p:nvSpPr>
-          <p:cNvPr id="29" name="Rectangle 28"/>
-          <p:cNvSpPr/>
-          <p:nvPr/>
-        </p:nvSpPr>
-        <p:spPr>
-          <a:xfrm>
-            <a:off x="3385127" y="720000"/>
-            <a:ext cx="64800" cy="198000"/>
-          </a:xfrm>
-          <a:prstGeom prst="rect">
-            <a:avLst/>
-          </a:prstGeom>
-          <a:solidFill>
-            <a:srgbClr val="1C3A5F"/>
-          </a:solidFill>
-          <a:ln>
-            <a:noFill/>
-          </a:ln>
-        </p:spPr>
-        <p:style>
-          <a:lnRef idx="1">
-            <a:schemeClr val="accent1"/>
-          </a:lnRef>
-          <a:fillRef idx="3">
-            <a:schemeClr val="accent1"/>
-          </a:fillRef>
-          <a:effectRef idx="2">
-            <a:schemeClr val="accent1"/>
-          </a:effectRef>
-          <a:fontRef idx="minor">
-            <a:schemeClr val="lt1"/>
-          </a:fontRef>
-        </p:style>
-        <p:txBody>
-          <a:bodyPr rtlCol="0" anchor="ctr"/>
-          <a:lstStyle/>
-          <a:p>
-            <a:pPr algn="ctr"/>
-          </a:p>
-        </p:txBody>
-      </p:sp>
-      <p:sp>
-        <p:nvSpPr>
-          <p:cNvPr id="30" name="TextBox 29"/>
-          <p:cNvSpPr txBox="1"/>
-          <p:nvPr/>
-        </p:nvSpPr>
-        <p:spPr>
-          <a:xfrm>
-            <a:off x="3493127" y="702000"/>
-            <a:ext cx="4280022" cy="234000"/>
-          </a:xfrm>
-          <a:prstGeom prst="rect">
-            <a:avLst/>
-          </a:prstGeom>
-          <a:noFill/>
-        </p:spPr>
-        <p:txBody>
-          <a:bodyPr wrap="square">
-            <a:spAutoFit/>
-          </a:bodyPr>
-          <a:lstStyle/>
-          <a:p>
-            <a:pPr algn="l"/>
-            <a:r>
-              <a:rPr sz="1050" b="1" i="0">
-                <a:solidFill>
-                  <a:srgbClr val="1C3A5F"/>
-                </a:solidFill>
-              </a:rPr>
-              <a:t>시스템 구성</a:t>
-            </a:r>
-          </a:p>
-        </p:txBody>
-      </p:sp>
-      <p:sp>
-        <p:nvSpPr>
-          <p:cNvPr id="31" name="Rectangle 30"/>
-          <p:cNvSpPr/>
-          <p:nvPr/>
-        </p:nvSpPr>
-        <p:spPr>
-          <a:xfrm>
-            <a:off x="3529127" y="972000"/>
-            <a:ext cx="4100022" cy="295200"/>
-          </a:xfrm>
-          <a:prstGeom prst="rect">
-            <a:avLst/>
-          </a:prstGeom>
-          <a:solidFill>
-            <a:srgbClr val="FFFFFF"/>
-          </a:solidFill>
-          <a:ln w="10160">
-            <a:solidFill>
-              <a:srgbClr val="1C3A5F"/>
-            </a:solidFill>
-          </a:ln>
-        </p:spPr>
-        <p:style>
-          <a:lnRef idx="1">
-            <a:schemeClr val="accent1"/>
-          </a:lnRef>
-          <a:fillRef idx="3">
-            <a:schemeClr val="accent1"/>
-          </a:fillRef>
-          <a:effectRef idx="2">
-            <a:schemeClr val="accent1"/>
-          </a:effectRef>
-          <a:fontRef idx="minor">
-            <a:schemeClr val="lt1"/>
-          </a:fontRef>
-        </p:style>
-        <p:txBody>
-          <a:bodyPr rtlCol="0" anchor="ctr"/>
-          <a:lstStyle/>
-          <a:p>
-            <a:pPr algn="ctr"/>
-          </a:p>
-        </p:txBody>
-      </p:sp>
-      <p:sp>
-        <p:nvSpPr>
-          <p:cNvPr id="32" name="TextBox 31"/>
-          <p:cNvSpPr txBox="1"/>
-          <p:nvPr/>
-        </p:nvSpPr>
-        <p:spPr>
-          <a:xfrm>
-            <a:off x="3529127" y="1000800"/>
-            <a:ext cx="4100022" cy="180000"/>
-          </a:xfrm>
-          <a:prstGeom prst="rect">
-            <a:avLst/>
-          </a:prstGeom>
-          <a:noFill/>
-        </p:spPr>
-        <p:txBody>
-          <a:bodyPr wrap="square">
-            <a:spAutoFit/>
-          </a:bodyPr>
-          <a:lstStyle/>
-          <a:p>
-            <a:pPr algn="ctr"/>
-            <a:r>
-              <a:rPr sz="950" b="1" i="0">
-                <a:solidFill>
-                  <a:srgbClr val="1C3A5F"/>
-                </a:solidFill>
-              </a:rPr>
-              <a:t>👤  FA 담당자</a:t>
-            </a:r>
-          </a:p>
-        </p:txBody>
-      </p:sp>
-      <p:sp>
-        <p:nvSpPr>
-          <p:cNvPr id="33" name="TextBox 32"/>
-          <p:cNvSpPr txBox="1"/>
-          <p:nvPr/>
-        </p:nvSpPr>
-        <p:spPr>
-          <a:xfrm>
-            <a:off x="3529127" y="1170000"/>
-            <a:ext cx="4100022" cy="144000"/>
-          </a:xfrm>
-          <a:prstGeom prst="rect">
-            <a:avLst/>
-          </a:prstGeom>
-          <a:noFill/>
-        </p:spPr>
-        <p:txBody>
-          <a:bodyPr wrap="square">
-            <a:spAutoFit/>
-          </a:bodyPr>
-          <a:lstStyle/>
-          <a:p>
-            <a:pPr algn="ctr"/>
-            <a:r>
-              <a:rPr sz="800" b="0" i="0">
-                <a:solidFill>
-                  <a:srgbClr val="888888"/>
-                </a:solidFill>
-              </a:rPr>
-              <a:t>SN 입력 요청</a:t>
-            </a:r>
-          </a:p>
-        </p:txBody>
-      </p:sp>
-      <p:sp>
-        <p:nvSpPr>
-          <p:cNvPr id="34" name="Parallelogram 33"/>
-          <p:cNvSpPr/>
-          <p:nvPr/>
-        </p:nvSpPr>
-        <p:spPr>
-          <a:xfrm>
-            <a:off x="5514338" y="1267200"/>
-            <a:ext cx="129600" cy="54432000000"/>
-          </a:xfrm>
-          <a:prstGeom prst="parallelogram">
-            <a:avLst/>
-          </a:prstGeom>
-          <a:solidFill>
-            <a:srgbClr val="888888"/>
-          </a:solidFill>
-          <a:ln>
-            <a:noFill/>
-          </a:ln>
-        </p:spPr>
-        <p:style>
-          <a:lnRef idx="1">
-            <a:schemeClr val="accent1"/>
-          </a:lnRef>
-          <a:fillRef idx="3">
-            <a:schemeClr val="accent1"/>
-          </a:fillRef>
-          <a:effectRef idx="2">
-            <a:schemeClr val="accent1"/>
-          </a:effectRef>
-          <a:fontRef idx="minor">
-            <a:schemeClr val="lt1"/>
-          </a:fontRef>
-        </p:style>
-        <p:txBody>
-          <a:bodyPr rtlCol="0" anchor="ctr"/>
-          <a:lstStyle/>
-          <a:p>
-            <a:pPr algn="ctr"/>
-          </a:p>
-        </p:txBody>
-      </p:sp>
-      <p:sp>
-        <p:nvSpPr>
-          <p:cNvPr id="35" name="TextBox 34"/>
-          <p:cNvSpPr txBox="1"/>
-          <p:nvPr/>
-        </p:nvSpPr>
-        <p:spPr>
-          <a:xfrm>
-            <a:off x="5679938" y="1285200"/>
-            <a:ext cx="648000" cy="115200"/>
-          </a:xfrm>
-          <a:prstGeom prst="rect">
-            <a:avLst/>
-          </a:prstGeom>
-          <a:noFill/>
-        </p:spPr>
-        <p:txBody>
-          <a:bodyPr wrap="square">
-            <a:spAutoFit/>
-          </a:bodyPr>
-          <a:lstStyle/>
-          <a:p>
-            <a:pPr algn="l"/>
-            <a:r>
               <a:rPr sz="750" b="0" i="0">
-                <a:solidFill>
-                  <a:srgbClr val="888888"/>
-                </a:solidFill>
-              </a:rPr>
-              <a:t>SN 입력</a:t>
-            </a:r>
-          </a:p>
-        </p:txBody>
-      </p:sp>
-      <p:sp>
-        <p:nvSpPr>
-          <p:cNvPr id="36" name="Rectangle 35"/>
-          <p:cNvSpPr/>
-          <p:nvPr/>
-        </p:nvSpPr>
-        <p:spPr>
-          <a:xfrm>
-            <a:off x="3529127" y="1418400"/>
-            <a:ext cx="4100022" cy="295200"/>
-          </a:xfrm>
-          <a:prstGeom prst="rect">
-            <a:avLst/>
-          </a:prstGeom>
-          <a:solidFill>
-            <a:srgbClr val="FFFFFF"/>
-          </a:solidFill>
-          <a:ln w="10160">
-            <a:solidFill>
-              <a:srgbClr val="1C3A5F"/>
-            </a:solidFill>
-          </a:ln>
-        </p:spPr>
-        <p:style>
-          <a:lnRef idx="1">
-            <a:schemeClr val="accent1"/>
-          </a:lnRef>
-          <a:fillRef idx="3">
-            <a:schemeClr val="accent1"/>
-          </a:fillRef>
-          <a:effectRef idx="2">
-            <a:schemeClr val="accent1"/>
-          </a:effectRef>
-          <a:fontRef idx="minor">
-            <a:schemeClr val="lt1"/>
-          </a:fontRef>
-        </p:style>
-        <p:txBody>
-          <a:bodyPr rtlCol="0" anchor="ctr"/>
-          <a:lstStyle/>
-          <a:p>
-            <a:pPr algn="ctr"/>
-          </a:p>
-        </p:txBody>
-      </p:sp>
-      <p:sp>
-        <p:nvSpPr>
-          <p:cNvPr id="37" name="TextBox 36"/>
-          <p:cNvSpPr txBox="1"/>
-          <p:nvPr/>
-        </p:nvSpPr>
-        <p:spPr>
-          <a:xfrm>
-            <a:off x="3529127" y="1447200"/>
-            <a:ext cx="4100022" cy="180000"/>
-          </a:xfrm>
-          <a:prstGeom prst="rect">
-            <a:avLst/>
-          </a:prstGeom>
-          <a:noFill/>
-        </p:spPr>
-        <p:txBody>
-          <a:bodyPr wrap="square">
-            <a:spAutoFit/>
-          </a:bodyPr>
-          <a:lstStyle/>
-          <a:p>
-            <a:pPr algn="ctr"/>
-            <a:r>
-              <a:rPr sz="950" b="1" i="0">
-                <a:solidFill>
-                  <a:srgbClr val="1C3A5F"/>
-                </a:solidFill>
-              </a:rPr>
-              <a:t>💬  Knox Messenger</a:t>
-            </a:r>
-          </a:p>
-        </p:txBody>
-      </p:sp>
-      <p:sp>
-        <p:nvSpPr>
-          <p:cNvPr id="38" name="TextBox 37"/>
-          <p:cNvSpPr txBox="1"/>
-          <p:nvPr/>
-        </p:nvSpPr>
-        <p:spPr>
-          <a:xfrm>
-            <a:off x="3529127" y="1616400"/>
-            <a:ext cx="4100022" cy="144000"/>
-          </a:xfrm>
-          <a:prstGeom prst="rect">
-            <a:avLst/>
-          </a:prstGeom>
-          <a:noFill/>
-        </p:spPr>
-        <p:txBody>
-          <a:bodyPr wrap="square">
-            <a:spAutoFit/>
-          </a:bodyPr>
-          <a:lstStyle/>
-          <a:p>
-            <a:pPr algn="ctr"/>
-            <a:r>
-              <a:rPr sz="800" b="0" i="0">
-                <a:solidFill>
-                  <a:srgbClr val="888888"/>
-                </a:solidFill>
-              </a:rPr>
-              <a:t>메시지 전달</a:t>
-            </a:r>
-          </a:p>
-        </p:txBody>
-      </p:sp>
-      <p:sp>
-        <p:nvSpPr>
-          <p:cNvPr id="39" name="Parallelogram 38"/>
-          <p:cNvSpPr/>
-          <p:nvPr/>
-        </p:nvSpPr>
-        <p:spPr>
-          <a:xfrm>
-            <a:off x="5514338" y="1713600"/>
-            <a:ext cx="129600" cy="54432000000"/>
-          </a:xfrm>
-          <a:prstGeom prst="parallelogram">
-            <a:avLst/>
-          </a:prstGeom>
-          <a:solidFill>
-            <a:srgbClr val="888888"/>
-          </a:solidFill>
-          <a:ln>
-            <a:noFill/>
-          </a:ln>
-        </p:spPr>
-        <p:style>
-          <a:lnRef idx="1">
-            <a:schemeClr val="accent1"/>
-          </a:lnRef>
-          <a:fillRef idx="3">
-            <a:schemeClr val="accent1"/>
-          </a:fillRef>
-          <a:effectRef idx="2">
-            <a:schemeClr val="accent1"/>
-          </a:effectRef>
-          <a:fontRef idx="minor">
-            <a:schemeClr val="lt1"/>
-          </a:fontRef>
-        </p:style>
-        <p:txBody>
-          <a:bodyPr rtlCol="0" anchor="ctr"/>
-          <a:lstStyle/>
-          <a:p>
-            <a:pPr algn="ctr"/>
-          </a:p>
-        </p:txBody>
-      </p:sp>
-      <p:sp>
-        <p:nvSpPr>
-          <p:cNvPr id="40" name="TextBox 39"/>
-          <p:cNvSpPr txBox="1"/>
-          <p:nvPr/>
-        </p:nvSpPr>
-        <p:spPr>
-          <a:xfrm>
-            <a:off x="5679938" y="1731600"/>
-            <a:ext cx="648000" cy="115200"/>
-          </a:xfrm>
-          <a:prstGeom prst="rect">
-            <a:avLst/>
-          </a:prstGeom>
-          <a:noFill/>
-        </p:spPr>
-        <p:txBody>
-          <a:bodyPr wrap="square">
-            <a:spAutoFit/>
-          </a:bodyPr>
-          <a:lstStyle/>
-          <a:p>
-            <a:pPr algn="l"/>
-            <a:r>
-              <a:rPr sz="750" b="0" i="0">
-                <a:solidFill>
-                  <a:srgbClr val="888888"/>
-                </a:solidFill>
-              </a:rPr>
-              <a:t>Webhook 수신</a:t>
-            </a:r>
-          </a:p>
-        </p:txBody>
-      </p:sp>
-      <p:sp>
-        <p:nvSpPr>
-          <p:cNvPr id="41" name="Rectangle 40"/>
-          <p:cNvSpPr/>
-          <p:nvPr/>
-        </p:nvSpPr>
-        <p:spPr>
-          <a:xfrm>
-            <a:off x="3529127" y="1864800"/>
-            <a:ext cx="4100022" cy="295200"/>
-          </a:xfrm>
-          <a:prstGeom prst="rect">
-            <a:avLst/>
-          </a:prstGeom>
-          <a:solidFill>
-            <a:srgbClr val="FFFFFF"/>
-          </a:solidFill>
-          <a:ln w="10160">
-            <a:solidFill>
-              <a:srgbClr val="1C3A5F"/>
-            </a:solidFill>
-          </a:ln>
-        </p:spPr>
-        <p:style>
-          <a:lnRef idx="1">
-            <a:schemeClr val="accent1"/>
-          </a:lnRef>
-          <a:fillRef idx="3">
-            <a:schemeClr val="accent1"/>
-          </a:fillRef>
-          <a:effectRef idx="2">
-            <a:schemeClr val="accent1"/>
-          </a:effectRef>
-          <a:fontRef idx="minor">
-            <a:schemeClr val="lt1"/>
-          </a:fontRef>
-        </p:style>
-        <p:txBody>
-          <a:bodyPr rtlCol="0" anchor="ctr"/>
-          <a:lstStyle/>
-          <a:p>
-            <a:pPr algn="ctr"/>
-          </a:p>
-        </p:txBody>
-      </p:sp>
-      <p:sp>
-        <p:nvSpPr>
-          <p:cNvPr id="42" name="TextBox 41"/>
-          <p:cNvSpPr txBox="1"/>
-          <p:nvPr/>
-        </p:nvSpPr>
-        <p:spPr>
-          <a:xfrm>
-            <a:off x="3529127" y="1893600"/>
-            <a:ext cx="4100022" cy="180000"/>
-          </a:xfrm>
-          <a:prstGeom prst="rect">
-            <a:avLst/>
-          </a:prstGeom>
-          <a:noFill/>
-        </p:spPr>
-        <p:txBody>
-          <a:bodyPr wrap="square">
-            <a:spAutoFit/>
-          </a:bodyPr>
-          <a:lstStyle/>
-          <a:p>
-            <a:pPr algn="ctr"/>
-            <a:r>
-              <a:rPr sz="950" b="1" i="0">
-                <a:solidFill>
-                  <a:srgbClr val="1C3A5F"/>
-                </a:solidFill>
-              </a:rPr>
-              <a:t>⚙  FA 챗봇 서비스</a:t>
-            </a:r>
-          </a:p>
-        </p:txBody>
-      </p:sp>
-      <p:sp>
-        <p:nvSpPr>
-          <p:cNvPr id="43" name="TextBox 42"/>
-          <p:cNvSpPr txBox="1"/>
-          <p:nvPr/>
-        </p:nvSpPr>
-        <p:spPr>
-          <a:xfrm>
-            <a:off x="3529127" y="2062800"/>
-            <a:ext cx="4100022" cy="144000"/>
-          </a:xfrm>
-          <a:prstGeom prst="rect">
-            <a:avLst/>
-          </a:prstGeom>
-          <a:noFill/>
-        </p:spPr>
-        <p:txBody>
-          <a:bodyPr wrap="square">
-            <a:spAutoFit/>
-          </a:bodyPr>
-          <a:lstStyle/>
-          <a:p>
-            <a:pPr algn="ctr"/>
-            <a:r>
-              <a:rPr sz="800" b="0" i="0">
-                <a:solidFill>
-                  <a:srgbClr val="888888"/>
-                </a:solidFill>
-              </a:rPr>
-              <a:t>FastAPI 서버</a:t>
-            </a:r>
-          </a:p>
-        </p:txBody>
-      </p:sp>
-      <p:sp>
-        <p:nvSpPr>
-          <p:cNvPr id="44" name="Parallelogram 43"/>
-          <p:cNvSpPr/>
-          <p:nvPr/>
-        </p:nvSpPr>
-        <p:spPr>
-          <a:xfrm>
-            <a:off x="5514338" y="2160000"/>
-            <a:ext cx="129600" cy="54432000000"/>
-          </a:xfrm>
-          <a:prstGeom prst="parallelogram">
-            <a:avLst/>
-          </a:prstGeom>
-          <a:solidFill>
-            <a:srgbClr val="888888"/>
-          </a:solidFill>
-          <a:ln>
-            <a:noFill/>
-          </a:ln>
-        </p:spPr>
-        <p:style>
-          <a:lnRef idx="1">
-            <a:schemeClr val="accent1"/>
-          </a:lnRef>
-          <a:fillRef idx="3">
-            <a:schemeClr val="accent1"/>
-          </a:fillRef>
-          <a:effectRef idx="2">
-            <a:schemeClr val="accent1"/>
-          </a:effectRef>
-          <a:fontRef idx="minor">
-            <a:schemeClr val="lt1"/>
-          </a:fontRef>
-        </p:style>
-        <p:txBody>
-          <a:bodyPr rtlCol="0" anchor="ctr"/>
-          <a:lstStyle/>
-          <a:p>
-            <a:pPr algn="ctr"/>
-          </a:p>
-        </p:txBody>
-      </p:sp>
-      <p:sp>
-        <p:nvSpPr>
-          <p:cNvPr id="45" name="TextBox 44"/>
-          <p:cNvSpPr txBox="1"/>
-          <p:nvPr/>
-        </p:nvSpPr>
-        <p:spPr>
-          <a:xfrm>
-            <a:off x="5679938" y="2178000"/>
-            <a:ext cx="648000" cy="115200"/>
-          </a:xfrm>
-          <a:prstGeom prst="rect">
-            <a:avLst/>
-          </a:prstGeom>
-          <a:noFill/>
-        </p:spPr>
-        <p:txBody>
-          <a:bodyPr wrap="square">
-            <a:spAutoFit/>
-          </a:bodyPr>
-          <a:lstStyle/>
-          <a:p>
-            <a:pPr algn="l"/>
-            <a:r>
-              <a:rPr sz="750" b="0" i="0">
-                <a:solidFill>
-                  <a:srgbClr val="888888"/>
-                </a:solidFill>
-              </a:rPr>
-              <a:t>자동 조회</a:t>
-            </a:r>
-          </a:p>
-        </p:txBody>
-      </p:sp>
-      <p:sp>
-        <p:nvSpPr>
-          <p:cNvPr id="46" name="Rectangle 45"/>
-          <p:cNvSpPr/>
-          <p:nvPr/>
-        </p:nvSpPr>
-        <p:spPr>
-          <a:xfrm>
-            <a:off x="3529127" y="2311200"/>
-            <a:ext cx="4100022" cy="295200"/>
-          </a:xfrm>
-          <a:prstGeom prst="rect">
-            <a:avLst/>
-          </a:prstGeom>
-          <a:solidFill>
-            <a:srgbClr val="FFFFFF"/>
-          </a:solidFill>
-          <a:ln w="10160">
-            <a:solidFill>
-              <a:srgbClr val="1C3A5F"/>
-            </a:solidFill>
-          </a:ln>
-        </p:spPr>
-        <p:style>
-          <a:lnRef idx="1">
-            <a:schemeClr val="accent1"/>
-          </a:lnRef>
-          <a:fillRef idx="3">
-            <a:schemeClr val="accent1"/>
-          </a:fillRef>
-          <a:effectRef idx="2">
-            <a:schemeClr val="accent1"/>
-          </a:effectRef>
-          <a:fontRef idx="minor">
-            <a:schemeClr val="lt1"/>
-          </a:fontRef>
-        </p:style>
-        <p:txBody>
-          <a:bodyPr rtlCol="0" anchor="ctr"/>
-          <a:lstStyle/>
-          <a:p>
-            <a:pPr algn="ctr"/>
-          </a:p>
-        </p:txBody>
-      </p:sp>
-      <p:sp>
-        <p:nvSpPr>
-          <p:cNvPr id="47" name="TextBox 46"/>
-          <p:cNvSpPr txBox="1"/>
-          <p:nvPr/>
-        </p:nvSpPr>
-        <p:spPr>
-          <a:xfrm>
-            <a:off x="3529127" y="2340000"/>
-            <a:ext cx="4100022" cy="180000"/>
-          </a:xfrm>
-          <a:prstGeom prst="rect">
-            <a:avLst/>
-          </a:prstGeom>
-          <a:noFill/>
-        </p:spPr>
-        <p:txBody>
-          <a:bodyPr wrap="square">
-            <a:spAutoFit/>
-          </a:bodyPr>
-          <a:lstStyle/>
-          <a:p>
-            <a:pPr algn="ctr"/>
-            <a:r>
-              <a:rPr sz="950" b="1" i="0">
-                <a:solidFill>
-                  <a:srgbClr val="1C3A5F"/>
-                </a:solidFill>
-              </a:rPr>
-              <a:t>🗄  빅데이터 포털</a:t>
-            </a:r>
-          </a:p>
-        </p:txBody>
-      </p:sp>
-      <p:sp>
-        <p:nvSpPr>
-          <p:cNvPr id="48" name="TextBox 47"/>
-          <p:cNvSpPr txBox="1"/>
-          <p:nvPr/>
-        </p:nvSpPr>
-        <p:spPr>
-          <a:xfrm>
-            <a:off x="3529127" y="2509200"/>
-            <a:ext cx="4100022" cy="144000"/>
-          </a:xfrm>
-          <a:prstGeom prst="rect">
-            <a:avLst/>
-          </a:prstGeom>
-          <a:noFill/>
-        </p:spPr>
-        <p:txBody>
-          <a:bodyPr wrap="square">
-            <a:spAutoFit/>
-          </a:bodyPr>
-          <a:lstStyle/>
-          <a:p>
-            <a:pPr algn="ctr"/>
-            <a:r>
-              <a:rPr sz="800" b="0" i="0">
-                <a:solidFill>
-                  <a:srgbClr val="888888"/>
-                </a:solidFill>
-              </a:rPr>
-              <a:t>자동 로그인·조회</a:t>
-            </a:r>
-          </a:p>
-        </p:txBody>
-      </p:sp>
-      <p:sp>
-        <p:nvSpPr>
-          <p:cNvPr id="49" name="Parallelogram 48"/>
-          <p:cNvSpPr/>
-          <p:nvPr/>
-        </p:nvSpPr>
-        <p:spPr>
-          <a:xfrm>
-            <a:off x="5514338" y="2606400"/>
-            <a:ext cx="129600" cy="54432000000"/>
-          </a:xfrm>
-          <a:prstGeom prst="parallelogram">
-            <a:avLst/>
-          </a:prstGeom>
-          <a:solidFill>
-            <a:srgbClr val="888888"/>
-          </a:solidFill>
-          <a:ln>
-            <a:noFill/>
-          </a:ln>
-        </p:spPr>
-        <p:style>
-          <a:lnRef idx="1">
-            <a:schemeClr val="accent1"/>
-          </a:lnRef>
-          <a:fillRef idx="3">
-            <a:schemeClr val="accent1"/>
-          </a:fillRef>
-          <a:effectRef idx="2">
-            <a:schemeClr val="accent1"/>
-          </a:effectRef>
-          <a:fontRef idx="minor">
-            <a:schemeClr val="lt1"/>
-          </a:fontRef>
-        </p:style>
-        <p:txBody>
-          <a:bodyPr rtlCol="0" anchor="ctr"/>
-          <a:lstStyle/>
-          <a:p>
-            <a:pPr algn="ctr"/>
-          </a:p>
-        </p:txBody>
-      </p:sp>
-      <p:sp>
-        <p:nvSpPr>
-          <p:cNvPr id="50" name="TextBox 49"/>
-          <p:cNvSpPr txBox="1"/>
-          <p:nvPr/>
-        </p:nvSpPr>
-        <p:spPr>
-          <a:xfrm>
-            <a:off x="5679938" y="2624400"/>
-            <a:ext cx="648000" cy="115200"/>
-          </a:xfrm>
-          <a:prstGeom prst="rect">
-            <a:avLst/>
-          </a:prstGeom>
-          <a:noFill/>
-        </p:spPr>
-        <p:txBody>
-          <a:bodyPr wrap="square">
-            <a:spAutoFit/>
-          </a:bodyPr>
-          <a:lstStyle/>
-          <a:p>
-            <a:pPr algn="l"/>
-            <a:r>
-              <a:rPr sz="750" b="0" i="0">
-                <a:solidFill>
-                  <a:srgbClr val="888888"/>
-                </a:solidFill>
-              </a:rPr>
-              <a:t>결과 반환</a:t>
-            </a:r>
-          </a:p>
-        </p:txBody>
-      </p:sp>
-      <p:sp>
-        <p:nvSpPr>
-          <p:cNvPr id="51" name="Rectangle 50"/>
-          <p:cNvSpPr/>
-          <p:nvPr/>
-        </p:nvSpPr>
-        <p:spPr>
-          <a:xfrm>
-            <a:off x="3529127" y="2757600"/>
-            <a:ext cx="4100022" cy="295200"/>
-          </a:xfrm>
-          <a:prstGeom prst="rect">
-            <a:avLst/>
-          </a:prstGeom>
-          <a:solidFill>
-            <a:srgbClr val="FFFFFF"/>
-          </a:solidFill>
-          <a:ln w="10160">
-            <a:solidFill>
-              <a:srgbClr val="1C3A5F"/>
-            </a:solidFill>
-          </a:ln>
-        </p:spPr>
-        <p:style>
-          <a:lnRef idx="1">
-            <a:schemeClr val="accent1"/>
-          </a:lnRef>
-          <a:fillRef idx="3">
-            <a:schemeClr val="accent1"/>
-          </a:fillRef>
-          <a:effectRef idx="2">
-            <a:schemeClr val="accent1"/>
-          </a:effectRef>
-          <a:fontRef idx="minor">
-            <a:schemeClr val="lt1"/>
-          </a:fontRef>
-        </p:style>
-        <p:txBody>
-          <a:bodyPr rtlCol="0" anchor="ctr"/>
-          <a:lstStyle/>
-          <a:p>
-            <a:pPr algn="ctr"/>
-          </a:p>
-        </p:txBody>
-      </p:sp>
-      <p:sp>
-        <p:nvSpPr>
-          <p:cNvPr id="52" name="TextBox 51"/>
-          <p:cNvSpPr txBox="1"/>
-          <p:nvPr/>
-        </p:nvSpPr>
-        <p:spPr>
-          <a:xfrm>
-            <a:off x="3529127" y="2786400"/>
-            <a:ext cx="4100022" cy="180000"/>
-          </a:xfrm>
-          <a:prstGeom prst="rect">
-            <a:avLst/>
-          </a:prstGeom>
-          <a:noFill/>
-        </p:spPr>
-        <p:txBody>
-          <a:bodyPr wrap="square">
-            <a:spAutoFit/>
-          </a:bodyPr>
-          <a:lstStyle/>
-          <a:p>
-            <a:pPr algn="ctr"/>
-            <a:r>
-              <a:rPr sz="950" b="1" i="0">
-                <a:solidFill>
-                  <a:srgbClr val="1C3A5F"/>
-                </a:solidFill>
-              </a:rPr>
-              <a:t>📄  분석 결과 생성</a:t>
-            </a:r>
-          </a:p>
-        </p:txBody>
-      </p:sp>
-      <p:sp>
-        <p:nvSpPr>
-          <p:cNvPr id="53" name="TextBox 52"/>
-          <p:cNvSpPr txBox="1"/>
-          <p:nvPr/>
-        </p:nvSpPr>
-        <p:spPr>
-          <a:xfrm>
-            <a:off x="3529127" y="2955600"/>
-            <a:ext cx="4100022" cy="144000"/>
-          </a:xfrm>
-          <a:prstGeom prst="rect">
-            <a:avLst/>
-          </a:prstGeom>
-          <a:noFill/>
-        </p:spPr>
-        <p:txBody>
-          <a:bodyPr wrap="square">
-            <a:spAutoFit/>
-          </a:bodyPr>
-          <a:lstStyle/>
-          <a:p>
-            <a:pPr algn="ctr"/>
-            <a:r>
-              <a:rPr sz="800" b="0" i="0">
-                <a:solidFill>
-                  <a:srgbClr val="888888"/>
-                </a:solidFill>
-              </a:rPr>
-              <a:t>PDF / HTML 리포트</a:t>
-            </a:r>
-          </a:p>
-        </p:txBody>
-      </p:sp>
-      <p:sp>
-        <p:nvSpPr>
-          <p:cNvPr id="54" name="Parallelogram 53"/>
-          <p:cNvSpPr/>
-          <p:nvPr/>
-        </p:nvSpPr>
-        <p:spPr>
-          <a:xfrm>
-            <a:off x="5514338" y="3052800"/>
-            <a:ext cx="129600" cy="54432000000"/>
-          </a:xfrm>
-          <a:prstGeom prst="parallelogram">
-            <a:avLst/>
-          </a:prstGeom>
-          <a:solidFill>
-            <a:srgbClr val="888888"/>
-          </a:solidFill>
-          <a:ln>
-            <a:noFill/>
-          </a:ln>
-        </p:spPr>
-        <p:style>
-          <a:lnRef idx="1">
-            <a:schemeClr val="accent1"/>
-          </a:lnRef>
-          <a:fillRef idx="3">
-            <a:schemeClr val="accent1"/>
-          </a:fillRef>
-          <a:effectRef idx="2">
-            <a:schemeClr val="accent1"/>
-          </a:effectRef>
-          <a:fontRef idx="minor">
-            <a:schemeClr val="lt1"/>
-          </a:fontRef>
-        </p:style>
-        <p:txBody>
-          <a:bodyPr rtlCol="0" anchor="ctr"/>
-          <a:lstStyle/>
-          <a:p>
-            <a:pPr algn="ctr"/>
-          </a:p>
-        </p:txBody>
-      </p:sp>
-      <p:sp>
-        <p:nvSpPr>
-          <p:cNvPr id="55" name="TextBox 54"/>
-          <p:cNvSpPr txBox="1"/>
-          <p:nvPr/>
-        </p:nvSpPr>
-        <p:spPr>
-          <a:xfrm>
-            <a:off x="5679938" y="3070800"/>
-            <a:ext cx="648000" cy="115200"/>
-          </a:xfrm>
-          <a:prstGeom prst="rect">
-            <a:avLst/>
-          </a:prstGeom>
-          <a:noFill/>
-        </p:spPr>
-        <p:txBody>
-          <a:bodyPr wrap="square">
-            <a:spAutoFit/>
-          </a:bodyPr>
-          <a:lstStyle/>
-          <a:p>
-            <a:pPr algn="l"/>
-            <a:r>
-              <a:rPr sz="750" b="0" i="0">
-                <a:solidFill>
-                  <a:srgbClr val="888888"/>
-                </a:solidFill>
-              </a:rPr>
-              <a:t>자동 전송</a:t>
-            </a:r>
-          </a:p>
-        </p:txBody>
-      </p:sp>
-      <p:sp>
-        <p:nvSpPr>
-          <p:cNvPr id="56" name="Rectangle 55"/>
-          <p:cNvSpPr/>
-          <p:nvPr/>
-        </p:nvSpPr>
-        <p:spPr>
-          <a:xfrm>
-            <a:off x="3529127" y="3204000"/>
-            <a:ext cx="4100022" cy="295200"/>
-          </a:xfrm>
-          <a:prstGeom prst="rect">
-            <a:avLst/>
-          </a:prstGeom>
-          <a:solidFill>
-            <a:srgbClr val="FFFFFF"/>
-          </a:solidFill>
-          <a:ln w="10160">
-            <a:solidFill>
-              <a:srgbClr val="1C3A5F"/>
-            </a:solidFill>
-          </a:ln>
-        </p:spPr>
-        <p:style>
-          <a:lnRef idx="1">
-            <a:schemeClr val="accent1"/>
-          </a:lnRef>
-          <a:fillRef idx="3">
-            <a:schemeClr val="accent1"/>
-          </a:fillRef>
-          <a:effectRef idx="2">
-            <a:schemeClr val="accent1"/>
-          </a:effectRef>
-          <a:fontRef idx="minor">
-            <a:schemeClr val="lt1"/>
-          </a:fontRef>
-        </p:style>
-        <p:txBody>
-          <a:bodyPr rtlCol="0" anchor="ctr"/>
-          <a:lstStyle/>
-          <a:p>
-            <a:pPr algn="ctr"/>
-          </a:p>
-        </p:txBody>
-      </p:sp>
-      <p:sp>
-        <p:nvSpPr>
-          <p:cNvPr id="57" name="TextBox 56"/>
-          <p:cNvSpPr txBox="1"/>
-          <p:nvPr/>
-        </p:nvSpPr>
-        <p:spPr>
-          <a:xfrm>
-            <a:off x="3529127" y="3232800"/>
-            <a:ext cx="4100022" cy="180000"/>
-          </a:xfrm>
-          <a:prstGeom prst="rect">
-            <a:avLst/>
-          </a:prstGeom>
-          <a:noFill/>
-        </p:spPr>
-        <p:txBody>
-          <a:bodyPr wrap="square">
-            <a:spAutoFit/>
-          </a:bodyPr>
-          <a:lstStyle/>
-          <a:p>
-            <a:pPr algn="ctr"/>
-            <a:r>
-              <a:rPr sz="950" b="1" i="0">
-                <a:solidFill>
-                  <a:srgbClr val="1C3A5F"/>
-                </a:solidFill>
-              </a:rPr>
-              <a:t>💬  Knox Messenger</a:t>
-            </a:r>
-          </a:p>
-        </p:txBody>
-      </p:sp>
-      <p:sp>
-        <p:nvSpPr>
-          <p:cNvPr id="58" name="TextBox 57"/>
-          <p:cNvSpPr txBox="1"/>
-          <p:nvPr/>
-        </p:nvSpPr>
-        <p:spPr>
-          <a:xfrm>
-            <a:off x="3529127" y="3402000"/>
-            <a:ext cx="4100022" cy="144000"/>
-          </a:xfrm>
-          <a:prstGeom prst="rect">
-            <a:avLst/>
-          </a:prstGeom>
-          <a:noFill/>
-        </p:spPr>
-        <p:txBody>
-          <a:bodyPr wrap="square">
-            <a:spAutoFit/>
-          </a:bodyPr>
-          <a:lstStyle/>
-          <a:p>
-            <a:pPr algn="ctr"/>
-            <a:r>
-              <a:rPr sz="800" b="0" i="0">
-                <a:solidFill>
-                  <a:srgbClr val="888888"/>
-                </a:solidFill>
-              </a:rPr>
-              <a:t>결과 메시지 수신</a:t>
-            </a:r>
-          </a:p>
-        </p:txBody>
-      </p:sp>
-      <p:sp>
-        <p:nvSpPr>
-          <p:cNvPr id="59" name="Parallelogram 58"/>
-          <p:cNvSpPr/>
-          <p:nvPr/>
-        </p:nvSpPr>
-        <p:spPr>
-          <a:xfrm>
-            <a:off x="5514338" y="3499200"/>
-            <a:ext cx="129600" cy="54432000000"/>
-          </a:xfrm>
-          <a:prstGeom prst="parallelogram">
-            <a:avLst/>
-          </a:prstGeom>
-          <a:solidFill>
-            <a:srgbClr val="888888"/>
-          </a:solidFill>
-          <a:ln>
-            <a:noFill/>
-          </a:ln>
-        </p:spPr>
-        <p:style>
-          <a:lnRef idx="1">
-            <a:schemeClr val="accent1"/>
-          </a:lnRef>
-          <a:fillRef idx="3">
-            <a:schemeClr val="accent1"/>
-          </a:fillRef>
-          <a:effectRef idx="2">
-            <a:schemeClr val="accent1"/>
-          </a:effectRef>
-          <a:fontRef idx="minor">
-            <a:schemeClr val="lt1"/>
-          </a:fontRef>
-        </p:style>
-        <p:txBody>
-          <a:bodyPr rtlCol="0" anchor="ctr"/>
-          <a:lstStyle/>
-          <a:p>
-            <a:pPr algn="ctr"/>
-          </a:p>
-        </p:txBody>
-      </p:sp>
-      <p:sp>
-        <p:nvSpPr>
-          <p:cNvPr id="60" name="TextBox 59"/>
-          <p:cNvSpPr txBox="1"/>
-          <p:nvPr/>
-        </p:nvSpPr>
-        <p:spPr>
-          <a:xfrm>
-            <a:off x="5679938" y="3517200"/>
-            <a:ext cx="648000" cy="115200"/>
-          </a:xfrm>
-          <a:prstGeom prst="rect">
-            <a:avLst/>
-          </a:prstGeom>
-          <a:noFill/>
-        </p:spPr>
-        <p:txBody>
-          <a:bodyPr wrap="square">
-            <a:spAutoFit/>
-          </a:bodyPr>
-          <a:lstStyle/>
-          <a:p>
-            <a:pPr algn="l"/>
-            <a:r>
-              <a:rPr sz="750" b="0" i="0">
-                <a:solidFill>
-                  <a:srgbClr val="888888"/>
-                </a:solidFill>
-              </a:rPr>
-              <a:t>알림 수신</a:t>
-            </a:r>
-          </a:p>
-        </p:txBody>
-      </p:sp>
-      <p:sp>
-        <p:nvSpPr>
-          <p:cNvPr id="61" name="Rectangle 60"/>
-          <p:cNvSpPr/>
-          <p:nvPr/>
-        </p:nvSpPr>
-        <p:spPr>
-          <a:xfrm>
-            <a:off x="3529127" y="3650400"/>
-            <a:ext cx="4100022" cy="295200"/>
-          </a:xfrm>
-          <a:prstGeom prst="rect">
-            <a:avLst/>
-          </a:prstGeom>
-          <a:solidFill>
-            <a:srgbClr val="FFFFFF"/>
-          </a:solidFill>
-          <a:ln w="10160">
-            <a:solidFill>
-              <a:srgbClr val="1C3A5F"/>
-            </a:solidFill>
-          </a:ln>
-        </p:spPr>
-        <p:style>
-          <a:lnRef idx="1">
-            <a:schemeClr val="accent1"/>
-          </a:lnRef>
-          <a:fillRef idx="3">
-            <a:schemeClr val="accent1"/>
-          </a:fillRef>
-          <a:effectRef idx="2">
-            <a:schemeClr val="accent1"/>
-          </a:effectRef>
-          <a:fontRef idx="minor">
-            <a:schemeClr val="lt1"/>
-          </a:fontRef>
-        </p:style>
-        <p:txBody>
-          <a:bodyPr rtlCol="0" anchor="ctr"/>
-          <a:lstStyle/>
-          <a:p>
-            <a:pPr algn="ctr"/>
-          </a:p>
-        </p:txBody>
-      </p:sp>
-      <p:sp>
-        <p:nvSpPr>
-          <p:cNvPr id="62" name="TextBox 61"/>
-          <p:cNvSpPr txBox="1"/>
-          <p:nvPr/>
-        </p:nvSpPr>
-        <p:spPr>
-          <a:xfrm>
-            <a:off x="3529127" y="3679200"/>
-            <a:ext cx="4100022" cy="180000"/>
-          </a:xfrm>
-          <a:prstGeom prst="rect">
-            <a:avLst/>
-          </a:prstGeom>
-          <a:noFill/>
-        </p:spPr>
-        <p:txBody>
-          <a:bodyPr wrap="square">
-            <a:spAutoFit/>
-          </a:bodyPr>
-          <a:lstStyle/>
-          <a:p>
-            <a:pPr algn="ctr"/>
-            <a:r>
-              <a:rPr sz="950" b="1" i="0">
-                <a:solidFill>
-                  <a:srgbClr val="1C3A5F"/>
-                </a:solidFill>
-              </a:rPr>
-              <a:t>👤  FA 담당자</a:t>
-            </a:r>
-          </a:p>
-        </p:txBody>
-      </p:sp>
-      <p:sp>
-        <p:nvSpPr>
-          <p:cNvPr id="63" name="TextBox 62"/>
-          <p:cNvSpPr txBox="1"/>
-          <p:nvPr/>
-        </p:nvSpPr>
-        <p:spPr>
-          <a:xfrm>
-            <a:off x="3529127" y="3848400"/>
-            <a:ext cx="4100022" cy="144000"/>
-          </a:xfrm>
-          <a:prstGeom prst="rect">
-            <a:avLst/>
-          </a:prstGeom>
-          <a:noFill/>
-        </p:spPr>
-        <p:txBody>
-          <a:bodyPr wrap="square">
-            <a:spAutoFit/>
-          </a:bodyPr>
-          <a:lstStyle/>
-          <a:p>
-            <a:pPr algn="ctr"/>
-            <a:r>
-              <a:rPr sz="800" b="0" i="0">
-                <a:solidFill>
-                  <a:srgbClr val="888888"/>
-                </a:solidFill>
-              </a:rPr>
-              <a:t>현장 대응 준비</a:t>
-            </a:r>
-          </a:p>
-        </p:txBody>
-      </p:sp>
-      <p:sp>
-        <p:nvSpPr>
-          <p:cNvPr id="64" name="Rectangle 63"/>
-          <p:cNvSpPr/>
-          <p:nvPr/>
-        </p:nvSpPr>
-        <p:spPr>
-          <a:xfrm>
-            <a:off x="7881150" y="720000"/>
-            <a:ext cx="64800" cy="198000"/>
-          </a:xfrm>
-          <a:prstGeom prst="rect">
-            <a:avLst/>
-          </a:prstGeom>
-          <a:solidFill>
-            <a:srgbClr val="1C3A5F"/>
-          </a:solidFill>
-          <a:ln>
-            <a:noFill/>
-          </a:ln>
-        </p:spPr>
-        <p:style>
-          <a:lnRef idx="1">
-            <a:schemeClr val="accent1"/>
-          </a:lnRef>
-          <a:fillRef idx="3">
-            <a:schemeClr val="accent1"/>
-          </a:fillRef>
-          <a:effectRef idx="2">
-            <a:schemeClr val="accent1"/>
-          </a:effectRef>
-          <a:fontRef idx="minor">
-            <a:schemeClr val="lt1"/>
-          </a:fontRef>
-        </p:style>
-        <p:txBody>
-          <a:bodyPr rtlCol="0" anchor="ctr"/>
-          <a:lstStyle/>
-          <a:p>
-            <a:pPr algn="ctr"/>
-          </a:p>
-        </p:txBody>
-      </p:sp>
-      <p:sp>
-        <p:nvSpPr>
-          <p:cNvPr id="65" name="TextBox 64"/>
-          <p:cNvSpPr txBox="1"/>
-          <p:nvPr/>
-        </p:nvSpPr>
-        <p:spPr>
-          <a:xfrm>
-            <a:off x="7989150" y="702000"/>
-            <a:ext cx="4091801" cy="234000"/>
-          </a:xfrm>
-          <a:prstGeom prst="rect">
-            <a:avLst/>
-          </a:prstGeom>
-          <a:noFill/>
-        </p:spPr>
-        <p:txBody>
-          <a:bodyPr wrap="square">
-            <a:spAutoFit/>
-          </a:bodyPr>
-          <a:lstStyle/>
-          <a:p>
-            <a:pPr algn="l"/>
-            <a:r>
-              <a:rPr sz="1050" b="1" i="0">
-                <a:solidFill>
-                  <a:srgbClr val="1C3A5F"/>
-                </a:solidFill>
-              </a:rPr>
-              <a:t>주요 기능</a:t>
-            </a:r>
-          </a:p>
-        </p:txBody>
-      </p:sp>
-      <p:sp>
-        <p:nvSpPr>
-          <p:cNvPr id="66" name="Rectangle 65"/>
-          <p:cNvSpPr/>
-          <p:nvPr/>
-        </p:nvSpPr>
-        <p:spPr>
-          <a:xfrm>
-            <a:off x="7935150" y="989999"/>
-            <a:ext cx="36000" cy="180000"/>
-          </a:xfrm>
-          <a:prstGeom prst="rect">
-            <a:avLst/>
-          </a:prstGeom>
-          <a:solidFill>
-            <a:srgbClr val="D8D8D8"/>
-          </a:solidFill>
-          <a:ln>
-            <a:noFill/>
-          </a:ln>
-        </p:spPr>
-        <p:style>
-          <a:lnRef idx="1">
-            <a:schemeClr val="accent1"/>
-          </a:lnRef>
-          <a:fillRef idx="3">
-            <a:schemeClr val="accent1"/>
-          </a:fillRef>
-          <a:effectRef idx="2">
-            <a:schemeClr val="accent1"/>
-          </a:effectRef>
-          <a:fontRef idx="minor">
-            <a:schemeClr val="lt1"/>
-          </a:fontRef>
-        </p:style>
-        <p:txBody>
-          <a:bodyPr rtlCol="0" anchor="ctr"/>
-          <a:lstStyle/>
-          <a:p>
-            <a:pPr algn="ctr"/>
-          </a:p>
-        </p:txBody>
-      </p:sp>
-      <p:sp>
-        <p:nvSpPr>
-          <p:cNvPr id="67" name="TextBox 66"/>
-          <p:cNvSpPr txBox="1"/>
-          <p:nvPr/>
-        </p:nvSpPr>
-        <p:spPr>
-          <a:xfrm>
-            <a:off x="8025150" y="971999"/>
-            <a:ext cx="4037801" cy="162000"/>
-          </a:xfrm>
-          <a:prstGeom prst="rect">
-            <a:avLst/>
-          </a:prstGeom>
-          <a:noFill/>
-        </p:spPr>
-        <p:txBody>
-          <a:bodyPr wrap="square">
-            <a:spAutoFit/>
-          </a:bodyPr>
-          <a:lstStyle/>
-          <a:p>
-            <a:pPr algn="l"/>
-            <a:r>
-              <a:rPr sz="950" b="1" i="0">
-                <a:solidFill>
-                  <a:srgbClr val="404040"/>
-                </a:solidFill>
-              </a:rPr>
-              <a:t>SN 기반 자동 분석</a:t>
-            </a:r>
-          </a:p>
-        </p:txBody>
-      </p:sp>
-      <p:sp>
-        <p:nvSpPr>
-          <p:cNvPr id="68" name="TextBox 67"/>
-          <p:cNvSpPr txBox="1"/>
-          <p:nvPr/>
-        </p:nvSpPr>
-        <p:spPr>
-          <a:xfrm>
-            <a:off x="8025150" y="1126799"/>
-            <a:ext cx="4037801" cy="251999"/>
-          </a:xfrm>
-          <a:prstGeom prst="rect">
-            <a:avLst/>
-          </a:prstGeom>
-          <a:noFill/>
-        </p:spPr>
-        <p:txBody>
-          <a:bodyPr wrap="square">
-            <a:spAutoFit/>
-          </a:bodyPr>
-          <a:lstStyle/>
-          <a:p>
-            <a:pPr algn="l"/>
-            <a:r>
-              <a:rPr sz="850" b="0" i="0">
-                <a:solidFill>
-                  <a:srgbClr val="888888"/>
-                </a:solidFill>
-              </a:rPr>
-              <a:t>Knox Messenger 챗봇으로 SN 입력
-Adaptive Card UI · 다중 SN 동시 지원</a:t>
-            </a:r>
-          </a:p>
-        </p:txBody>
-      </p:sp>
-      <p:sp>
-        <p:nvSpPr>
-          <p:cNvPr id="69" name="Rectangle 68"/>
-          <p:cNvSpPr/>
-          <p:nvPr/>
-        </p:nvSpPr>
-        <p:spPr>
-          <a:xfrm>
-            <a:off x="7935150" y="1414799"/>
-            <a:ext cx="4145801" cy="7200"/>
-          </a:xfrm>
-          <a:prstGeom prst="rect">
-            <a:avLst/>
-          </a:prstGeom>
-          <a:solidFill>
-            <a:srgbClr val="D8D8D8"/>
-          </a:solidFill>
-          <a:ln>
-            <a:noFill/>
-          </a:ln>
-        </p:spPr>
-        <p:style>
-          <a:lnRef idx="1">
-            <a:schemeClr val="accent1"/>
-          </a:lnRef>
-          <a:fillRef idx="3">
-            <a:schemeClr val="accent1"/>
-          </a:fillRef>
-          <a:effectRef idx="2">
-            <a:schemeClr val="accent1"/>
-          </a:effectRef>
-          <a:fontRef idx="minor">
-            <a:schemeClr val="lt1"/>
-          </a:fontRef>
-        </p:style>
-        <p:txBody>
-          <a:bodyPr rtlCol="0" anchor="ctr"/>
-          <a:lstStyle/>
-          <a:p>
-            <a:pPr algn="ctr"/>
-          </a:p>
-        </p:txBody>
-      </p:sp>
-      <p:sp>
-        <p:nvSpPr>
-          <p:cNvPr id="70" name="Rectangle 69"/>
-          <p:cNvSpPr/>
-          <p:nvPr/>
-        </p:nvSpPr>
-        <p:spPr>
-          <a:xfrm>
-            <a:off x="7935150" y="1486799"/>
-            <a:ext cx="36000" cy="180000"/>
-          </a:xfrm>
-          <a:prstGeom prst="rect">
-            <a:avLst/>
-          </a:prstGeom>
-          <a:solidFill>
-            <a:srgbClr val="D8D8D8"/>
-          </a:solidFill>
-          <a:ln>
-            <a:noFill/>
-          </a:ln>
-        </p:spPr>
-        <p:style>
-          <a:lnRef idx="1">
-            <a:schemeClr val="accent1"/>
-          </a:lnRef>
-          <a:fillRef idx="3">
-            <a:schemeClr val="accent1"/>
-          </a:fillRef>
-          <a:effectRef idx="2">
-            <a:schemeClr val="accent1"/>
-          </a:effectRef>
-          <a:fontRef idx="minor">
-            <a:schemeClr val="lt1"/>
-          </a:fontRef>
-        </p:style>
-        <p:txBody>
-          <a:bodyPr rtlCol="0" anchor="ctr"/>
-          <a:lstStyle/>
-          <a:p>
-            <a:pPr algn="ctr"/>
-          </a:p>
-        </p:txBody>
-      </p:sp>
-      <p:sp>
-        <p:nvSpPr>
-          <p:cNvPr id="71" name="TextBox 70"/>
-          <p:cNvSpPr txBox="1"/>
-          <p:nvPr/>
-        </p:nvSpPr>
-        <p:spPr>
-          <a:xfrm>
-            <a:off x="8025150" y="1468799"/>
-            <a:ext cx="4037801" cy="162000"/>
-          </a:xfrm>
-          <a:prstGeom prst="rect">
-            <a:avLst/>
-          </a:prstGeom>
-          <a:noFill/>
-        </p:spPr>
-        <p:txBody>
-          <a:bodyPr wrap="square">
-            <a:spAutoFit/>
-          </a:bodyPr>
-          <a:lstStyle/>
-          <a:p>
-            <a:pPr algn="l"/>
-            <a:r>
-              <a:rPr sz="950" b="1" i="0">
-                <a:solidFill>
-                  <a:srgbClr val="404040"/>
-                </a:solidFill>
-              </a:rPr>
-              <a:t>빅데이터 자동 조회</a:t>
-            </a:r>
-          </a:p>
-        </p:txBody>
-      </p:sp>
-      <p:sp>
-        <p:nvSpPr>
-          <p:cNvPr id="72" name="TextBox 71"/>
-          <p:cNvSpPr txBox="1"/>
-          <p:nvPr/>
-        </p:nvSpPr>
-        <p:spPr>
-          <a:xfrm>
-            <a:off x="8025150" y="1623599"/>
-            <a:ext cx="4037801" cy="251999"/>
-          </a:xfrm>
-          <a:prstGeom prst="rect">
-            <a:avLst/>
-          </a:prstGeom>
-          <a:noFill/>
-        </p:spPr>
-        <p:txBody>
-          <a:bodyPr wrap="square">
-            <a:spAutoFit/>
-          </a:bodyPr>
-          <a:lstStyle/>
-          <a:p>
-            <a:pPr algn="l"/>
-            <a:r>
-              <a:rPr sz="850" b="0" i="0">
-                <a:solidFill>
-                  <a:srgbClr val="888888"/>
-                </a:solidFill>
-              </a:rPr>
-              <a:t>포털 자동 로그인·조회 (Playwright)
-병렬 처리로 속도 최적화</a:t>
-            </a:r>
-          </a:p>
-        </p:txBody>
-      </p:sp>
-      <p:sp>
-        <p:nvSpPr>
-          <p:cNvPr id="73" name="Rectangle 72"/>
-          <p:cNvSpPr/>
-          <p:nvPr/>
-        </p:nvSpPr>
-        <p:spPr>
-          <a:xfrm>
-            <a:off x="7935150" y="1911599"/>
-            <a:ext cx="4145801" cy="7200"/>
-          </a:xfrm>
-          <a:prstGeom prst="rect">
-            <a:avLst/>
-          </a:prstGeom>
-          <a:solidFill>
-            <a:srgbClr val="D8D8D8"/>
-          </a:solidFill>
-          <a:ln>
-            <a:noFill/>
-          </a:ln>
-        </p:spPr>
-        <p:style>
-          <a:lnRef idx="1">
-            <a:schemeClr val="accent1"/>
-          </a:lnRef>
-          <a:fillRef idx="3">
-            <a:schemeClr val="accent1"/>
-          </a:fillRef>
-          <a:effectRef idx="2">
-            <a:schemeClr val="accent1"/>
-          </a:effectRef>
-          <a:fontRef idx="minor">
-            <a:schemeClr val="lt1"/>
-          </a:fontRef>
-        </p:style>
-        <p:txBody>
-          <a:bodyPr rtlCol="0" anchor="ctr"/>
-          <a:lstStyle/>
-          <a:p>
-            <a:pPr algn="ctr"/>
-          </a:p>
-        </p:txBody>
-      </p:sp>
-      <p:sp>
-        <p:nvSpPr>
-          <p:cNvPr id="74" name="Rectangle 73"/>
-          <p:cNvSpPr/>
-          <p:nvPr/>
-        </p:nvSpPr>
-        <p:spPr>
-          <a:xfrm>
-            <a:off x="7935150" y="1983599"/>
-            <a:ext cx="36000" cy="180000"/>
-          </a:xfrm>
-          <a:prstGeom prst="rect">
-            <a:avLst/>
-          </a:prstGeom>
-          <a:solidFill>
-            <a:srgbClr val="D8D8D8"/>
-          </a:solidFill>
-          <a:ln>
-            <a:noFill/>
-          </a:ln>
-        </p:spPr>
-        <p:style>
-          <a:lnRef idx="1">
-            <a:schemeClr val="accent1"/>
-          </a:lnRef>
-          <a:fillRef idx="3">
-            <a:schemeClr val="accent1"/>
-          </a:fillRef>
-          <a:effectRef idx="2">
-            <a:schemeClr val="accent1"/>
-          </a:effectRef>
-          <a:fontRef idx="minor">
-            <a:schemeClr val="lt1"/>
-          </a:fontRef>
-        </p:style>
-        <p:txBody>
-          <a:bodyPr rtlCol="0" anchor="ctr"/>
-          <a:lstStyle/>
-          <a:p>
-            <a:pPr algn="ctr"/>
-          </a:p>
-        </p:txBody>
-      </p:sp>
-      <p:sp>
-        <p:nvSpPr>
-          <p:cNvPr id="75" name="TextBox 74"/>
-          <p:cNvSpPr txBox="1"/>
-          <p:nvPr/>
-        </p:nvSpPr>
-        <p:spPr>
-          <a:xfrm>
-            <a:off x="8025150" y="1965599"/>
-            <a:ext cx="4037801" cy="162000"/>
-          </a:xfrm>
-          <a:prstGeom prst="rect">
-            <a:avLst/>
-          </a:prstGeom>
-          <a:noFill/>
-        </p:spPr>
-        <p:txBody>
-          <a:bodyPr wrap="square">
-            <a:spAutoFit/>
-          </a:bodyPr>
-          <a:lstStyle/>
-          <a:p>
-            <a:pPr algn="l"/>
-            <a:r>
-              <a:rPr sz="950" b="1" i="0">
-                <a:solidFill>
-                  <a:srgbClr val="404040"/>
-                </a:solidFill>
-              </a:rPr>
-              <a:t>분석 리포트 자동 전송</a:t>
-            </a:r>
-          </a:p>
-        </p:txBody>
-      </p:sp>
-      <p:sp>
-        <p:nvSpPr>
-          <p:cNvPr id="76" name="TextBox 75"/>
-          <p:cNvSpPr txBox="1"/>
-          <p:nvPr/>
-        </p:nvSpPr>
-        <p:spPr>
-          <a:xfrm>
-            <a:off x="8025150" y="2120399"/>
-            <a:ext cx="4037801" cy="251999"/>
-          </a:xfrm>
-          <a:prstGeom prst="rect">
-            <a:avLst/>
-          </a:prstGeom>
-          <a:noFill/>
-        </p:spPr>
-        <p:txBody>
-          <a:bodyPr wrap="square">
-            <a:spAutoFit/>
-          </a:bodyPr>
-          <a:lstStyle/>
-          <a:p>
-            <a:pPr algn="l"/>
-            <a:r>
-              <a:rPr sz="850" b="0" i="0">
-                <a:solidFill>
-                  <a:srgbClr val="888888"/>
-                </a:solidFill>
-              </a:rPr>
-              <a:t>PDF·HTML 리포트 자동 생성
-Knox Messenger로 즉시 전달</a:t>
-            </a:r>
-          </a:p>
-        </p:txBody>
-      </p:sp>
-      <p:sp>
-        <p:nvSpPr>
-          <p:cNvPr id="77" name="Rectangle 76"/>
-          <p:cNvSpPr/>
-          <p:nvPr/>
-        </p:nvSpPr>
-        <p:spPr>
-          <a:xfrm>
-            <a:off x="7935150" y="2408399"/>
-            <a:ext cx="4145801" cy="7200"/>
-          </a:xfrm>
-          <a:prstGeom prst="rect">
-            <a:avLst/>
-          </a:prstGeom>
-          <a:solidFill>
-            <a:srgbClr val="D8D8D8"/>
-          </a:solidFill>
-          <a:ln>
-            <a:noFill/>
-          </a:ln>
-        </p:spPr>
-        <p:style>
-          <a:lnRef idx="1">
-            <a:schemeClr val="accent1"/>
-          </a:lnRef>
-          <a:fillRef idx="3">
-            <a:schemeClr val="accent1"/>
-          </a:fillRef>
-          <a:effectRef idx="2">
-            <a:schemeClr val="accent1"/>
-          </a:effectRef>
-          <a:fontRef idx="minor">
-            <a:schemeClr val="lt1"/>
-          </a:fontRef>
-        </p:style>
-        <p:txBody>
-          <a:bodyPr rtlCol="0" anchor="ctr"/>
-          <a:lstStyle/>
-          <a:p>
-            <a:pPr algn="ctr"/>
-          </a:p>
-        </p:txBody>
-      </p:sp>
-      <p:sp>
-        <p:nvSpPr>
-          <p:cNvPr id="78" name="Rectangle 77"/>
-          <p:cNvSpPr/>
-          <p:nvPr/>
-        </p:nvSpPr>
-        <p:spPr>
-          <a:xfrm>
-            <a:off x="7935150" y="2480399"/>
-            <a:ext cx="36000" cy="180000"/>
-          </a:xfrm>
-          <a:prstGeom prst="rect">
-            <a:avLst/>
-          </a:prstGeom>
-          <a:solidFill>
-            <a:srgbClr val="D8D8D8"/>
-          </a:solidFill>
-          <a:ln>
-            <a:noFill/>
-          </a:ln>
-        </p:spPr>
-        <p:style>
-          <a:lnRef idx="1">
-            <a:schemeClr val="accent1"/>
-          </a:lnRef>
-          <a:fillRef idx="3">
-            <a:schemeClr val="accent1"/>
-          </a:fillRef>
-          <a:effectRef idx="2">
-            <a:schemeClr val="accent1"/>
-          </a:effectRef>
-          <a:fontRef idx="minor">
-            <a:schemeClr val="lt1"/>
-          </a:fontRef>
-        </p:style>
-        <p:txBody>
-          <a:bodyPr rtlCol="0" anchor="ctr"/>
-          <a:lstStyle/>
-          <a:p>
-            <a:pPr algn="ctr"/>
-          </a:p>
-        </p:txBody>
-      </p:sp>
-      <p:sp>
-        <p:nvSpPr>
-          <p:cNvPr id="79" name="TextBox 78"/>
-          <p:cNvSpPr txBox="1"/>
-          <p:nvPr/>
-        </p:nvSpPr>
-        <p:spPr>
-          <a:xfrm>
-            <a:off x="8025150" y="2462399"/>
-            <a:ext cx="4037801" cy="162000"/>
-          </a:xfrm>
-          <a:prstGeom prst="rect">
-            <a:avLst/>
-          </a:prstGeom>
-          <a:noFill/>
-        </p:spPr>
-        <p:txBody>
-          <a:bodyPr wrap="square">
-            <a:spAutoFit/>
-          </a:bodyPr>
-          <a:lstStyle/>
-          <a:p>
-            <a:pPr algn="l"/>
-            <a:r>
-              <a:rPr sz="950" b="1" i="0">
-                <a:solidFill>
-                  <a:srgbClr val="404040"/>
-                </a:solidFill>
-              </a:rPr>
-              <a:t>24/7 무인 대응</a:t>
-            </a:r>
-          </a:p>
-        </p:txBody>
-      </p:sp>
-      <p:sp>
-        <p:nvSpPr>
-          <p:cNvPr id="80" name="TextBox 79"/>
-          <p:cNvSpPr txBox="1"/>
-          <p:nvPr/>
-        </p:nvSpPr>
-        <p:spPr>
-          <a:xfrm>
-            <a:off x="8025150" y="2617199"/>
-            <a:ext cx="4037801" cy="251999"/>
-          </a:xfrm>
-          <a:prstGeom prst="rect">
-            <a:avLst/>
-          </a:prstGeom>
-          <a:noFill/>
-        </p:spPr>
-        <p:txBody>
-          <a:bodyPr wrap="square">
-            <a:spAutoFit/>
-          </a:bodyPr>
-          <a:lstStyle/>
-          <a:p>
-            <a:pPr algn="l"/>
-            <a:r>
-              <a:rPr sz="850" b="0" i="0">
-                <a:solidFill>
-                  <a:srgbClr val="888888"/>
-                </a:solidFill>
-              </a:rPr>
-              <a:t>주말·야간 무인 자동 처리
-오류 알림·타임아웃 자동 처리</a:t>
-            </a:r>
-          </a:p>
-        </p:txBody>
-      </p:sp>
-      <p:sp>
-        <p:nvSpPr>
-          <p:cNvPr id="81" name="Rectangle 80"/>
-          <p:cNvSpPr/>
-          <p:nvPr/>
-        </p:nvSpPr>
-        <p:spPr>
-          <a:xfrm>
-            <a:off x="7881150" y="2977199"/>
-            <a:ext cx="4199801" cy="7200"/>
-          </a:xfrm>
-          <a:prstGeom prst="rect">
-            <a:avLst/>
-          </a:prstGeom>
-          <a:solidFill>
-            <a:srgbClr val="D8D8D8"/>
-          </a:solidFill>
-          <a:ln>
-            <a:noFill/>
-          </a:ln>
-        </p:spPr>
-        <p:style>
-          <a:lnRef idx="1">
-            <a:schemeClr val="accent1"/>
-          </a:lnRef>
-          <a:fillRef idx="3">
-            <a:schemeClr val="accent1"/>
-          </a:fillRef>
-          <a:effectRef idx="2">
-            <a:schemeClr val="accent1"/>
-          </a:effectRef>
-          <a:fontRef idx="minor">
-            <a:schemeClr val="lt1"/>
-          </a:fontRef>
-        </p:style>
-        <p:txBody>
-          <a:bodyPr rtlCol="0" anchor="ctr"/>
-          <a:lstStyle/>
-          <a:p>
-            <a:pPr algn="ctr"/>
-          </a:p>
-        </p:txBody>
-      </p:sp>
-      <p:sp>
-        <p:nvSpPr>
-          <p:cNvPr id="82" name="Rectangle 81"/>
-          <p:cNvSpPr/>
-          <p:nvPr/>
-        </p:nvSpPr>
-        <p:spPr>
-          <a:xfrm>
-            <a:off x="7881150" y="3085199"/>
-            <a:ext cx="64800" cy="198000"/>
-          </a:xfrm>
-          <a:prstGeom prst="rect">
-            <a:avLst/>
-          </a:prstGeom>
-          <a:solidFill>
-            <a:srgbClr val="1C3A5F"/>
-          </a:solidFill>
-          <a:ln>
-            <a:noFill/>
-          </a:ln>
-        </p:spPr>
-        <p:style>
-          <a:lnRef idx="1">
-            <a:schemeClr val="accent1"/>
-          </a:lnRef>
-          <a:fillRef idx="3">
-            <a:schemeClr val="accent1"/>
-          </a:fillRef>
-          <a:effectRef idx="2">
-            <a:schemeClr val="accent1"/>
-          </a:effectRef>
-          <a:fontRef idx="minor">
-            <a:schemeClr val="lt1"/>
-          </a:fontRef>
-        </p:style>
-        <p:txBody>
-          <a:bodyPr rtlCol="0" anchor="ctr"/>
-          <a:lstStyle/>
-          <a:p>
-            <a:pPr algn="ctr"/>
-          </a:p>
-        </p:txBody>
-      </p:sp>
-      <p:sp>
-        <p:nvSpPr>
-          <p:cNvPr id="83" name="TextBox 82"/>
-          <p:cNvSpPr txBox="1"/>
-          <p:nvPr/>
-        </p:nvSpPr>
-        <p:spPr>
-          <a:xfrm>
-            <a:off x="7989150" y="3067199"/>
-            <a:ext cx="4091801" cy="234000"/>
-          </a:xfrm>
-          <a:prstGeom prst="rect">
-            <a:avLst/>
-          </a:prstGeom>
-          <a:noFill/>
-        </p:spPr>
-        <p:txBody>
-          <a:bodyPr wrap="square">
-            <a:spAutoFit/>
-          </a:bodyPr>
-          <a:lstStyle/>
-          <a:p>
-            <a:pPr algn="l"/>
-            <a:r>
-              <a:rPr sz="1050" b="1" i="0">
-                <a:solidFill>
-                  <a:srgbClr val="1C3A5F"/>
-                </a:solidFill>
-              </a:rPr>
-              <a:t>기대 효과</a:t>
-            </a:r>
-          </a:p>
-        </p:txBody>
-      </p:sp>
-      <p:sp>
-        <p:nvSpPr>
-          <p:cNvPr id="84" name="TextBox 83"/>
-          <p:cNvSpPr txBox="1"/>
-          <p:nvPr/>
-        </p:nvSpPr>
-        <p:spPr>
-          <a:xfrm>
-            <a:off x="7953150" y="3337199"/>
-            <a:ext cx="4127801" cy="162000"/>
-          </a:xfrm>
-          <a:prstGeom prst="rect">
-            <a:avLst/>
-          </a:prstGeom>
-          <a:noFill/>
-        </p:spPr>
-        <p:txBody>
-          <a:bodyPr wrap="square">
-            <a:spAutoFit/>
-          </a:bodyPr>
-          <a:lstStyle/>
-          <a:p>
-            <a:pPr algn="l"/>
-            <a:r>
-              <a:rPr sz="900" b="0" i="0">
-                <a:solidFill>
-                  <a:srgbClr val="404040"/>
-                </a:solidFill>
-              </a:rPr>
-              <a:t>▸  고객 VOC 해결율 향상 (24/7 즉각 대응)</a:t>
-            </a:r>
-          </a:p>
-        </p:txBody>
-      </p:sp>
-      <p:sp>
-        <p:nvSpPr>
-          <p:cNvPr id="85" name="TextBox 84"/>
-          <p:cNvSpPr txBox="1"/>
-          <p:nvPr/>
-        </p:nvSpPr>
-        <p:spPr>
-          <a:xfrm>
-            <a:off x="7953150" y="3506399"/>
-            <a:ext cx="4127801" cy="162000"/>
-          </a:xfrm>
-          <a:prstGeom prst="rect">
-            <a:avLst/>
-          </a:prstGeom>
-          <a:noFill/>
-        </p:spPr>
-        <p:txBody>
-          <a:bodyPr wrap="square">
-            <a:spAutoFit/>
-          </a:bodyPr>
-          <a:lstStyle/>
-          <a:p>
-            <a:pPr algn="l"/>
-            <a:r>
-              <a:rPr sz="900" b="0" i="0">
-                <a:solidFill>
-                  <a:srgbClr val="404040"/>
-                </a:solidFill>
-              </a:rPr>
-              <a:t>▸  본사 분석 인력 업무 효율 제고</a:t>
-            </a:r>
-          </a:p>
-        </p:txBody>
-      </p:sp>
-      <p:sp>
-        <p:nvSpPr>
-          <p:cNvPr id="86" name="TextBox 85"/>
-          <p:cNvSpPr txBox="1"/>
-          <p:nvPr/>
-        </p:nvSpPr>
-        <p:spPr>
-          <a:xfrm>
-            <a:off x="7953150" y="3675599"/>
-            <a:ext cx="4127801" cy="162000"/>
-          </a:xfrm>
-          <a:prstGeom prst="rect">
-            <a:avLst/>
-          </a:prstGeom>
-          <a:noFill/>
-        </p:spPr>
-        <p:txBody>
-          <a:bodyPr wrap="square">
-            <a:spAutoFit/>
-          </a:bodyPr>
-          <a:lstStyle/>
-          <a:p>
-            <a:pPr algn="l"/>
-            <a:r>
-              <a:rPr sz="900" b="0" i="0">
-                <a:solidFill>
-                  <a:srgbClr val="404040"/>
-                </a:solidFill>
-              </a:rPr>
-              <a:t>▸  FA 현장 대응 비용 절감</a:t>
-            </a:r>
-          </a:p>
-        </p:txBody>
-      </p:sp>
-      <p:sp>
-        <p:nvSpPr>
-          <p:cNvPr id="87" name="TextBox 86"/>
-          <p:cNvSpPr txBox="1"/>
-          <p:nvPr/>
-        </p:nvSpPr>
-        <p:spPr>
-          <a:xfrm>
-            <a:off x="7953150" y="3844799"/>
-            <a:ext cx="4127801" cy="162000"/>
-          </a:xfrm>
-          <a:prstGeom prst="rect">
-            <a:avLst/>
-          </a:prstGeom>
-          <a:noFill/>
-        </p:spPr>
-        <p:txBody>
-          <a:bodyPr wrap="square">
-            <a:spAutoFit/>
-          </a:bodyPr>
-          <a:lstStyle/>
-          <a:p>
-            <a:pPr algn="l"/>
-            <a:r>
-              <a:rPr sz="900" b="0" i="0">
-                <a:solidFill>
-                  <a:srgbClr val="404040"/>
-                </a:solidFill>
-              </a:rPr>
-              <a:t>▸  서비스센터 FA 이관 이슈 사전 분류</a:t>
-            </a:r>
-          </a:p>
-        </p:txBody>
-      </p:sp>
-      <p:sp>
-        <p:nvSpPr>
-          <p:cNvPr id="88" name="Rectangle 87"/>
-          <p:cNvSpPr/>
-          <p:nvPr/>
-        </p:nvSpPr>
-        <p:spPr>
-          <a:xfrm>
-            <a:off x="0" y="6660000"/>
-            <a:ext cx="12188952" cy="198000"/>
-          </a:xfrm>
-          <a:prstGeom prst="rect">
-            <a:avLst/>
-          </a:prstGeom>
-          <a:solidFill>
-            <a:srgbClr val="1C3A5F"/>
-          </a:solidFill>
-          <a:ln>
-            <a:noFill/>
-          </a:ln>
-        </p:spPr>
-        <p:style>
-          <a:lnRef idx="1">
-            <a:schemeClr val="accent1"/>
-          </a:lnRef>
-          <a:fillRef idx="3">
-            <a:schemeClr val="accent1"/>
-          </a:fillRef>
-          <a:effectRef idx="2">
-            <a:schemeClr val="accent1"/>
-          </a:effectRef>
-          <a:fontRef idx="minor">
-            <a:schemeClr val="lt1"/>
-          </a:fontRef>
-        </p:style>
-        <p:txBody>
-          <a:bodyPr rtlCol="0" anchor="ctr"/>
-          <a:lstStyle/>
-          <a:p>
-            <a:pPr algn="ctr"/>
-          </a:p>
-        </p:txBody>
-      </p:sp>
-      <p:sp>
-        <p:nvSpPr>
-          <p:cNvPr id="89" name="TextBox 88"/>
-          <p:cNvSpPr txBox="1"/>
-          <p:nvPr/>
-        </p:nvSpPr>
-        <p:spPr>
-          <a:xfrm>
-            <a:off x="216000" y="6696000"/>
-            <a:ext cx="9141714" cy="136800"/>
-          </a:xfrm>
-          <a:prstGeom prst="rect">
-            <a:avLst/>
-          </a:prstGeom>
-          <a:noFill/>
-        </p:spPr>
-        <p:txBody>
-          <a:bodyPr wrap="square">
-            <a:spAutoFit/>
-          </a:bodyPr>
-          <a:lstStyle/>
-          <a:p>
-            <a:pPr algn="l"/>
-            <a:r>
-              <a:rPr sz="800" b="0" i="0">
                 <a:solidFill>
                   <a:srgbClr val="A0B2CC"/>
                 </a:solidFill>
@@ -6406,14 +5496,14 @@
       </p:sp>
       <p:sp>
         <p:nvSpPr>
-          <p:cNvPr id="90" name="TextBox 89"/>
+          <p:cNvPr id="66" name="TextBox 65"/>
           <p:cNvSpPr txBox="1"/>
           <p:nvPr/>
         </p:nvSpPr>
         <p:spPr>
           <a:xfrm>
-            <a:off x="11360953" y="6696000"/>
-            <a:ext cx="720000" cy="136800"/>
+            <a:off x="11396952" y="6685200"/>
+            <a:ext cx="684000" cy="136800"/>
           </a:xfrm>
           <a:prstGeom prst="rect">
             <a:avLst/>

--- a/FA_챗봇_보고서.pptx
+++ b/FA_챗봇_보고서.pptx
@@ -3250,8 +3250,8 @@
         </p:nvSpPr>
         <p:spPr>
           <a:xfrm>
-            <a:off x="4080984" y="637200"/>
-            <a:ext cx="7200" cy="1278000"/>
+            <a:off x="4080984" y="630000"/>
+            <a:ext cx="7200" cy="1116000"/>
           </a:xfrm>
           <a:prstGeom prst="rect">
             <a:avLst/>
@@ -3293,8 +3293,8 @@
         </p:nvSpPr>
         <p:spPr>
           <a:xfrm>
-            <a:off x="8107968" y="637200"/>
-            <a:ext cx="7200" cy="1278000"/>
+            <a:off x="8107968" y="630000"/>
+            <a:ext cx="7200" cy="1116000"/>
           </a:xfrm>
           <a:prstGeom prst="rect">
             <a:avLst/>
@@ -3336,7 +3336,7 @@
         </p:nvSpPr>
         <p:spPr>
           <a:xfrm>
-            <a:off x="108000" y="662400"/>
+            <a:off x="108000" y="655200"/>
             <a:ext cx="57600" cy="180000"/>
           </a:xfrm>
           <a:prstGeom prst="rect">
@@ -3379,7 +3379,7 @@
         </p:nvSpPr>
         <p:spPr>
           <a:xfrm>
-            <a:off x="216000" y="637200"/>
+            <a:off x="216000" y="630000"/>
             <a:ext cx="3918984" cy="223200"/>
           </a:xfrm>
           <a:prstGeom prst="rect">
@@ -3413,7 +3413,7 @@
         </p:nvSpPr>
         <p:spPr>
           <a:xfrm>
-            <a:off x="162000" y="871200"/>
+            <a:off x="162000" y="864000"/>
             <a:ext cx="3864984" cy="295200"/>
           </a:xfrm>
           <a:prstGeom prst="rect">
@@ -3447,7 +3447,7 @@
         </p:nvSpPr>
         <p:spPr>
           <a:xfrm>
-            <a:off x="162000" y="1177200"/>
+            <a:off x="162000" y="1170000"/>
             <a:ext cx="3864984" cy="295200"/>
           </a:xfrm>
           <a:prstGeom prst="rect">
@@ -3468,7 +3468,7 @@
                   <a:srgbClr val="404040"/>
                 </a:solidFill>
               </a:rPr>
-              <a:t>• 통신사 이관 이슈 조기 분류 → 진성 단말 이슈에 집중 가능</a:t>
+              <a:t>• 통신사 이관 이슈 조기 분류 → 진성 단말 이슈에 집중</a:t>
             </a:r>
           </a:p>
         </p:txBody>
@@ -3481,7 +3481,7 @@
         </p:nvSpPr>
         <p:spPr>
           <a:xfrm>
-            <a:off x="108000" y="1544400"/>
+            <a:off x="108000" y="1537200"/>
             <a:ext cx="57600" cy="180000"/>
           </a:xfrm>
           <a:prstGeom prst="rect">
@@ -3524,7 +3524,7 @@
         </p:nvSpPr>
         <p:spPr>
           <a:xfrm>
-            <a:off x="216000" y="1519200"/>
+            <a:off x="216000" y="1512000"/>
             <a:ext cx="3918984" cy="223200"/>
           </a:xfrm>
           <a:prstGeom prst="rect">
@@ -3558,8 +3558,8 @@
         </p:nvSpPr>
         <p:spPr>
           <a:xfrm>
-            <a:off x="162000" y="1753200"/>
-            <a:ext cx="3864984" cy="162000"/>
+            <a:off x="162000" y="1746000"/>
+            <a:ext cx="3864984" cy="151200"/>
           </a:xfrm>
           <a:prstGeom prst="rect">
             <a:avLst/>
@@ -3592,8 +3592,8 @@
         </p:nvSpPr>
         <p:spPr>
           <a:xfrm>
-            <a:off x="162000" y="1918800"/>
-            <a:ext cx="3864984" cy="162000"/>
+            <a:off x="162000" y="1900800"/>
+            <a:ext cx="3864984" cy="151200"/>
           </a:xfrm>
           <a:prstGeom prst="rect">
             <a:avLst/>
@@ -3613,7 +3613,7 @@
                   <a:srgbClr val="404040"/>
                 </a:solidFill>
               </a:rPr>
-              <a:t>• 수동 조회 대기시간 발생</a:t>
+              <a:t>• 수동 조회로 현장 대응 지연</a:t>
             </a:r>
           </a:p>
         </p:txBody>
@@ -3626,8 +3626,8 @@
         </p:nvSpPr>
         <p:spPr>
           <a:xfrm>
-            <a:off x="162000" y="2084400"/>
-            <a:ext cx="3864984" cy="162000"/>
+            <a:off x="162000" y="2055600"/>
+            <a:ext cx="3864984" cy="151200"/>
           </a:xfrm>
           <a:prstGeom prst="rect">
             <a:avLst/>
@@ -3660,7 +3660,7 @@
         </p:nvSpPr>
         <p:spPr>
           <a:xfrm>
-            <a:off x="4134984" y="662400"/>
+            <a:off x="4134984" y="655200"/>
             <a:ext cx="57600" cy="180000"/>
           </a:xfrm>
           <a:prstGeom prst="rect">
@@ -3703,7 +3703,7 @@
         </p:nvSpPr>
         <p:spPr>
           <a:xfrm>
-            <a:off x="4242984" y="637200"/>
+            <a:off x="4242984" y="630000"/>
             <a:ext cx="3918984" cy="223200"/>
           </a:xfrm>
           <a:prstGeom prst="rect">
@@ -3737,8 +3737,8 @@
         </p:nvSpPr>
         <p:spPr>
           <a:xfrm>
-            <a:off x="4188984" y="871200"/>
-            <a:ext cx="3864984" cy="172800"/>
+            <a:off x="4188984" y="864000"/>
+            <a:ext cx="3864984" cy="165600"/>
           </a:xfrm>
           <a:prstGeom prst="rect">
             <a:avLst/>
@@ -3771,8 +3771,8 @@
         </p:nvSpPr>
         <p:spPr>
           <a:xfrm>
-            <a:off x="4188984" y="1047600"/>
-            <a:ext cx="3864984" cy="172800"/>
+            <a:off x="4188984" y="1036800"/>
+            <a:ext cx="3864984" cy="165600"/>
           </a:xfrm>
           <a:prstGeom prst="rect">
             <a:avLst/>
@@ -3805,8 +3805,8 @@
         </p:nvSpPr>
         <p:spPr>
           <a:xfrm>
-            <a:off x="4188984" y="1224000"/>
-            <a:ext cx="3864984" cy="172800"/>
+            <a:off x="4188984" y="1209600"/>
+            <a:ext cx="3864984" cy="165600"/>
           </a:xfrm>
           <a:prstGeom prst="rect">
             <a:avLst/>
@@ -3839,8 +3839,8 @@
         </p:nvSpPr>
         <p:spPr>
           <a:xfrm>
-            <a:off x="4188984" y="1400400"/>
-            <a:ext cx="3864984" cy="172800"/>
+            <a:off x="4188984" y="1382400"/>
+            <a:ext cx="3864984" cy="165600"/>
           </a:xfrm>
           <a:prstGeom prst="rect">
             <a:avLst/>
@@ -3873,8 +3873,8 @@
         </p:nvSpPr>
         <p:spPr>
           <a:xfrm>
-            <a:off x="4188984" y="1576800"/>
-            <a:ext cx="3864984" cy="172800"/>
+            <a:off x="4188984" y="1555200"/>
+            <a:ext cx="3864984" cy="165600"/>
           </a:xfrm>
           <a:prstGeom prst="rect">
             <a:avLst/>
@@ -3907,7 +3907,7 @@
         </p:nvSpPr>
         <p:spPr>
           <a:xfrm>
-            <a:off x="8161968" y="662400"/>
+            <a:off x="8161968" y="655200"/>
             <a:ext cx="57600" cy="180000"/>
           </a:xfrm>
           <a:prstGeom prst="rect">
@@ -3950,7 +3950,7 @@
         </p:nvSpPr>
         <p:spPr>
           <a:xfrm>
-            <a:off x="8269968" y="637200"/>
+            <a:off x="8269968" y="630000"/>
             <a:ext cx="3918984" cy="223200"/>
           </a:xfrm>
           <a:prstGeom prst="rect">
@@ -3971,7 +3971,7 @@
                   <a:srgbClr val="1C3A5F"/>
                 </a:solidFill>
               </a:rPr>
-              <a:t>주요 기능</a:t>
+              <a:t>기대 효과</a:t>
             </a:r>
           </a:p>
         </p:txBody>
@@ -3984,8 +3984,8 @@
         </p:nvSpPr>
         <p:spPr>
           <a:xfrm>
-            <a:off x="8215968" y="871200"/>
-            <a:ext cx="3864984" cy="144000"/>
+            <a:off x="8215968" y="864000"/>
+            <a:ext cx="3864984" cy="165600"/>
           </a:xfrm>
           <a:prstGeom prst="rect">
             <a:avLst/>
@@ -4000,12 +4000,12 @@
           <a:p>
             <a:pPr algn="l"/>
             <a:r>
-              <a:rPr sz="900" b="1" i="0">
+              <a:rPr sz="900" b="0" i="0">
                 <a:solidFill>
                   <a:srgbClr val="404040"/>
                 </a:solidFill>
               </a:rPr>
-              <a:t>SN 기반 자동 분석</a:t>
+              <a:t>▸  FA 현장 대응 속도 향상  (즉각 분석 결과 제공)</a:t>
             </a:r>
           </a:p>
         </p:txBody>
@@ -4018,8 +4018,8 @@
         </p:nvSpPr>
         <p:spPr>
           <a:xfrm>
-            <a:off x="8215968" y="1008000"/>
-            <a:ext cx="3864984" cy="125999"/>
+            <a:off x="8215968" y="1036800"/>
+            <a:ext cx="3864984" cy="165600"/>
           </a:xfrm>
           <a:prstGeom prst="rect">
             <a:avLst/>
@@ -4034,12 +4034,12 @@
           <a:p>
             <a:pPr algn="l"/>
             <a:r>
-              <a:rPr sz="800" b="0" i="1">
-                <a:solidFill>
-                  <a:srgbClr val="888888"/>
+              <a:rPr sz="900" b="0" i="0">
+                <a:solidFill>
+                  <a:srgbClr val="404040"/>
                 </a:solidFill>
               </a:rPr>
-              <a:t>Knox Messenger · Adaptive Card · 다중 SN</a:t>
+              <a:t>▸  본사 분석 인력 업무 부담 경감</a:t>
             </a:r>
           </a:p>
         </p:txBody>
@@ -4052,8 +4052,8 @@
         </p:nvSpPr>
         <p:spPr>
           <a:xfrm>
-            <a:off x="8215968" y="1166400"/>
-            <a:ext cx="3864984" cy="144000"/>
+            <a:off x="8215968" y="1209600"/>
+            <a:ext cx="3864984" cy="165600"/>
           </a:xfrm>
           <a:prstGeom prst="rect">
             <a:avLst/>
@@ -4068,12 +4068,12 @@
           <a:p>
             <a:pPr algn="l"/>
             <a:r>
-              <a:rPr sz="900" b="1" i="0">
+              <a:rPr sz="900" b="0" i="0">
                 <a:solidFill>
                   <a:srgbClr val="404040"/>
                 </a:solidFill>
               </a:rPr>
-              <a:t>빅데이터 자동 조회</a:t>
+              <a:t>▸  야간·주말 고객 불만 최소화</a:t>
             </a:r>
           </a:p>
         </p:txBody>
@@ -4086,8 +4086,8 @@
         </p:nvSpPr>
         <p:spPr>
           <a:xfrm>
-            <a:off x="8215968" y="1303200"/>
-            <a:ext cx="3864984" cy="125999"/>
+            <a:off x="8215968" y="1382400"/>
+            <a:ext cx="3864984" cy="165600"/>
           </a:xfrm>
           <a:prstGeom prst="rect">
             <a:avLst/>
@@ -4102,161 +4102,25 @@
           <a:p>
             <a:pPr algn="l"/>
             <a:r>
-              <a:rPr sz="800" b="0" i="1">
-                <a:solidFill>
-                  <a:srgbClr val="888888"/>
+              <a:rPr sz="900" b="0" i="0">
+                <a:solidFill>
+                  <a:srgbClr val="404040"/>
                 </a:solidFill>
               </a:rPr>
-              <a:t>포털 자동화 (Playwright) · 병렬 처리</a:t>
-            </a:r>
-          </a:p>
-        </p:txBody>
-      </p:sp>
-      <p:sp>
-        <p:nvSpPr>
-          <p:cNvPr id="30" name="TextBox 29"/>
-          <p:cNvSpPr txBox="1"/>
-          <p:nvPr/>
-        </p:nvSpPr>
-        <p:spPr>
-          <a:xfrm>
-            <a:off x="8215968" y="1461600"/>
-            <a:ext cx="3864984" cy="144000"/>
-          </a:xfrm>
-          <a:prstGeom prst="rect">
-            <a:avLst/>
-          </a:prstGeom>
-          <a:noFill/>
-        </p:spPr>
-        <p:txBody>
-          <a:bodyPr wrap="square">
-            <a:spAutoFit/>
-          </a:bodyPr>
-          <a:lstStyle/>
-          <a:p>
-            <a:pPr algn="l"/>
-            <a:r>
-              <a:rPr sz="900" b="1" i="0">
-                <a:solidFill>
-                  <a:srgbClr val="404040"/>
-                </a:solidFill>
-              </a:rPr>
-              <a:t>분석 리포트 자동 전송</a:t>
-            </a:r>
-          </a:p>
-        </p:txBody>
-      </p:sp>
-      <p:sp>
-        <p:nvSpPr>
-          <p:cNvPr id="31" name="TextBox 30"/>
-          <p:cNvSpPr txBox="1"/>
-          <p:nvPr/>
-        </p:nvSpPr>
-        <p:spPr>
-          <a:xfrm>
-            <a:off x="8215968" y="1598400"/>
-            <a:ext cx="3864984" cy="125999"/>
-          </a:xfrm>
-          <a:prstGeom prst="rect">
-            <a:avLst/>
-          </a:prstGeom>
-          <a:noFill/>
-        </p:spPr>
-        <p:txBody>
-          <a:bodyPr wrap="square">
-            <a:spAutoFit/>
-          </a:bodyPr>
-          <a:lstStyle/>
-          <a:p>
-            <a:pPr algn="l"/>
-            <a:r>
-              <a:rPr sz="800" b="0" i="1">
-                <a:solidFill>
-                  <a:srgbClr val="888888"/>
-                </a:solidFill>
-              </a:rPr>
-              <a:t>PDF / HTML 생성 → Knox Messenger 전달</a:t>
-            </a:r>
-          </a:p>
-        </p:txBody>
-      </p:sp>
-      <p:sp>
-        <p:nvSpPr>
-          <p:cNvPr id="32" name="TextBox 31"/>
-          <p:cNvSpPr txBox="1"/>
-          <p:nvPr/>
-        </p:nvSpPr>
-        <p:spPr>
-          <a:xfrm>
-            <a:off x="8215968" y="1756800"/>
-            <a:ext cx="3864984" cy="144000"/>
-          </a:xfrm>
-          <a:prstGeom prst="rect">
-            <a:avLst/>
-          </a:prstGeom>
-          <a:noFill/>
-        </p:spPr>
-        <p:txBody>
-          <a:bodyPr wrap="square">
-            <a:spAutoFit/>
-          </a:bodyPr>
-          <a:lstStyle/>
-          <a:p>
-            <a:pPr algn="l"/>
-            <a:r>
-              <a:rPr sz="900" b="1" i="0">
-                <a:solidFill>
-                  <a:srgbClr val="404040"/>
-                </a:solidFill>
-              </a:rPr>
-              <a:t>24/7 무인 대응</a:t>
-            </a:r>
-          </a:p>
-        </p:txBody>
-      </p:sp>
-      <p:sp>
-        <p:nvSpPr>
-          <p:cNvPr id="33" name="TextBox 32"/>
-          <p:cNvSpPr txBox="1"/>
-          <p:nvPr/>
-        </p:nvSpPr>
-        <p:spPr>
-          <a:xfrm>
-            <a:off x="8215968" y="1893600"/>
-            <a:ext cx="3864984" cy="125999"/>
-          </a:xfrm>
-          <a:prstGeom prst="rect">
-            <a:avLst/>
-          </a:prstGeom>
-          <a:noFill/>
-        </p:spPr>
-        <p:txBody>
-          <a:bodyPr wrap="square">
-            <a:spAutoFit/>
-          </a:bodyPr>
-          <a:lstStyle/>
-          <a:p>
-            <a:pPr algn="l"/>
-            <a:r>
-              <a:rPr sz="800" b="0" i="1">
-                <a:solidFill>
-                  <a:srgbClr val="888888"/>
-                </a:solidFill>
-              </a:rPr>
-              <a:t>주말·야간 자동 처리 · 오류 알림</a:t>
-            </a:r>
-          </a:p>
-        </p:txBody>
-      </p:sp>
-      <p:sp>
-        <p:nvSpPr>
-          <p:cNvPr id="34" name="Rectangle 33"/>
+              <a:t>▸  체계적 이슈 분류로 FA 출동 비용 절감</a:t>
+            </a:r>
+          </a:p>
+        </p:txBody>
+      </p:sp>
+      <p:sp>
+        <p:nvSpPr>
+          <p:cNvPr id="30" name="Rectangle 29"/>
           <p:cNvSpPr/>
           <p:nvPr/>
         </p:nvSpPr>
         <p:spPr>
           <a:xfrm>
-            <a:off x="108000" y="1980000"/>
+            <a:off x="108000" y="1800000"/>
             <a:ext cx="11972952" cy="7200"/>
           </a:xfrm>
           <a:prstGeom prst="rect">
@@ -4293,13 +4157,56 @@
       </p:sp>
       <p:sp>
         <p:nvSpPr>
-          <p:cNvPr id="35" name="Rectangle 34"/>
+          <p:cNvPr id="31" name="Rectangle 30"/>
           <p:cNvSpPr/>
           <p:nvPr/>
         </p:nvSpPr>
         <p:spPr>
           <a:xfrm>
-            <a:off x="108000" y="2041200"/>
+            <a:off x="8292597" y="1843200"/>
+            <a:ext cx="7200" cy="4798800"/>
+          </a:xfrm>
+          <a:prstGeom prst="rect">
+            <a:avLst/>
+          </a:prstGeom>
+          <a:solidFill>
+            <a:srgbClr val="D8D8D8"/>
+          </a:solidFill>
+          <a:ln>
+            <a:noFill/>
+          </a:ln>
+        </p:spPr>
+        <p:style>
+          <a:lnRef idx="1">
+            <a:schemeClr val="accent1"/>
+          </a:lnRef>
+          <a:fillRef idx="3">
+            <a:schemeClr val="accent1"/>
+          </a:fillRef>
+          <a:effectRef idx="2">
+            <a:schemeClr val="accent1"/>
+          </a:effectRef>
+          <a:fontRef idx="minor">
+            <a:schemeClr val="lt1"/>
+          </a:fontRef>
+        </p:style>
+        <p:txBody>
+          <a:bodyPr rtlCol="0" anchor="ctr"/>
+          <a:lstStyle/>
+          <a:p>
+            <a:pPr algn="ctr"/>
+          </a:p>
+        </p:txBody>
+      </p:sp>
+      <p:sp>
+        <p:nvSpPr>
+          <p:cNvPr id="32" name="Rectangle 31"/>
+          <p:cNvSpPr/>
+          <p:nvPr/>
+        </p:nvSpPr>
+        <p:spPr>
+          <a:xfrm>
+            <a:off x="108000" y="1868400"/>
             <a:ext cx="57600" cy="180000"/>
           </a:xfrm>
           <a:prstGeom prst="rect">
@@ -4336,14 +4243,14 @@
       </p:sp>
       <p:sp>
         <p:nvSpPr>
-          <p:cNvPr id="36" name="TextBox 35"/>
+          <p:cNvPr id="33" name="TextBox 32"/>
           <p:cNvSpPr txBox="1"/>
           <p:nvPr/>
         </p:nvSpPr>
         <p:spPr>
           <a:xfrm>
-            <a:off x="216000" y="2016000"/>
-            <a:ext cx="11972952" cy="223200"/>
+            <a:off x="216000" y="1843200"/>
+            <a:ext cx="8166597" cy="223200"/>
           </a:xfrm>
           <a:prstGeom prst="rect">
             <a:avLst/>
@@ -4370,14 +4277,91 @@
       </p:sp>
       <p:sp>
         <p:nvSpPr>
-          <p:cNvPr id="37" name="Rectangle 36"/>
+          <p:cNvPr id="34" name="Rectangle 33"/>
           <p:cNvSpPr/>
           <p:nvPr/>
         </p:nvSpPr>
         <p:spPr>
           <a:xfrm>
-            <a:off x="108000" y="4244400"/>
-            <a:ext cx="1494422" cy="396000"/>
+            <a:off x="8328597" y="1868400"/>
+            <a:ext cx="57600" cy="180000"/>
+          </a:xfrm>
+          <a:prstGeom prst="rect">
+            <a:avLst/>
+          </a:prstGeom>
+          <a:solidFill>
+            <a:srgbClr val="1C3A5F"/>
+          </a:solidFill>
+          <a:ln>
+            <a:noFill/>
+          </a:ln>
+        </p:spPr>
+        <p:style>
+          <a:lnRef idx="1">
+            <a:schemeClr val="accent1"/>
+          </a:lnRef>
+          <a:fillRef idx="3">
+            <a:schemeClr val="accent1"/>
+          </a:fillRef>
+          <a:effectRef idx="2">
+            <a:schemeClr val="accent1"/>
+          </a:effectRef>
+          <a:fontRef idx="minor">
+            <a:schemeClr val="lt1"/>
+          </a:fontRef>
+        </p:style>
+        <p:txBody>
+          <a:bodyPr rtlCol="0" anchor="ctr"/>
+          <a:lstStyle/>
+          <a:p>
+            <a:pPr algn="ctr"/>
+          </a:p>
+        </p:txBody>
+      </p:sp>
+      <p:sp>
+        <p:nvSpPr>
+          <p:cNvPr id="35" name="TextBox 34"/>
+          <p:cNvSpPr txBox="1"/>
+          <p:nvPr/>
+        </p:nvSpPr>
+        <p:spPr>
+          <a:xfrm>
+            <a:off x="8436597" y="1843200"/>
+            <a:ext cx="3752354" cy="223200"/>
+          </a:xfrm>
+          <a:prstGeom prst="rect">
+            <a:avLst/>
+          </a:prstGeom>
+          <a:noFill/>
+        </p:spPr>
+        <p:txBody>
+          <a:bodyPr wrap="square">
+            <a:spAutoFit/>
+          </a:bodyPr>
+          <a:lstStyle/>
+          <a:p>
+            <a:pPr algn="l"/>
+            <a:r>
+              <a:rPr sz="1050" b="1" i="0">
+                <a:solidFill>
+                  <a:srgbClr val="1C3A5F"/>
+                </a:solidFill>
+              </a:rPr>
+              <a:t>주요 기능</a:t>
+            </a:r>
+          </a:p>
+        </p:txBody>
+      </p:sp>
+      <p:sp>
+        <p:nvSpPr>
+          <p:cNvPr id="36" name="Rectangle 35"/>
+          <p:cNvSpPr/>
+          <p:nvPr/>
+        </p:nvSpPr>
+        <p:spPr>
+          <a:xfrm>
+            <a:off x="108000" y="4179599"/>
+            <a:ext cx="976371" cy="378000"/>
           </a:xfrm>
           <a:prstGeom prst="rect">
             <a:avLst/>
@@ -4415,14 +4399,14 @@
       </p:sp>
       <p:sp>
         <p:nvSpPr>
-          <p:cNvPr id="38" name="TextBox 37"/>
+          <p:cNvPr id="37" name="TextBox 36"/>
           <p:cNvSpPr txBox="1"/>
           <p:nvPr/>
         </p:nvSpPr>
         <p:spPr>
           <a:xfrm>
-            <a:off x="108000" y="4280400"/>
-            <a:ext cx="1494422" cy="162000"/>
+            <a:off x="108000" y="4208399"/>
+            <a:ext cx="976371" cy="162000"/>
           </a:xfrm>
           <a:prstGeom prst="rect">
             <a:avLst/>
@@ -4437,7 +4421,7 @@
           <a:p>
             <a:pPr algn="ctr"/>
             <a:r>
-              <a:rPr sz="900" b="1" i="0">
+              <a:rPr sz="850" b="1" i="0">
                 <a:solidFill>
                   <a:srgbClr val="1C3A5F"/>
                 </a:solidFill>
@@ -4449,14 +4433,14 @@
       </p:sp>
       <p:sp>
         <p:nvSpPr>
-          <p:cNvPr id="39" name="TextBox 38"/>
+          <p:cNvPr id="38" name="TextBox 37"/>
           <p:cNvSpPr txBox="1"/>
           <p:nvPr/>
         </p:nvSpPr>
         <p:spPr>
           <a:xfrm>
-            <a:off x="108000" y="4431600"/>
-            <a:ext cx="1494422" cy="136800"/>
+            <a:off x="108000" y="4359599"/>
+            <a:ext cx="976371" cy="136800"/>
           </a:xfrm>
           <a:prstGeom prst="rect">
             <a:avLst/>
@@ -4483,14 +4467,14 @@
       </p:sp>
       <p:sp>
         <p:nvSpPr>
-          <p:cNvPr id="40" name="Can 39"/>
+          <p:cNvPr id="39" name="Can 38"/>
           <p:cNvSpPr/>
           <p:nvPr/>
         </p:nvSpPr>
         <p:spPr>
           <a:xfrm>
-            <a:off x="1602422" y="4374000"/>
-            <a:ext cx="251999" cy="136800"/>
+            <a:off x="1084371" y="4305600"/>
+            <a:ext cx="198000" cy="125999"/>
           </a:xfrm>
           <a:prstGeom prst="can">
             <a:avLst/>
@@ -4526,14 +4510,14 @@
       </p:sp>
       <p:sp>
         <p:nvSpPr>
-          <p:cNvPr id="41" name="Rectangle 40"/>
+          <p:cNvPr id="40" name="Rectangle 39"/>
           <p:cNvSpPr/>
           <p:nvPr/>
         </p:nvSpPr>
         <p:spPr>
           <a:xfrm>
-            <a:off x="1854421" y="4244400"/>
-            <a:ext cx="1494422" cy="396000"/>
+            <a:off x="1282371" y="4179599"/>
+            <a:ext cx="976371" cy="378000"/>
           </a:xfrm>
           <a:prstGeom prst="rect">
             <a:avLst/>
@@ -4571,14 +4555,14 @@
       </p:sp>
       <p:sp>
         <p:nvSpPr>
-          <p:cNvPr id="42" name="TextBox 41"/>
+          <p:cNvPr id="41" name="TextBox 40"/>
           <p:cNvSpPr txBox="1"/>
           <p:nvPr/>
         </p:nvSpPr>
         <p:spPr>
           <a:xfrm>
-            <a:off x="1854421" y="4280400"/>
-            <a:ext cx="1494422" cy="162000"/>
+            <a:off x="1282371" y="4208399"/>
+            <a:ext cx="976371" cy="162000"/>
           </a:xfrm>
           <a:prstGeom prst="rect">
             <a:avLst/>
@@ -4593,7 +4577,7 @@
           <a:p>
             <a:pPr algn="ctr"/>
             <a:r>
-              <a:rPr sz="900" b="1" i="0">
+              <a:rPr sz="850" b="1" i="0">
                 <a:solidFill>
                   <a:srgbClr val="1C3A5F"/>
                 </a:solidFill>
@@ -4605,14 +4589,14 @@
       </p:sp>
       <p:sp>
         <p:nvSpPr>
-          <p:cNvPr id="43" name="TextBox 42"/>
+          <p:cNvPr id="42" name="TextBox 41"/>
           <p:cNvSpPr txBox="1"/>
           <p:nvPr/>
         </p:nvSpPr>
         <p:spPr>
           <a:xfrm>
-            <a:off x="1854421" y="4431600"/>
-            <a:ext cx="1494422" cy="136800"/>
+            <a:off x="1282371" y="4359599"/>
+            <a:ext cx="976371" cy="136800"/>
           </a:xfrm>
           <a:prstGeom prst="rect">
             <a:avLst/>
@@ -4639,14 +4623,14 @@
       </p:sp>
       <p:sp>
         <p:nvSpPr>
-          <p:cNvPr id="44" name="Can 43"/>
+          <p:cNvPr id="43" name="Can 42"/>
           <p:cNvSpPr/>
           <p:nvPr/>
         </p:nvSpPr>
         <p:spPr>
           <a:xfrm>
-            <a:off x="3348844" y="4374000"/>
-            <a:ext cx="251999" cy="136800"/>
+            <a:off x="2258742" y="4305600"/>
+            <a:ext cx="198000" cy="125999"/>
           </a:xfrm>
           <a:prstGeom prst="can">
             <a:avLst/>
@@ -4682,14 +4666,14 @@
       </p:sp>
       <p:sp>
         <p:nvSpPr>
-          <p:cNvPr id="45" name="Rectangle 44"/>
+          <p:cNvPr id="44" name="Rectangle 43"/>
           <p:cNvSpPr/>
           <p:nvPr/>
         </p:nvSpPr>
         <p:spPr>
           <a:xfrm>
-            <a:off x="3600843" y="4244400"/>
-            <a:ext cx="1494422" cy="396000"/>
+            <a:off x="2456742" y="4179599"/>
+            <a:ext cx="976371" cy="378000"/>
           </a:xfrm>
           <a:prstGeom prst="rect">
             <a:avLst/>
@@ -4727,14 +4711,14 @@
       </p:sp>
       <p:sp>
         <p:nvSpPr>
-          <p:cNvPr id="46" name="TextBox 45"/>
+          <p:cNvPr id="45" name="TextBox 44"/>
           <p:cNvSpPr txBox="1"/>
           <p:nvPr/>
         </p:nvSpPr>
         <p:spPr>
           <a:xfrm>
-            <a:off x="3600843" y="4280400"/>
-            <a:ext cx="1494422" cy="162000"/>
+            <a:off x="2456742" y="4208399"/>
+            <a:ext cx="976371" cy="162000"/>
           </a:xfrm>
           <a:prstGeom prst="rect">
             <a:avLst/>
@@ -4749,26 +4733,27 @@
           <a:p>
             <a:pPr algn="ctr"/>
             <a:r>
-              <a:rPr sz="900" b="1" i="0">
+              <a:rPr sz="850" b="1" i="0">
                 <a:solidFill>
                   <a:srgbClr val="1C3A5F"/>
                 </a:solidFill>
               </a:rPr>
-              <a:t>⚙ FA 분석 자동화 서버</a:t>
-            </a:r>
-          </a:p>
-        </p:txBody>
-      </p:sp>
-      <p:sp>
-        <p:nvSpPr>
-          <p:cNvPr id="47" name="TextBox 46"/>
+              <a:t>⚙ FA 분석
+자동화 서버</a:t>
+            </a:r>
+          </a:p>
+        </p:txBody>
+      </p:sp>
+      <p:sp>
+        <p:nvSpPr>
+          <p:cNvPr id="46" name="TextBox 45"/>
           <p:cNvSpPr txBox="1"/>
           <p:nvPr/>
         </p:nvSpPr>
         <p:spPr>
           <a:xfrm>
-            <a:off x="3600843" y="4431600"/>
-            <a:ext cx="1494422" cy="136800"/>
+            <a:off x="2456742" y="4359599"/>
+            <a:ext cx="976371" cy="136800"/>
           </a:xfrm>
           <a:prstGeom prst="rect">
             <a:avLst/>
@@ -4795,14 +4780,14 @@
       </p:sp>
       <p:sp>
         <p:nvSpPr>
-          <p:cNvPr id="48" name="Can 47"/>
+          <p:cNvPr id="47" name="Can 46"/>
           <p:cNvSpPr/>
           <p:nvPr/>
         </p:nvSpPr>
         <p:spPr>
           <a:xfrm>
-            <a:off x="5095265" y="4374000"/>
-            <a:ext cx="251999" cy="136800"/>
+            <a:off x="3433113" y="4305600"/>
+            <a:ext cx="198000" cy="125999"/>
           </a:xfrm>
           <a:prstGeom prst="can">
             <a:avLst/>
@@ -4838,14 +4823,14 @@
       </p:sp>
       <p:sp>
         <p:nvSpPr>
-          <p:cNvPr id="49" name="Rectangle 48"/>
+          <p:cNvPr id="48" name="Rectangle 47"/>
           <p:cNvSpPr/>
           <p:nvPr/>
         </p:nvSpPr>
         <p:spPr>
           <a:xfrm>
-            <a:off x="5347264" y="4244400"/>
-            <a:ext cx="1494422" cy="396000"/>
+            <a:off x="3631113" y="4179599"/>
+            <a:ext cx="976371" cy="378000"/>
           </a:xfrm>
           <a:prstGeom prst="rect">
             <a:avLst/>
@@ -4883,14 +4868,14 @@
       </p:sp>
       <p:sp>
         <p:nvSpPr>
-          <p:cNvPr id="50" name="TextBox 49"/>
+          <p:cNvPr id="49" name="TextBox 48"/>
           <p:cNvSpPr txBox="1"/>
           <p:nvPr/>
         </p:nvSpPr>
         <p:spPr>
           <a:xfrm>
-            <a:off x="5347264" y="4280400"/>
-            <a:ext cx="1494422" cy="162000"/>
+            <a:off x="3631113" y="4208399"/>
+            <a:ext cx="976371" cy="162000"/>
           </a:xfrm>
           <a:prstGeom prst="rect">
             <a:avLst/>
@@ -4905,26 +4890,27 @@
           <a:p>
             <a:pPr algn="ctr"/>
             <a:r>
-              <a:rPr sz="900" b="1" i="0">
+              <a:rPr sz="850" b="1" i="0">
                 <a:solidFill>
                   <a:srgbClr val="1C3A5F"/>
                 </a:solidFill>
               </a:rPr>
-              <a:t>🗄 빅데이터 포털</a:t>
-            </a:r>
-          </a:p>
-        </p:txBody>
-      </p:sp>
-      <p:sp>
-        <p:nvSpPr>
-          <p:cNvPr id="51" name="TextBox 50"/>
+              <a:t>🗄 빅데이터
+포털</a:t>
+            </a:r>
+          </a:p>
+        </p:txBody>
+      </p:sp>
+      <p:sp>
+        <p:nvSpPr>
+          <p:cNvPr id="50" name="TextBox 49"/>
           <p:cNvSpPr txBox="1"/>
           <p:nvPr/>
         </p:nvSpPr>
         <p:spPr>
           <a:xfrm>
-            <a:off x="5347264" y="4431600"/>
-            <a:ext cx="1494422" cy="136800"/>
+            <a:off x="3631113" y="4359599"/>
+            <a:ext cx="976371" cy="136800"/>
           </a:xfrm>
           <a:prstGeom prst="rect">
             <a:avLst/>
@@ -4951,14 +4937,14 @@
       </p:sp>
       <p:sp>
         <p:nvSpPr>
-          <p:cNvPr id="52" name="Can 51"/>
+          <p:cNvPr id="51" name="Can 50"/>
           <p:cNvSpPr/>
           <p:nvPr/>
         </p:nvSpPr>
         <p:spPr>
           <a:xfrm>
-            <a:off x="6841687" y="4374000"/>
-            <a:ext cx="251999" cy="136800"/>
+            <a:off x="4607484" y="4305600"/>
+            <a:ext cx="198000" cy="125999"/>
           </a:xfrm>
           <a:prstGeom prst="can">
             <a:avLst/>
@@ -4994,14 +4980,14 @@
       </p:sp>
       <p:sp>
         <p:nvSpPr>
-          <p:cNvPr id="53" name="Rectangle 52"/>
+          <p:cNvPr id="52" name="Rectangle 51"/>
           <p:cNvSpPr/>
           <p:nvPr/>
         </p:nvSpPr>
         <p:spPr>
           <a:xfrm>
-            <a:off x="7093686" y="4244400"/>
-            <a:ext cx="1494422" cy="396000"/>
+            <a:off x="4805484" y="4179599"/>
+            <a:ext cx="976371" cy="378000"/>
           </a:xfrm>
           <a:prstGeom prst="rect">
             <a:avLst/>
@@ -5039,14 +5025,14 @@
       </p:sp>
       <p:sp>
         <p:nvSpPr>
-          <p:cNvPr id="54" name="TextBox 53"/>
+          <p:cNvPr id="53" name="TextBox 52"/>
           <p:cNvSpPr txBox="1"/>
           <p:nvPr/>
         </p:nvSpPr>
         <p:spPr>
           <a:xfrm>
-            <a:off x="7093686" y="4280400"/>
-            <a:ext cx="1494422" cy="162000"/>
+            <a:off x="4805484" y="4208399"/>
+            <a:ext cx="976371" cy="162000"/>
           </a:xfrm>
           <a:prstGeom prst="rect">
             <a:avLst/>
@@ -5061,26 +5047,27 @@
           <a:p>
             <a:pPr algn="ctr"/>
             <a:r>
-              <a:rPr sz="900" b="1" i="0">
+              <a:rPr sz="850" b="1" i="0">
                 <a:solidFill>
                   <a:srgbClr val="1C3A5F"/>
                 </a:solidFill>
               </a:rPr>
-              <a:t>📄 분석 결과 생성</a:t>
-            </a:r>
-          </a:p>
-        </p:txBody>
-      </p:sp>
-      <p:sp>
-        <p:nvSpPr>
-          <p:cNvPr id="55" name="TextBox 54"/>
+              <a:t>📄 분석 결과
+생성</a:t>
+            </a:r>
+          </a:p>
+        </p:txBody>
+      </p:sp>
+      <p:sp>
+        <p:nvSpPr>
+          <p:cNvPr id="54" name="TextBox 53"/>
           <p:cNvSpPr txBox="1"/>
           <p:nvPr/>
         </p:nvSpPr>
         <p:spPr>
           <a:xfrm>
-            <a:off x="7093686" y="4431600"/>
-            <a:ext cx="1494422" cy="136800"/>
+            <a:off x="4805484" y="4359599"/>
+            <a:ext cx="976371" cy="136800"/>
           </a:xfrm>
           <a:prstGeom prst="rect">
             <a:avLst/>
@@ -5107,14 +5094,14 @@
       </p:sp>
       <p:sp>
         <p:nvSpPr>
-          <p:cNvPr id="56" name="Can 55"/>
+          <p:cNvPr id="55" name="Can 54"/>
           <p:cNvSpPr/>
           <p:nvPr/>
         </p:nvSpPr>
         <p:spPr>
           <a:xfrm>
-            <a:off x="8588108" y="4374000"/>
-            <a:ext cx="251999" cy="136800"/>
+            <a:off x="5781855" y="4305600"/>
+            <a:ext cx="198000" cy="125999"/>
           </a:xfrm>
           <a:prstGeom prst="can">
             <a:avLst/>
@@ -5150,14 +5137,14 @@
       </p:sp>
       <p:sp>
         <p:nvSpPr>
-          <p:cNvPr id="57" name="Rectangle 56"/>
+          <p:cNvPr id="56" name="Rectangle 55"/>
           <p:cNvSpPr/>
           <p:nvPr/>
         </p:nvSpPr>
         <p:spPr>
           <a:xfrm>
-            <a:off x="8840107" y="4244400"/>
-            <a:ext cx="1494422" cy="396000"/>
+            <a:off x="5979855" y="4179599"/>
+            <a:ext cx="976371" cy="378000"/>
           </a:xfrm>
           <a:prstGeom prst="rect">
             <a:avLst/>
@@ -5195,14 +5182,14 @@
       </p:sp>
       <p:sp>
         <p:nvSpPr>
-          <p:cNvPr id="58" name="TextBox 57"/>
+          <p:cNvPr id="57" name="TextBox 56"/>
           <p:cNvSpPr txBox="1"/>
           <p:nvPr/>
         </p:nvSpPr>
         <p:spPr>
           <a:xfrm>
-            <a:off x="8840107" y="4280400"/>
-            <a:ext cx="1494422" cy="162000"/>
+            <a:off x="5979855" y="4208399"/>
+            <a:ext cx="976371" cy="162000"/>
           </a:xfrm>
           <a:prstGeom prst="rect">
             <a:avLst/>
@@ -5217,7 +5204,7 @@
           <a:p>
             <a:pPr algn="ctr"/>
             <a:r>
-              <a:rPr sz="900" b="1" i="0">
+              <a:rPr sz="850" b="1" i="0">
                 <a:solidFill>
                   <a:srgbClr val="1C3A5F"/>
                 </a:solidFill>
@@ -5229,14 +5216,14 @@
       </p:sp>
       <p:sp>
         <p:nvSpPr>
-          <p:cNvPr id="59" name="TextBox 58"/>
+          <p:cNvPr id="58" name="TextBox 57"/>
           <p:cNvSpPr txBox="1"/>
           <p:nvPr/>
         </p:nvSpPr>
         <p:spPr>
           <a:xfrm>
-            <a:off x="8840107" y="4431600"/>
-            <a:ext cx="1494422" cy="136800"/>
+            <a:off x="5979855" y="4359599"/>
+            <a:ext cx="976371" cy="136800"/>
           </a:xfrm>
           <a:prstGeom prst="rect">
             <a:avLst/>
@@ -5263,14 +5250,14 @@
       </p:sp>
       <p:sp>
         <p:nvSpPr>
-          <p:cNvPr id="60" name="Can 59"/>
+          <p:cNvPr id="59" name="Can 58"/>
           <p:cNvSpPr/>
           <p:nvPr/>
         </p:nvSpPr>
         <p:spPr>
           <a:xfrm>
-            <a:off x="10334530" y="4374000"/>
-            <a:ext cx="251999" cy="136800"/>
+            <a:off x="6956226" y="4305600"/>
+            <a:ext cx="198000" cy="125999"/>
           </a:xfrm>
           <a:prstGeom prst="can">
             <a:avLst/>
@@ -5306,14 +5293,14 @@
       </p:sp>
       <p:sp>
         <p:nvSpPr>
-          <p:cNvPr id="61" name="Rectangle 60"/>
+          <p:cNvPr id="60" name="Rectangle 59"/>
           <p:cNvSpPr/>
           <p:nvPr/>
         </p:nvSpPr>
         <p:spPr>
           <a:xfrm>
-            <a:off x="10586529" y="4244400"/>
-            <a:ext cx="1494422" cy="396000"/>
+            <a:off x="7154226" y="4179599"/>
+            <a:ext cx="976371" cy="378000"/>
           </a:xfrm>
           <a:prstGeom prst="rect">
             <a:avLst/>
@@ -5351,14 +5338,14 @@
       </p:sp>
       <p:sp>
         <p:nvSpPr>
-          <p:cNvPr id="62" name="TextBox 61"/>
+          <p:cNvPr id="61" name="TextBox 60"/>
           <p:cNvSpPr txBox="1"/>
           <p:nvPr/>
         </p:nvSpPr>
         <p:spPr>
           <a:xfrm>
-            <a:off x="10586529" y="4280400"/>
-            <a:ext cx="1494422" cy="162000"/>
+            <a:off x="7154226" y="4208399"/>
+            <a:ext cx="976371" cy="162000"/>
           </a:xfrm>
           <a:prstGeom prst="rect">
             <a:avLst/>
@@ -5373,7 +5360,7 @@
           <a:p>
             <a:pPr algn="ctr"/>
             <a:r>
-              <a:rPr sz="900" b="1" i="0">
+              <a:rPr sz="850" b="1" i="0">
                 <a:solidFill>
                   <a:srgbClr val="1C3A5F"/>
                 </a:solidFill>
@@ -5385,14 +5372,14 @@
       </p:sp>
       <p:sp>
         <p:nvSpPr>
-          <p:cNvPr id="63" name="TextBox 62"/>
+          <p:cNvPr id="62" name="TextBox 61"/>
           <p:cNvSpPr txBox="1"/>
           <p:nvPr/>
         </p:nvSpPr>
         <p:spPr>
           <a:xfrm>
-            <a:off x="10586529" y="4431600"/>
-            <a:ext cx="1494422" cy="136800"/>
+            <a:off x="7154226" y="4359599"/>
+            <a:ext cx="976371" cy="136800"/>
           </a:xfrm>
           <a:prstGeom prst="rect">
             <a:avLst/>
@@ -5419,14 +5406,14 @@
       </p:sp>
       <p:sp>
         <p:nvSpPr>
-          <p:cNvPr id="64" name="Rectangle 63"/>
+          <p:cNvPr id="63" name="Rectangle 62"/>
           <p:cNvSpPr/>
           <p:nvPr/>
         </p:nvSpPr>
         <p:spPr>
           <a:xfrm>
-            <a:off x="0" y="6670800"/>
-            <a:ext cx="12188952" cy="187200"/>
+            <a:off x="8382597" y="2131199"/>
+            <a:ext cx="36000" cy="151200"/>
           </a:xfrm>
           <a:prstGeom prst="rect">
             <a:avLst/>
@@ -5462,14 +5449,14 @@
       </p:sp>
       <p:sp>
         <p:nvSpPr>
-          <p:cNvPr id="65" name="TextBox 64"/>
+          <p:cNvPr id="64" name="TextBox 63"/>
           <p:cNvSpPr txBox="1"/>
           <p:nvPr/>
         </p:nvSpPr>
         <p:spPr>
           <a:xfrm>
-            <a:off x="216000" y="6685200"/>
-            <a:ext cx="9141714" cy="136800"/>
+            <a:off x="8472597" y="2113199"/>
+            <a:ext cx="3608354" cy="151200"/>
           </a:xfrm>
           <a:prstGeom prst="rect">
             <a:avLst/>
@@ -5484,6 +5471,579 @@
           <a:p>
             <a:pPr algn="l"/>
             <a:r>
+              <a:rPr sz="900" b="1" i="0">
+                <a:solidFill>
+                  <a:srgbClr val="404040"/>
+                </a:solidFill>
+              </a:rPr>
+              <a:t>SN 기반 자동 분석</a:t>
+            </a:r>
+          </a:p>
+        </p:txBody>
+      </p:sp>
+      <p:sp>
+        <p:nvSpPr>
+          <p:cNvPr id="65" name="TextBox 64"/>
+          <p:cNvSpPr txBox="1"/>
+          <p:nvPr/>
+        </p:nvSpPr>
+        <p:spPr>
+          <a:xfrm>
+            <a:off x="8472597" y="2260799"/>
+            <a:ext cx="3608354" cy="136800"/>
+          </a:xfrm>
+          <a:prstGeom prst="rect">
+            <a:avLst/>
+          </a:prstGeom>
+          <a:noFill/>
+        </p:spPr>
+        <p:txBody>
+          <a:bodyPr wrap="square">
+            <a:spAutoFit/>
+          </a:bodyPr>
+          <a:lstStyle/>
+          <a:p>
+            <a:pPr algn="l"/>
+            <a:r>
+              <a:rPr sz="800" b="0" i="1">
+                <a:solidFill>
+                  <a:srgbClr val="888888"/>
+                </a:solidFill>
+              </a:rPr>
+              <a:t>Knox Messenger · Adaptive Card · 다중 SN 지원</a:t>
+            </a:r>
+          </a:p>
+        </p:txBody>
+      </p:sp>
+      <p:sp>
+        <p:nvSpPr>
+          <p:cNvPr id="66" name="Rectangle 65"/>
+          <p:cNvSpPr/>
+          <p:nvPr/>
+        </p:nvSpPr>
+        <p:spPr>
+          <a:xfrm>
+            <a:off x="8382597" y="3209399"/>
+            <a:ext cx="3698354" cy="7200"/>
+          </a:xfrm>
+          <a:prstGeom prst="rect">
+            <a:avLst/>
+          </a:prstGeom>
+          <a:solidFill>
+            <a:srgbClr val="D8D8D8"/>
+          </a:solidFill>
+          <a:ln>
+            <a:noFill/>
+          </a:ln>
+        </p:spPr>
+        <p:style>
+          <a:lnRef idx="1">
+            <a:schemeClr val="accent1"/>
+          </a:lnRef>
+          <a:fillRef idx="3">
+            <a:schemeClr val="accent1"/>
+          </a:fillRef>
+          <a:effectRef idx="2">
+            <a:schemeClr val="accent1"/>
+          </a:effectRef>
+          <a:fontRef idx="minor">
+            <a:schemeClr val="lt1"/>
+          </a:fontRef>
+        </p:style>
+        <p:txBody>
+          <a:bodyPr rtlCol="0" anchor="ctr"/>
+          <a:lstStyle/>
+          <a:p>
+            <a:pPr algn="ctr"/>
+          </a:p>
+        </p:txBody>
+      </p:sp>
+      <p:sp>
+        <p:nvSpPr>
+          <p:cNvPr id="67" name="Rectangle 66"/>
+          <p:cNvSpPr/>
+          <p:nvPr/>
+        </p:nvSpPr>
+        <p:spPr>
+          <a:xfrm>
+            <a:off x="8382597" y="3263399"/>
+            <a:ext cx="36000" cy="151200"/>
+          </a:xfrm>
+          <a:prstGeom prst="rect">
+            <a:avLst/>
+          </a:prstGeom>
+          <a:solidFill>
+            <a:srgbClr val="1C3A5F"/>
+          </a:solidFill>
+          <a:ln>
+            <a:noFill/>
+          </a:ln>
+        </p:spPr>
+        <p:style>
+          <a:lnRef idx="1">
+            <a:schemeClr val="accent1"/>
+          </a:lnRef>
+          <a:fillRef idx="3">
+            <a:schemeClr val="accent1"/>
+          </a:fillRef>
+          <a:effectRef idx="2">
+            <a:schemeClr val="accent1"/>
+          </a:effectRef>
+          <a:fontRef idx="minor">
+            <a:schemeClr val="lt1"/>
+          </a:fontRef>
+        </p:style>
+        <p:txBody>
+          <a:bodyPr rtlCol="0" anchor="ctr"/>
+          <a:lstStyle/>
+          <a:p>
+            <a:pPr algn="ctr"/>
+          </a:p>
+        </p:txBody>
+      </p:sp>
+      <p:sp>
+        <p:nvSpPr>
+          <p:cNvPr id="68" name="TextBox 67"/>
+          <p:cNvSpPr txBox="1"/>
+          <p:nvPr/>
+        </p:nvSpPr>
+        <p:spPr>
+          <a:xfrm>
+            <a:off x="8472597" y="3245399"/>
+            <a:ext cx="3608354" cy="151200"/>
+          </a:xfrm>
+          <a:prstGeom prst="rect">
+            <a:avLst/>
+          </a:prstGeom>
+          <a:noFill/>
+        </p:spPr>
+        <p:txBody>
+          <a:bodyPr wrap="square">
+            <a:spAutoFit/>
+          </a:bodyPr>
+          <a:lstStyle/>
+          <a:p>
+            <a:pPr algn="l"/>
+            <a:r>
+              <a:rPr sz="900" b="1" i="0">
+                <a:solidFill>
+                  <a:srgbClr val="404040"/>
+                </a:solidFill>
+              </a:rPr>
+              <a:t>빅데이터 자동 조회</a:t>
+            </a:r>
+          </a:p>
+        </p:txBody>
+      </p:sp>
+      <p:sp>
+        <p:nvSpPr>
+          <p:cNvPr id="69" name="TextBox 68"/>
+          <p:cNvSpPr txBox="1"/>
+          <p:nvPr/>
+        </p:nvSpPr>
+        <p:spPr>
+          <a:xfrm>
+            <a:off x="8472597" y="3392999"/>
+            <a:ext cx="3608354" cy="136800"/>
+          </a:xfrm>
+          <a:prstGeom prst="rect">
+            <a:avLst/>
+          </a:prstGeom>
+          <a:noFill/>
+        </p:spPr>
+        <p:txBody>
+          <a:bodyPr wrap="square">
+            <a:spAutoFit/>
+          </a:bodyPr>
+          <a:lstStyle/>
+          <a:p>
+            <a:pPr algn="l"/>
+            <a:r>
+              <a:rPr sz="800" b="0" i="1">
+                <a:solidFill>
+                  <a:srgbClr val="888888"/>
+                </a:solidFill>
+              </a:rPr>
+              <a:t>포털 자동화 (Playwright) · 병렬 처리</a:t>
+            </a:r>
+          </a:p>
+        </p:txBody>
+      </p:sp>
+      <p:sp>
+        <p:nvSpPr>
+          <p:cNvPr id="70" name="Rectangle 69"/>
+          <p:cNvSpPr/>
+          <p:nvPr/>
+        </p:nvSpPr>
+        <p:spPr>
+          <a:xfrm>
+            <a:off x="8382597" y="4341599"/>
+            <a:ext cx="3698354" cy="7200"/>
+          </a:xfrm>
+          <a:prstGeom prst="rect">
+            <a:avLst/>
+          </a:prstGeom>
+          <a:solidFill>
+            <a:srgbClr val="D8D8D8"/>
+          </a:solidFill>
+          <a:ln>
+            <a:noFill/>
+          </a:ln>
+        </p:spPr>
+        <p:style>
+          <a:lnRef idx="1">
+            <a:schemeClr val="accent1"/>
+          </a:lnRef>
+          <a:fillRef idx="3">
+            <a:schemeClr val="accent1"/>
+          </a:fillRef>
+          <a:effectRef idx="2">
+            <a:schemeClr val="accent1"/>
+          </a:effectRef>
+          <a:fontRef idx="minor">
+            <a:schemeClr val="lt1"/>
+          </a:fontRef>
+        </p:style>
+        <p:txBody>
+          <a:bodyPr rtlCol="0" anchor="ctr"/>
+          <a:lstStyle/>
+          <a:p>
+            <a:pPr algn="ctr"/>
+          </a:p>
+        </p:txBody>
+      </p:sp>
+      <p:sp>
+        <p:nvSpPr>
+          <p:cNvPr id="71" name="Rectangle 70"/>
+          <p:cNvSpPr/>
+          <p:nvPr/>
+        </p:nvSpPr>
+        <p:spPr>
+          <a:xfrm>
+            <a:off x="8382597" y="4395599"/>
+            <a:ext cx="36000" cy="151200"/>
+          </a:xfrm>
+          <a:prstGeom prst="rect">
+            <a:avLst/>
+          </a:prstGeom>
+          <a:solidFill>
+            <a:srgbClr val="1C3A5F"/>
+          </a:solidFill>
+          <a:ln>
+            <a:noFill/>
+          </a:ln>
+        </p:spPr>
+        <p:style>
+          <a:lnRef idx="1">
+            <a:schemeClr val="accent1"/>
+          </a:lnRef>
+          <a:fillRef idx="3">
+            <a:schemeClr val="accent1"/>
+          </a:fillRef>
+          <a:effectRef idx="2">
+            <a:schemeClr val="accent1"/>
+          </a:effectRef>
+          <a:fontRef idx="minor">
+            <a:schemeClr val="lt1"/>
+          </a:fontRef>
+        </p:style>
+        <p:txBody>
+          <a:bodyPr rtlCol="0" anchor="ctr"/>
+          <a:lstStyle/>
+          <a:p>
+            <a:pPr algn="ctr"/>
+          </a:p>
+        </p:txBody>
+      </p:sp>
+      <p:sp>
+        <p:nvSpPr>
+          <p:cNvPr id="72" name="TextBox 71"/>
+          <p:cNvSpPr txBox="1"/>
+          <p:nvPr/>
+        </p:nvSpPr>
+        <p:spPr>
+          <a:xfrm>
+            <a:off x="8472597" y="4377599"/>
+            <a:ext cx="3608354" cy="151200"/>
+          </a:xfrm>
+          <a:prstGeom prst="rect">
+            <a:avLst/>
+          </a:prstGeom>
+          <a:noFill/>
+        </p:spPr>
+        <p:txBody>
+          <a:bodyPr wrap="square">
+            <a:spAutoFit/>
+          </a:bodyPr>
+          <a:lstStyle/>
+          <a:p>
+            <a:pPr algn="l"/>
+            <a:r>
+              <a:rPr sz="900" b="1" i="0">
+                <a:solidFill>
+                  <a:srgbClr val="404040"/>
+                </a:solidFill>
+              </a:rPr>
+              <a:t>분석 리포트 자동 전송</a:t>
+            </a:r>
+          </a:p>
+        </p:txBody>
+      </p:sp>
+      <p:sp>
+        <p:nvSpPr>
+          <p:cNvPr id="73" name="TextBox 72"/>
+          <p:cNvSpPr txBox="1"/>
+          <p:nvPr/>
+        </p:nvSpPr>
+        <p:spPr>
+          <a:xfrm>
+            <a:off x="8472597" y="4525199"/>
+            <a:ext cx="3608354" cy="136800"/>
+          </a:xfrm>
+          <a:prstGeom prst="rect">
+            <a:avLst/>
+          </a:prstGeom>
+          <a:noFill/>
+        </p:spPr>
+        <p:txBody>
+          <a:bodyPr wrap="square">
+            <a:spAutoFit/>
+          </a:bodyPr>
+          <a:lstStyle/>
+          <a:p>
+            <a:pPr algn="l"/>
+            <a:r>
+              <a:rPr sz="800" b="0" i="1">
+                <a:solidFill>
+                  <a:srgbClr val="888888"/>
+                </a:solidFill>
+              </a:rPr>
+              <a:t>PDF / HTML 생성 → Knox Messenger 전달</a:t>
+            </a:r>
+          </a:p>
+        </p:txBody>
+      </p:sp>
+      <p:sp>
+        <p:nvSpPr>
+          <p:cNvPr id="74" name="Rectangle 73"/>
+          <p:cNvSpPr/>
+          <p:nvPr/>
+        </p:nvSpPr>
+        <p:spPr>
+          <a:xfrm>
+            <a:off x="8382597" y="5473799"/>
+            <a:ext cx="3698354" cy="7200"/>
+          </a:xfrm>
+          <a:prstGeom prst="rect">
+            <a:avLst/>
+          </a:prstGeom>
+          <a:solidFill>
+            <a:srgbClr val="D8D8D8"/>
+          </a:solidFill>
+          <a:ln>
+            <a:noFill/>
+          </a:ln>
+        </p:spPr>
+        <p:style>
+          <a:lnRef idx="1">
+            <a:schemeClr val="accent1"/>
+          </a:lnRef>
+          <a:fillRef idx="3">
+            <a:schemeClr val="accent1"/>
+          </a:fillRef>
+          <a:effectRef idx="2">
+            <a:schemeClr val="accent1"/>
+          </a:effectRef>
+          <a:fontRef idx="minor">
+            <a:schemeClr val="lt1"/>
+          </a:fontRef>
+        </p:style>
+        <p:txBody>
+          <a:bodyPr rtlCol="0" anchor="ctr"/>
+          <a:lstStyle/>
+          <a:p>
+            <a:pPr algn="ctr"/>
+          </a:p>
+        </p:txBody>
+      </p:sp>
+      <p:sp>
+        <p:nvSpPr>
+          <p:cNvPr id="75" name="Rectangle 74"/>
+          <p:cNvSpPr/>
+          <p:nvPr/>
+        </p:nvSpPr>
+        <p:spPr>
+          <a:xfrm>
+            <a:off x="8382597" y="5527799"/>
+            <a:ext cx="36000" cy="151200"/>
+          </a:xfrm>
+          <a:prstGeom prst="rect">
+            <a:avLst/>
+          </a:prstGeom>
+          <a:solidFill>
+            <a:srgbClr val="1C3A5F"/>
+          </a:solidFill>
+          <a:ln>
+            <a:noFill/>
+          </a:ln>
+        </p:spPr>
+        <p:style>
+          <a:lnRef idx="1">
+            <a:schemeClr val="accent1"/>
+          </a:lnRef>
+          <a:fillRef idx="3">
+            <a:schemeClr val="accent1"/>
+          </a:fillRef>
+          <a:effectRef idx="2">
+            <a:schemeClr val="accent1"/>
+          </a:effectRef>
+          <a:fontRef idx="minor">
+            <a:schemeClr val="lt1"/>
+          </a:fontRef>
+        </p:style>
+        <p:txBody>
+          <a:bodyPr rtlCol="0" anchor="ctr"/>
+          <a:lstStyle/>
+          <a:p>
+            <a:pPr algn="ctr"/>
+          </a:p>
+        </p:txBody>
+      </p:sp>
+      <p:sp>
+        <p:nvSpPr>
+          <p:cNvPr id="76" name="TextBox 75"/>
+          <p:cNvSpPr txBox="1"/>
+          <p:nvPr/>
+        </p:nvSpPr>
+        <p:spPr>
+          <a:xfrm>
+            <a:off x="8472597" y="5509799"/>
+            <a:ext cx="3608354" cy="151200"/>
+          </a:xfrm>
+          <a:prstGeom prst="rect">
+            <a:avLst/>
+          </a:prstGeom>
+          <a:noFill/>
+        </p:spPr>
+        <p:txBody>
+          <a:bodyPr wrap="square">
+            <a:spAutoFit/>
+          </a:bodyPr>
+          <a:lstStyle/>
+          <a:p>
+            <a:pPr algn="l"/>
+            <a:r>
+              <a:rPr sz="900" b="1" i="0">
+                <a:solidFill>
+                  <a:srgbClr val="404040"/>
+                </a:solidFill>
+              </a:rPr>
+              <a:t>24/7 무인 대응</a:t>
+            </a:r>
+          </a:p>
+        </p:txBody>
+      </p:sp>
+      <p:sp>
+        <p:nvSpPr>
+          <p:cNvPr id="77" name="TextBox 76"/>
+          <p:cNvSpPr txBox="1"/>
+          <p:nvPr/>
+        </p:nvSpPr>
+        <p:spPr>
+          <a:xfrm>
+            <a:off x="8472597" y="5657399"/>
+            <a:ext cx="3608354" cy="136800"/>
+          </a:xfrm>
+          <a:prstGeom prst="rect">
+            <a:avLst/>
+          </a:prstGeom>
+          <a:noFill/>
+        </p:spPr>
+        <p:txBody>
+          <a:bodyPr wrap="square">
+            <a:spAutoFit/>
+          </a:bodyPr>
+          <a:lstStyle/>
+          <a:p>
+            <a:pPr algn="l"/>
+            <a:r>
+              <a:rPr sz="800" b="0" i="1">
+                <a:solidFill>
+                  <a:srgbClr val="888888"/>
+                </a:solidFill>
+              </a:rPr>
+              <a:t>주말·야간 자동 처리 · 오류 알림</a:t>
+            </a:r>
+          </a:p>
+        </p:txBody>
+      </p:sp>
+      <p:sp>
+        <p:nvSpPr>
+          <p:cNvPr id="78" name="Rectangle 77"/>
+          <p:cNvSpPr/>
+          <p:nvPr/>
+        </p:nvSpPr>
+        <p:spPr>
+          <a:xfrm>
+            <a:off x="0" y="6670800"/>
+            <a:ext cx="12188952" cy="187200"/>
+          </a:xfrm>
+          <a:prstGeom prst="rect">
+            <a:avLst/>
+          </a:prstGeom>
+          <a:solidFill>
+            <a:srgbClr val="1C3A5F"/>
+          </a:solidFill>
+          <a:ln>
+            <a:noFill/>
+          </a:ln>
+        </p:spPr>
+        <p:style>
+          <a:lnRef idx="1">
+            <a:schemeClr val="accent1"/>
+          </a:lnRef>
+          <a:fillRef idx="3">
+            <a:schemeClr val="accent1"/>
+          </a:fillRef>
+          <a:effectRef idx="2">
+            <a:schemeClr val="accent1"/>
+          </a:effectRef>
+          <a:fontRef idx="minor">
+            <a:schemeClr val="lt1"/>
+          </a:fontRef>
+        </p:style>
+        <p:txBody>
+          <a:bodyPr rtlCol="0" anchor="ctr"/>
+          <a:lstStyle/>
+          <a:p>
+            <a:pPr algn="ctr"/>
+          </a:p>
+        </p:txBody>
+      </p:sp>
+      <p:sp>
+        <p:nvSpPr>
+          <p:cNvPr id="79" name="TextBox 78"/>
+          <p:cNvSpPr txBox="1"/>
+          <p:nvPr/>
+        </p:nvSpPr>
+        <p:spPr>
+          <a:xfrm>
+            <a:off x="216000" y="6685200"/>
+            <a:ext cx="9141714" cy="136800"/>
+          </a:xfrm>
+          <a:prstGeom prst="rect">
+            <a:avLst/>
+          </a:prstGeom>
+          <a:noFill/>
+        </p:spPr>
+        <p:txBody>
+          <a:bodyPr wrap="square">
+            <a:spAutoFit/>
+          </a:bodyPr>
+          <a:lstStyle/>
+          <a:p>
+            <a:pPr algn="l"/>
+            <a:r>
               <a:rPr sz="750" b="0" i="0">
                 <a:solidFill>
                   <a:srgbClr val="A0B2CC"/>
@@ -5496,7 +6056,7 @@
       </p:sp>
       <p:sp>
         <p:nvSpPr>
-          <p:cNvPr id="66" name="TextBox 65"/>
+          <p:cNvPr id="80" name="TextBox 79"/>
           <p:cNvSpPr txBox="1"/>
           <p:nvPr/>
         </p:nvSpPr>
